--- a/poster.pptx
+++ b/poster.pptx
@@ -6,7 +6,6 @@
   </p:sldMasterIdLst>
   <p:sldIdLst>
     <p:sldId id="256" r:id="rId2"/>
-    <p:sldId id="257" r:id="rId3"/>
   </p:sldIdLst>
   <p:sldSz cx="30275213" cy="21383625"/>
   <p:notesSz cx="6858000" cy="9144000"/>
@@ -1400,15 +1399,27 @@
             <a:rPr lang="en-GB" sz="1400" dirty="0"/>
           </a:br>
           <a:r>
+            <a:rPr lang="en-GB" sz="1400" b="0" i="0">
+              <a:latin typeface="Cambria Math" panose="02040503050406030204" pitchFamily="18" charset="0"/>
+            </a:rPr>
+            <a:t>𝐶_𝐻</a:t>
+          </a:r>
+          <a:r>
             <a:rPr lang="en-GB" sz="1400" dirty="0"/>
-            <a:t>CH​=−0.30 s/lap</a:t>
+            <a:t>​= −0.30 s/lap</a:t>
           </a:r>
           <a:br>
             <a:rPr lang="en-GB" sz="1400" dirty="0"/>
           </a:br>
           <a:r>
+            <a:rPr lang="en-GB" sz="1400" b="0" i="0">
+              <a:latin typeface="Cambria Math" panose="02040503050406030204" pitchFamily="18" charset="0"/>
+            </a:rPr>
+            <a:t>𝐺(𝑛+1)</a:t>
+          </a:r>
+          <a:r>
             <a:rPr lang="en-GB" sz="1400" dirty="0"/>
-            <a:t>G(n+1)=−0.513 s</a:t>
+            <a:t> =−0.513 s</a:t>
           </a:r>
           <a:br>
             <a:rPr lang="en-GB" sz="1400" dirty="0"/>
@@ -1532,15 +1543,27 @@
             <a:rPr lang="en-GB" sz="1400" dirty="0"/>
           </a:br>
           <a:r>
+            <a:rPr lang="en-GB" sz="1400" b="0" i="0">
+              <a:latin typeface="Cambria Math" panose="02040503050406030204" pitchFamily="18" charset="0"/>
+            </a:rPr>
+            <a:t>𝐶_𝐻</a:t>
+          </a:r>
+          <a:r>
             <a:rPr lang="en-GB" sz="1400" dirty="0"/>
-            <a:t>CH​=0.00 s/lap</a:t>
+            <a:t>=0.00 s/lap</a:t>
           </a:r>
           <a:br>
             <a:rPr lang="en-GB" sz="1400" dirty="0"/>
           </a:br>
           <a:r>
+            <a:rPr lang="en-GB" sz="1400" b="0" i="0">
+              <a:latin typeface="Cambria Math" panose="02040503050406030204" pitchFamily="18" charset="0"/>
+            </a:rPr>
+            <a:t>𝐺(𝑛+1)</a:t>
+          </a:r>
+          <a:r>
             <a:rPr lang="en-GB" sz="1400" dirty="0"/>
-            <a:t>G(n+1)=−0.213 s</a:t>
+            <a:t> =−0.213 s</a:t>
           </a:r>
           <a:br>
             <a:rPr lang="en-GB" sz="1400" dirty="0"/>
@@ -1664,8 +1687,14 @@
             <a:rPr lang="en-GB" sz="1400" dirty="0"/>
           </a:br>
           <a:r>
+            <a:rPr lang="en-GB" sz="1400" b="0" i="0">
+              <a:latin typeface="Cambria Math" panose="02040503050406030204" pitchFamily="18" charset="0"/>
+            </a:rPr>
+            <a:t>𝐶_𝐻</a:t>
+          </a:r>
+          <a:r>
             <a:rPr lang="en-GB" sz="1400" dirty="0"/>
-            <a:t>CH​≈−0.037 s/lap</a:t>
+            <a:t> ≈−0.037 s/lap</a:t>
           </a:r>
           <a:endParaRPr lang="en-GB" sz="1400" kern="1200" dirty="0"/>
         </a:p>
@@ -5053,8 +5082,8 @@
         </p:nvSpPr>
         <p:spPr>
           <a:xfrm>
-            <a:off x="447676" y="8568870"/>
-            <a:ext cx="11161732" cy="6306013"/>
+            <a:off x="174106" y="7522261"/>
+            <a:ext cx="8778327" cy="7805339"/>
           </a:xfrm>
           <a:prstGeom prst="rect">
             <a:avLst/>
@@ -5093,71 +5122,122 @@
           </a:p>
         </p:txBody>
       </p:sp>
-      <p:sp>
-        <p:nvSpPr>
-          <p:cNvPr id="4" name="Rectangle 3">
-            <a:extLst>
-              <a:ext uri="{FF2B5EF4-FFF2-40B4-BE49-F238E27FC236}">
-                <a16:creationId xmlns:a16="http://schemas.microsoft.com/office/drawing/2014/main" id="{8559F5E1-8FFE-4CA6-9E2E-8FF7CBE63227}"/>
-              </a:ext>
-            </a:extLst>
-          </p:cNvPr>
-          <p:cNvSpPr/>
-          <p:nvPr/>
-        </p:nvSpPr>
-        <p:spPr>
-          <a:xfrm>
-            <a:off x="0" y="0"/>
-            <a:ext cx="30275213" cy="2989751"/>
-          </a:xfrm>
-          <a:prstGeom prst="rect">
-            <a:avLst/>
-          </a:prstGeom>
-          <a:gradFill>
-            <a:gsLst>
-              <a:gs pos="0">
+      <mc:AlternateContent xmlns:mc="http://schemas.openxmlformats.org/markup-compatibility/2006">
+        <mc:Choice xmlns:a14="http://schemas.microsoft.com/office/drawing/2010/main" Requires="a14">
+          <p:sp>
+            <p:nvSpPr>
+              <p:cNvPr id="4" name="Rectangle 3">
+                <a:extLst>
+                  <a:ext uri="{FF2B5EF4-FFF2-40B4-BE49-F238E27FC236}">
+                    <a16:creationId xmlns:a16="http://schemas.microsoft.com/office/drawing/2014/main" id="{8559F5E1-8FFE-4CA6-9E2E-8FF7CBE63227}"/>
+                  </a:ext>
+                </a:extLst>
+              </p:cNvPr>
+              <p:cNvSpPr/>
+              <p:nvPr/>
+            </p:nvSpPr>
+            <p:spPr>
+              <a:xfrm>
+                <a:off x="0" y="1"/>
+                <a:ext cx="30275213" cy="2338202"/>
+              </a:xfrm>
+              <a:prstGeom prst="rect">
+                <a:avLst/>
+              </a:prstGeom>
+              <a:gradFill>
+                <a:gsLst>
+                  <a:gs pos="0">
+                    <a:schemeClr val="accent1">
+                      <a:lumMod val="75000"/>
+                    </a:schemeClr>
+                  </a:gs>
+                  <a:gs pos="100000">
+                    <a:schemeClr val="accent1">
+                      <a:lumMod val="75000"/>
+                      <a:alpha val="70000"/>
+                    </a:schemeClr>
+                  </a:gs>
+                </a:gsLst>
+                <a:lin ang="18000000" scaled="0"/>
+              </a:gradFill>
+              <a:ln>
+                <a:noFill/>
+              </a:ln>
+            </p:spPr>
+            <p:style>
+              <a:lnRef idx="2">
                 <a:schemeClr val="accent1">
-                  <a:lumMod val="75000"/>
+                  <a:shade val="15000"/>
                 </a:schemeClr>
-              </a:gs>
-              <a:gs pos="100000">
-                <a:schemeClr val="accent1">
-                  <a:lumMod val="75000"/>
-                  <a:alpha val="70000"/>
-                </a:schemeClr>
-              </a:gs>
-            </a:gsLst>
-            <a:lin ang="18000000" scaled="0"/>
-          </a:gradFill>
-          <a:ln>
-            <a:noFill/>
-          </a:ln>
-        </p:spPr>
-        <p:style>
-          <a:lnRef idx="2">
-            <a:schemeClr val="accent1">
-              <a:shade val="15000"/>
-            </a:schemeClr>
-          </a:lnRef>
-          <a:fillRef idx="1">
-            <a:schemeClr val="accent1"/>
-          </a:fillRef>
-          <a:effectRef idx="0">
-            <a:schemeClr val="accent1"/>
-          </a:effectRef>
-          <a:fontRef idx="minor">
-            <a:schemeClr val="lt1"/>
-          </a:fontRef>
-        </p:style>
-        <p:txBody>
-          <a:bodyPr rtlCol="0" anchor="ctr"/>
-          <a:lstStyle/>
-          <a:p>
-            <a:pPr algn="ctr"/>
-            <a:endParaRPr lang="en-US"/>
-          </a:p>
-        </p:txBody>
-      </p:sp>
+              </a:lnRef>
+              <a:fillRef idx="1">
+                <a:schemeClr val="accent1"/>
+              </a:fillRef>
+              <a:effectRef idx="0">
+                <a:schemeClr val="accent1"/>
+              </a:effectRef>
+              <a:fontRef idx="minor">
+                <a:schemeClr val="lt1"/>
+              </a:fontRef>
+            </p:style>
+            <p:txBody>
+              <a:bodyPr rtlCol="0" anchor="ctr"/>
+              <a:lstStyle/>
+              <a:p>
+                <a:pPr algn="ctr"/>
+                <a:endParaRPr lang="en-US"/>
+              </a:p>
+            </p:txBody>
+          </p:sp>
+        </mc:Choice>
+        <mc:Fallback>
+          <p:sp>
+            <p:nvSpPr>
+              <p:cNvPr id="4" name="Rectangle 3">
+                <a:extLst>
+                  <a:ext uri="{FF2B5EF4-FFF2-40B4-BE49-F238E27FC236}">
+                    <a16:creationId xmlns:a16="http://schemas.microsoft.com/office/drawing/2014/main" id="{8559F5E1-8FFE-4CA6-9E2E-8FF7CBE63227}"/>
+                  </a:ext>
+                </a:extLst>
+              </p:cNvPr>
+              <p:cNvSpPr>
+                <a:spLocks noRot="1" noChangeAspect="1" noMove="1" noResize="1" noEditPoints="1" noAdjustHandles="1" noChangeArrowheads="1" noChangeShapeType="1" noTextEdit="1"/>
+              </p:cNvSpPr>
+              <p:nvPr/>
+            </p:nvSpPr>
+            <p:spPr>
+              <a:xfrm>
+                <a:off x="0" y="1"/>
+                <a:ext cx="30275213" cy="2338202"/>
+              </a:xfrm>
+              <a:prstGeom prst="rect">
+                <a:avLst/>
+              </a:prstGeom>
+              <a:blipFill>
+                <a:blip r:embed="rId2"/>
+                <a:stretch>
+                  <a:fillRect l="-658" t="-571"/>
+                </a:stretch>
+              </a:blipFill>
+              <a:ln>
+                <a:noFill/>
+              </a:ln>
+            </p:spPr>
+            <p:txBody>
+              <a:bodyPr/>
+              <a:lstStyle/>
+              <a:p>
+                <a:r>
+                  <a:rPr lang="en-GB">
+                    <a:noFill/>
+                  </a:rPr>
+                  <a:t> </a:t>
+                </a:r>
+              </a:p>
+            </p:txBody>
+          </p:sp>
+        </mc:Fallback>
+      </mc:AlternateContent>
       <p:grpSp>
         <p:nvGrpSpPr>
           <p:cNvPr id="12" name="Group 11">
@@ -5193,56 +5273,107 @@
             <a:lin ang="21594000" scaled="0"/>
           </a:gradFill>
         </p:grpSpPr>
-        <p:sp>
-          <p:nvSpPr>
-            <p:cNvPr id="5" name="Hexagon 4">
-              <a:extLst>
-                <a:ext uri="{FF2B5EF4-FFF2-40B4-BE49-F238E27FC236}">
-                  <a16:creationId xmlns:a16="http://schemas.microsoft.com/office/drawing/2014/main" id="{64DA78B6-E60B-8912-1D40-D22FF2B1B78E}"/>
-                </a:ext>
-              </a:extLst>
-            </p:cNvPr>
-            <p:cNvSpPr/>
-            <p:nvPr/>
-          </p:nvSpPr>
-          <p:spPr>
-            <a:xfrm>
-              <a:off x="13830300" y="5013960"/>
-              <a:ext cx="2439619" cy="2103120"/>
-            </a:xfrm>
-            <a:prstGeom prst="hexagon">
-              <a:avLst/>
-            </a:prstGeom>
-            <a:grpFill/>
-            <a:ln>
-              <a:noFill/>
-            </a:ln>
-          </p:spPr>
-          <p:style>
-            <a:lnRef idx="2">
-              <a:schemeClr val="accent1">
-                <a:shade val="15000"/>
-              </a:schemeClr>
-            </a:lnRef>
-            <a:fillRef idx="1">
-              <a:schemeClr val="accent1"/>
-            </a:fillRef>
-            <a:effectRef idx="0">
-              <a:schemeClr val="accent1"/>
-            </a:effectRef>
-            <a:fontRef idx="minor">
-              <a:schemeClr val="lt1"/>
-            </a:fontRef>
-          </p:style>
-          <p:txBody>
-            <a:bodyPr rtlCol="0" anchor="ctr"/>
-            <a:lstStyle/>
-            <a:p>
-              <a:pPr algn="ctr"/>
-              <a:endParaRPr lang="en-US"/>
-            </a:p>
-          </p:txBody>
-        </p:sp>
+        <mc:AlternateContent xmlns:mc="http://schemas.openxmlformats.org/markup-compatibility/2006">
+          <mc:Choice xmlns:a14="http://schemas.microsoft.com/office/drawing/2010/main" Requires="a14">
+            <p:sp>
+              <p:nvSpPr>
+                <p:cNvPr id="5" name="Hexagon 4">
+                  <a:extLst>
+                    <a:ext uri="{FF2B5EF4-FFF2-40B4-BE49-F238E27FC236}">
+                      <a16:creationId xmlns:a16="http://schemas.microsoft.com/office/drawing/2014/main" id="{64DA78B6-E60B-8912-1D40-D22FF2B1B78E}"/>
+                    </a:ext>
+                  </a:extLst>
+                </p:cNvPr>
+                <p:cNvSpPr/>
+                <p:nvPr/>
+              </p:nvSpPr>
+              <p:spPr>
+                <a:xfrm>
+                  <a:off x="13830300" y="5013960"/>
+                  <a:ext cx="2439619" cy="2103120"/>
+                </a:xfrm>
+                <a:prstGeom prst="hexagon">
+                  <a:avLst/>
+                </a:prstGeom>
+                <a:grpFill/>
+                <a:ln>
+                  <a:noFill/>
+                </a:ln>
+              </p:spPr>
+              <p:style>
+                <a:lnRef idx="2">
+                  <a:schemeClr val="accent1">
+                    <a:shade val="15000"/>
+                  </a:schemeClr>
+                </a:lnRef>
+                <a:fillRef idx="1">
+                  <a:schemeClr val="accent1"/>
+                </a:fillRef>
+                <a:effectRef idx="0">
+                  <a:schemeClr val="accent1"/>
+                </a:effectRef>
+                <a:fontRef idx="minor">
+                  <a:schemeClr val="lt1"/>
+                </a:fontRef>
+              </p:style>
+              <p:txBody>
+                <a:bodyPr rtlCol="0" anchor="ctr"/>
+                <a:lstStyle/>
+                <a:p>
+                  <a:pPr algn="ctr"/>
+                  <a:endParaRPr lang="en-US"/>
+                </a:p>
+              </p:txBody>
+            </p:sp>
+          </mc:Choice>
+          <mc:Fallback>
+            <p:sp>
+              <p:nvSpPr>
+                <p:cNvPr id="5" name="Hexagon 4">
+                  <a:extLst>
+                    <a:ext uri="{FF2B5EF4-FFF2-40B4-BE49-F238E27FC236}">
+                      <a16:creationId xmlns:a16="http://schemas.microsoft.com/office/drawing/2014/main" id="{64DA78B6-E60B-8912-1D40-D22FF2B1B78E}"/>
+                    </a:ext>
+                  </a:extLst>
+                </p:cNvPr>
+                <p:cNvSpPr>
+                  <a:spLocks noRot="1" noChangeAspect="1" noMove="1" noResize="1" noEditPoints="1" noAdjustHandles="1" noChangeArrowheads="1" noChangeShapeType="1" noTextEdit="1"/>
+                </p:cNvSpPr>
+                <p:nvPr/>
+              </p:nvSpPr>
+              <p:spPr>
+                <a:xfrm>
+                  <a:off x="13830300" y="5013960"/>
+                  <a:ext cx="2439619" cy="2103120"/>
+                </a:xfrm>
+                <a:prstGeom prst="hexagon">
+                  <a:avLst/>
+                </a:prstGeom>
+                <a:blipFill>
+                  <a:blip r:embed="rId3"/>
+                  <a:stretch>
+                    <a:fillRect l="-645" t="-1923"/>
+                  </a:stretch>
+                </a:blipFill>
+                <a:ln>
+                  <a:noFill/>
+                </a:ln>
+              </p:spPr>
+              <p:txBody>
+                <a:bodyPr/>
+                <a:lstStyle/>
+                <a:p>
+                  <a:r>
+                    <a:rPr lang="en-GB">
+                      <a:noFill/>
+                    </a:rPr>
+                    <a:t> </a:t>
+                  </a:r>
+                </a:p>
+              </p:txBody>
+            </p:sp>
+          </mc:Fallback>
+        </mc:AlternateContent>
         <p:sp>
           <p:nvSpPr>
             <p:cNvPr id="6" name="Hexagon 5">
@@ -5558,8 +5689,8 @@
         </p:nvSpPr>
         <p:spPr>
           <a:xfrm>
-            <a:off x="642177" y="428517"/>
-            <a:ext cx="18837947" cy="1754326"/>
+            <a:off x="372011" y="220697"/>
+            <a:ext cx="20510652" cy="1938992"/>
           </a:xfrm>
           <a:prstGeom prst="rect">
             <a:avLst/>
@@ -5573,7 +5704,7 @@
           <a:lstStyle/>
           <a:p>
             <a:r>
-              <a:rPr lang="en-GB" sz="5400" dirty="0">
+              <a:rPr lang="en-GB" sz="6000" dirty="0">
                 <a:solidFill>
                   <a:schemeClr val="bg1"/>
                 </a:solidFill>
@@ -5582,7 +5713,7 @@
               </a:rPr>
               <a:t>Undercut Analyser: Predicting Undercut Opportunities From Historic Lap Time Data in Formula One</a:t>
             </a:r>
-            <a:endParaRPr lang="en-US" sz="5400" dirty="0">
+            <a:endParaRPr lang="en-US" sz="6000" dirty="0">
               <a:solidFill>
                 <a:schemeClr val="bg1"/>
               </a:solidFill>
@@ -5606,8 +5737,8 @@
         </p:nvSpPr>
         <p:spPr>
           <a:xfrm>
-            <a:off x="642177" y="2241668"/>
-            <a:ext cx="11955869" cy="584775"/>
+            <a:off x="22566409" y="1546327"/>
+            <a:ext cx="7199821" cy="584775"/>
           </a:xfrm>
           <a:prstGeom prst="rect">
             <a:avLst/>
@@ -5647,8 +5778,8 @@
         </p:nvSpPr>
         <p:spPr>
           <a:xfrm>
-            <a:off x="447675" y="3475893"/>
-            <a:ext cx="11161733" cy="4876684"/>
+            <a:off x="174106" y="2474534"/>
+            <a:ext cx="8778327" cy="4876684"/>
           </a:xfrm>
           <a:prstGeom prst="rect">
             <a:avLst/>
@@ -5701,8 +5832,8 @@
         </p:nvSpPr>
         <p:spPr>
           <a:xfrm>
-            <a:off x="572310" y="3617235"/>
-            <a:ext cx="6236411" cy="707886"/>
+            <a:off x="278016" y="2514799"/>
+            <a:ext cx="6236411" cy="646331"/>
           </a:xfrm>
           <a:prstGeom prst="rect">
             <a:avLst/>
@@ -5716,7 +5847,7 @@
           <a:lstStyle/>
           <a:p>
             <a:r>
-              <a:rPr lang="en-US" sz="4000" dirty="0">
+              <a:rPr lang="en-US" sz="3600" dirty="0">
                 <a:solidFill>
                   <a:schemeClr val="accent1"/>
                 </a:solidFill>
@@ -5742,8 +5873,8 @@
         </p:nvSpPr>
         <p:spPr>
           <a:xfrm>
-            <a:off x="688655" y="4426500"/>
-            <a:ext cx="10320055" cy="2407390"/>
+            <a:off x="304800" y="3333541"/>
+            <a:ext cx="8465577" cy="2569999"/>
           </a:xfrm>
           <a:prstGeom prst="rect">
             <a:avLst/>
@@ -5765,15 +5896,15 @@
               </a:spcAft>
             </a:pPr>
             <a:r>
-              <a:rPr lang="en-GB" sz="2400" dirty="0">
+              <a:rPr lang="en-GB" sz="2200" dirty="0">
                 <a:solidFill>
                   <a:srgbClr val="2D343C"/>
                 </a:solidFill>
               </a:rPr>
-              <a:t>An undercut pits the attacking driver before a competitor ahead, using fresher-tyre performance to try to gain track position once the target pits themself. </a:t>
+              <a:t>An undercut pits the attacking driver before a competitor ahead, using fresher-tyre performance to try to gain track position once the target pits themselves [1]. </a:t>
             </a:r>
             <a:r>
-              <a:rPr lang="en-GB" sz="2400" b="1" dirty="0">
+              <a:rPr lang="en-GB" sz="2200" b="1" dirty="0">
                 <a:solidFill>
                   <a:srgbClr val="141F30"/>
                 </a:solidFill>
@@ -5781,12 +5912,12 @@
               <a:t>The decision is a relative-performance problem: the time gained must be large enough to overcome the initial gap. </a:t>
             </a:r>
             <a:r>
-              <a:rPr lang="en-GB" sz="2400" dirty="0">
+              <a:rPr lang="en-GB" sz="2200" dirty="0">
                 <a:solidFill>
                   <a:srgbClr val="2D343C"/>
                 </a:solidFill>
               </a:rPr>
-              <a:t>Aim: develop, implement and validate a deterministic model using historic F1 data and configurable engineering parameters.</a:t>
+              <a:t>Aim: develop, implement and validate a deterministic model using historic F1 data and configurable engineering parameters. </a:t>
             </a:r>
           </a:p>
         </p:txBody>
@@ -5805,8 +5936,8 @@
         </p:nvSpPr>
         <p:spPr>
           <a:xfrm>
-            <a:off x="495083" y="8746188"/>
-            <a:ext cx="6236411" cy="707886"/>
+            <a:off x="201961" y="7663241"/>
+            <a:ext cx="6236411" cy="646331"/>
           </a:xfrm>
           <a:prstGeom prst="rect">
             <a:avLst/>
@@ -5820,7 +5951,7 @@
           <a:lstStyle/>
           <a:p>
             <a:r>
-              <a:rPr lang="en-US" sz="4000" dirty="0">
+              <a:rPr lang="en-US" sz="3600" dirty="0">
                 <a:solidFill>
                   <a:schemeClr val="accent1"/>
                 </a:solidFill>
@@ -5846,10 +5977,10 @@
         </p:nvGrpSpPr>
         <p:grpSpPr>
           <a:xfrm>
-            <a:off x="622919" y="6913238"/>
-            <a:ext cx="10895555" cy="1231240"/>
-            <a:chOff x="874413" y="12395592"/>
-            <a:chExt cx="10895555" cy="1231240"/>
+            <a:off x="304799" y="5942717"/>
+            <a:ext cx="8465577" cy="1220225"/>
+            <a:chOff x="874413" y="12420412"/>
+            <a:chExt cx="8331899" cy="1220225"/>
           </a:xfrm>
         </p:grpSpPr>
         <p:grpSp>
@@ -5866,10 +5997,10 @@
           </p:nvGrpSpPr>
           <p:grpSpPr>
             <a:xfrm>
-              <a:off x="874413" y="12395592"/>
-              <a:ext cx="10895555" cy="1231240"/>
-              <a:chOff x="528638" y="6746876"/>
-              <a:chExt cx="2833687" cy="787399"/>
+              <a:off x="874413" y="12420412"/>
+              <a:ext cx="8331899" cy="1207109"/>
+              <a:chOff x="528638" y="6762751"/>
+              <a:chExt cx="2166938" cy="771967"/>
             </a:xfrm>
           </p:grpSpPr>
           <p:sp>
@@ -5891,8 +6022,8 @@
             </p:nvSpPr>
             <p:spPr bwMode="auto">
               <a:xfrm>
-                <a:off x="2509838" y="6746876"/>
-                <a:ext cx="839788" cy="768350"/>
+                <a:off x="1934876" y="6766368"/>
+                <a:ext cx="760700" cy="768350"/>
               </a:xfrm>
               <a:custGeom>
                 <a:avLst/>
@@ -5999,8 +6130,8 @@
             </p:nvSpPr>
             <p:spPr bwMode="auto">
               <a:xfrm>
-                <a:off x="1847851" y="6762751"/>
-                <a:ext cx="838200" cy="768350"/>
+                <a:off x="1474576" y="6762751"/>
+                <a:ext cx="671675" cy="768350"/>
               </a:xfrm>
               <a:custGeom>
                 <a:avLst/>
@@ -6104,8 +6235,8 @@
             </p:nvSpPr>
             <p:spPr bwMode="auto">
               <a:xfrm>
-                <a:off x="1185863" y="6762751"/>
-                <a:ext cx="841375" cy="768350"/>
+                <a:off x="1008258" y="6762751"/>
+                <a:ext cx="615993" cy="768350"/>
               </a:xfrm>
               <a:custGeom>
                 <a:avLst/>
@@ -6212,7 +6343,7 @@
             <p:spPr bwMode="auto">
               <a:xfrm>
                 <a:off x="528638" y="6762751"/>
-                <a:ext cx="836613" cy="768350"/>
+                <a:ext cx="657225" cy="768350"/>
               </a:xfrm>
               <a:custGeom>
                 <a:avLst/>
@@ -6318,8 +6449,8 @@
             </p:nvSpPr>
             <p:spPr bwMode="auto">
               <a:xfrm>
-                <a:off x="537742" y="7143426"/>
-                <a:ext cx="2799184" cy="382587"/>
+                <a:off x="537742" y="7143427"/>
+                <a:ext cx="2141959" cy="382587"/>
               </a:xfrm>
               <a:custGeom>
                 <a:avLst/>
@@ -6415,125 +6546,6 @@
           </p:sp>
           <p:sp>
             <p:nvSpPr>
-              <p:cNvPr id="43" name="Freeform 13">
-                <a:extLst>
-                  <a:ext uri="{FF2B5EF4-FFF2-40B4-BE49-F238E27FC236}">
-                    <a16:creationId xmlns:a16="http://schemas.microsoft.com/office/drawing/2014/main" id="{7E1BFC5A-98E1-77A4-45BC-C36EDEA745C6}"/>
-                  </a:ext>
-                  <a:ext uri="{C183D7F6-B498-43B3-948B-1728B52AA6E4}">
-                    <adec:decorative xmlns:adec="http://schemas.microsoft.com/office/drawing/2017/decorative" val="1"/>
-                  </a:ext>
-                </a:extLst>
-              </p:cNvPr>
-              <p:cNvSpPr>
-                <a:spLocks/>
-              </p:cNvSpPr>
-              <p:nvPr/>
-            </p:nvSpPr>
-            <p:spPr bwMode="auto">
-              <a:xfrm>
-                <a:off x="2506663" y="6762751"/>
-                <a:ext cx="839788" cy="768350"/>
-              </a:xfrm>
-              <a:custGeom>
-                <a:avLst/>
-                <a:gdLst>
-                  <a:gd name="T0" fmla="*/ 414 w 529"/>
-                  <a:gd name="T1" fmla="*/ 484 h 484"/>
-                  <a:gd name="T2" fmla="*/ 0 w 529"/>
-                  <a:gd name="T3" fmla="*/ 484 h 484"/>
-                  <a:gd name="T4" fmla="*/ 0 w 529"/>
-                  <a:gd name="T5" fmla="*/ 0 h 484"/>
-                  <a:gd name="T6" fmla="*/ 414 w 529"/>
-                  <a:gd name="T7" fmla="*/ 0 h 484"/>
-                  <a:gd name="T8" fmla="*/ 529 w 529"/>
-                  <a:gd name="T9" fmla="*/ 242 h 484"/>
-                  <a:gd name="T10" fmla="*/ 414 w 529"/>
-                  <a:gd name="T11" fmla="*/ 484 h 484"/>
-                </a:gdLst>
-                <a:ahLst/>
-                <a:cxnLst>
-                  <a:cxn ang="0">
-                    <a:pos x="T0" y="T1"/>
-                  </a:cxn>
-                  <a:cxn ang="0">
-                    <a:pos x="T2" y="T3"/>
-                  </a:cxn>
-                  <a:cxn ang="0">
-                    <a:pos x="T4" y="T5"/>
-                  </a:cxn>
-                  <a:cxn ang="0">
-                    <a:pos x="T6" y="T7"/>
-                  </a:cxn>
-                  <a:cxn ang="0">
-                    <a:pos x="T8" y="T9"/>
-                  </a:cxn>
-                  <a:cxn ang="0">
-                    <a:pos x="T10" y="T11"/>
-                  </a:cxn>
-                </a:cxnLst>
-                <a:rect l="0" t="0" r="r" b="b"/>
-                <a:pathLst>
-                  <a:path w="529" h="484">
-                    <a:moveTo>
-                      <a:pt x="414" y="484"/>
-                    </a:moveTo>
-                    <a:lnTo>
-                      <a:pt x="0" y="484"/>
-                    </a:lnTo>
-                    <a:lnTo>
-                      <a:pt x="0" y="0"/>
-                    </a:lnTo>
-                    <a:lnTo>
-                      <a:pt x="414" y="0"/>
-                    </a:lnTo>
-                    <a:lnTo>
-                      <a:pt x="529" y="242"/>
-                    </a:lnTo>
-                    <a:lnTo>
-                      <a:pt x="414" y="484"/>
-                    </a:lnTo>
-                  </a:path>
-                </a:pathLst>
-              </a:custGeom>
-              <a:noFill/>
-              <a:ln>
-                <a:noFill/>
-              </a:ln>
-              <a:extLst>
-                <a:ext uri="{909E8E84-426E-40DD-AFC4-6F175D3DCCD1}">
-                  <a14:hiddenFill xmlns:a14="http://schemas.microsoft.com/office/drawing/2010/main">
-                    <a:solidFill>
-                      <a:srgbClr val="FFFFFF"/>
-                    </a:solidFill>
-                  </a14:hiddenFill>
-                </a:ext>
-                <a:ext uri="{91240B29-F687-4F45-9708-019B960494DF}">
-                  <a14:hiddenLine xmlns:a14="http://schemas.microsoft.com/office/drawing/2010/main" w="9525">
-                    <a:solidFill>
-                      <a:srgbClr val="000000"/>
-                    </a:solidFill>
-                    <a:round/>
-                    <a:headEnd/>
-                    <a:tailEnd/>
-                  </a14:hiddenLine>
-                </a:ext>
-              </a:extLst>
-            </p:spPr>
-            <p:txBody>
-              <a:bodyPr vert="horz" wrap="square" lIns="91440" tIns="45720" rIns="91440" bIns="45720" numCol="1" anchor="t" anchorCtr="0" compatLnSpc="1">
-                <a:prstTxWarp prst="textNoShape">
-                  <a:avLst/>
-                </a:prstTxWarp>
-              </a:bodyPr>
-              <a:lstStyle/>
-              <a:p>
-                <a:endParaRPr lang="en-US" dirty="0"/>
-              </a:p>
-            </p:txBody>
-          </p:sp>
-          <p:sp>
-            <p:nvSpPr>
               <p:cNvPr id="44" name="Freeform 16">
                 <a:extLst>
                   <a:ext uri="{FF2B5EF4-FFF2-40B4-BE49-F238E27FC236}">
@@ -6551,7 +6563,7 @@
             </p:nvSpPr>
             <p:spPr bwMode="auto">
               <a:xfrm>
-                <a:off x="2516188" y="6772276"/>
+                <a:off x="1965309" y="6772276"/>
                 <a:ext cx="250825" cy="752475"/>
               </a:xfrm>
               <a:custGeom>
@@ -6657,157 +6669,6 @@
               <a:ln>
                 <a:noFill/>
               </a:ln>
-            </p:spPr>
-            <p:txBody>
-              <a:bodyPr vert="horz" wrap="square" lIns="91440" tIns="45720" rIns="91440" bIns="45720" numCol="1" anchor="t" anchorCtr="0" compatLnSpc="1">
-                <a:prstTxWarp prst="textNoShape">
-                  <a:avLst/>
-                </a:prstTxWarp>
-              </a:bodyPr>
-              <a:lstStyle/>
-              <a:p>
-                <a:endParaRPr lang="en-US" dirty="0"/>
-              </a:p>
-            </p:txBody>
-          </p:sp>
-          <p:sp>
-            <p:nvSpPr>
-              <p:cNvPr id="45" name="Freeform 17">
-                <a:extLst>
-                  <a:ext uri="{FF2B5EF4-FFF2-40B4-BE49-F238E27FC236}">
-                    <a16:creationId xmlns:a16="http://schemas.microsoft.com/office/drawing/2014/main" id="{BEE8DF92-6353-5B07-B96F-A82E83403035}"/>
-                  </a:ext>
-                  <a:ext uri="{C183D7F6-B498-43B3-948B-1728B52AA6E4}">
-                    <adec:decorative xmlns:adec="http://schemas.microsoft.com/office/drawing/2017/decorative" val="1"/>
-                  </a:ext>
-                </a:extLst>
-              </p:cNvPr>
-              <p:cNvSpPr>
-                <a:spLocks noEditPoints="1"/>
-              </p:cNvSpPr>
-              <p:nvPr/>
-            </p:nvSpPr>
-            <p:spPr bwMode="auto">
-              <a:xfrm>
-                <a:off x="2516188" y="6772276"/>
-                <a:ext cx="250825" cy="752475"/>
-              </a:xfrm>
-              <a:custGeom>
-                <a:avLst/>
-                <a:gdLst>
-                  <a:gd name="T0" fmla="*/ 43 w 158"/>
-                  <a:gd name="T1" fmla="*/ 474 h 474"/>
-                  <a:gd name="T2" fmla="*/ 0 w 158"/>
-                  <a:gd name="T3" fmla="*/ 474 h 474"/>
-                  <a:gd name="T4" fmla="*/ 0 w 158"/>
-                  <a:gd name="T5" fmla="*/ 474 h 474"/>
-                  <a:gd name="T6" fmla="*/ 43 w 158"/>
-                  <a:gd name="T7" fmla="*/ 474 h 474"/>
-                  <a:gd name="T8" fmla="*/ 43 w 158"/>
-                  <a:gd name="T9" fmla="*/ 474 h 474"/>
-                  <a:gd name="T10" fmla="*/ 43 w 158"/>
-                  <a:gd name="T11" fmla="*/ 0 h 474"/>
-                  <a:gd name="T12" fmla="*/ 0 w 158"/>
-                  <a:gd name="T13" fmla="*/ 0 h 474"/>
-                  <a:gd name="T14" fmla="*/ 111 w 158"/>
-                  <a:gd name="T15" fmla="*/ 236 h 474"/>
-                  <a:gd name="T16" fmla="*/ 158 w 158"/>
-                  <a:gd name="T17" fmla="*/ 236 h 474"/>
-                  <a:gd name="T18" fmla="*/ 43 w 158"/>
-                  <a:gd name="T19" fmla="*/ 0 h 474"/>
-                </a:gdLst>
-                <a:ahLst/>
-                <a:cxnLst>
-                  <a:cxn ang="0">
-                    <a:pos x="T0" y="T1"/>
-                  </a:cxn>
-                  <a:cxn ang="0">
-                    <a:pos x="T2" y="T3"/>
-                  </a:cxn>
-                  <a:cxn ang="0">
-                    <a:pos x="T4" y="T5"/>
-                  </a:cxn>
-                  <a:cxn ang="0">
-                    <a:pos x="T6" y="T7"/>
-                  </a:cxn>
-                  <a:cxn ang="0">
-                    <a:pos x="T8" y="T9"/>
-                  </a:cxn>
-                  <a:cxn ang="0">
-                    <a:pos x="T10" y="T11"/>
-                  </a:cxn>
-                  <a:cxn ang="0">
-                    <a:pos x="T12" y="T13"/>
-                  </a:cxn>
-                  <a:cxn ang="0">
-                    <a:pos x="T14" y="T15"/>
-                  </a:cxn>
-                  <a:cxn ang="0">
-                    <a:pos x="T16" y="T17"/>
-                  </a:cxn>
-                  <a:cxn ang="0">
-                    <a:pos x="T18" y="T19"/>
-                  </a:cxn>
-                </a:cxnLst>
-                <a:rect l="0" t="0" r="r" b="b"/>
-                <a:pathLst>
-                  <a:path w="158" h="474">
-                    <a:moveTo>
-                      <a:pt x="43" y="474"/>
-                    </a:moveTo>
-                    <a:lnTo>
-                      <a:pt x="0" y="474"/>
-                    </a:lnTo>
-                    <a:lnTo>
-                      <a:pt x="0" y="474"/>
-                    </a:lnTo>
-                    <a:lnTo>
-                      <a:pt x="43" y="474"/>
-                    </a:lnTo>
-                    <a:lnTo>
-                      <a:pt x="43" y="474"/>
-                    </a:lnTo>
-                    <a:moveTo>
-                      <a:pt x="43" y="0"/>
-                    </a:moveTo>
-                    <a:lnTo>
-                      <a:pt x="0" y="0"/>
-                    </a:lnTo>
-                    <a:lnTo>
-                      <a:pt x="111" y="236"/>
-                    </a:lnTo>
-                    <a:lnTo>
-                      <a:pt x="158" y="236"/>
-                    </a:lnTo>
-                    <a:lnTo>
-                      <a:pt x="43" y="0"/>
-                    </a:lnTo>
-                  </a:path>
-                </a:pathLst>
-              </a:custGeom>
-              <a:noFill/>
-              <a:ln>
-                <a:noFill/>
-              </a:ln>
-              <a:extLst>
-                <a:ext uri="{909E8E84-426E-40DD-AFC4-6F175D3DCCD1}">
-                  <a14:hiddenFill xmlns:a14="http://schemas.microsoft.com/office/drawing/2010/main">
-                    <a:solidFill>
-                      <a:srgbClr val="FFFFFF"/>
-                    </a:solidFill>
-                  </a14:hiddenFill>
-                </a:ext>
-                <a:ext uri="{91240B29-F687-4F45-9708-019B960494DF}">
-                  <a14:hiddenLine xmlns:a14="http://schemas.microsoft.com/office/drawing/2010/main" w="9525">
-                    <a:solidFill>
-                      <a:srgbClr val="000000"/>
-                    </a:solidFill>
-                    <a:round/>
-                    <a:headEnd/>
-                    <a:tailEnd/>
-                  </a14:hiddenLine>
-                </a:ext>
-              </a:extLst>
             </p:spPr>
             <p:txBody>
               <a:bodyPr vert="horz" wrap="square" lIns="91440" tIns="45720" rIns="91440" bIns="45720" numCol="1" anchor="t" anchorCtr="0" compatLnSpc="1">
@@ -6959,7 +6820,7 @@
             </p:nvSpPr>
             <p:spPr bwMode="auto">
               <a:xfrm>
-                <a:off x="1857376" y="6772276"/>
+                <a:off x="1450989" y="6772276"/>
                 <a:ext cx="246063" cy="752475"/>
               </a:xfrm>
               <a:custGeom>
@@ -7367,7 +7228,7 @@
             </p:nvSpPr>
             <p:spPr bwMode="auto">
               <a:xfrm>
-                <a:off x="1195388" y="6772276"/>
+                <a:off x="1005742" y="6772276"/>
                 <a:ext cx="255588" cy="752475"/>
               </a:xfrm>
               <a:custGeom>
@@ -7775,7 +7636,7 @@
             </p:nvSpPr>
             <p:spPr bwMode="auto">
               <a:xfrm>
-                <a:off x="2516188" y="7146926"/>
+                <a:off x="1965309" y="7146926"/>
                 <a:ext cx="250825" cy="377825"/>
               </a:xfrm>
               <a:custGeom>
@@ -7840,117 +7701,6 @@
               <a:ln>
                 <a:noFill/>
               </a:ln>
-            </p:spPr>
-            <p:txBody>
-              <a:bodyPr vert="horz" wrap="square" lIns="91440" tIns="45720" rIns="91440" bIns="45720" numCol="1" anchor="t" anchorCtr="0" compatLnSpc="1">
-                <a:prstTxWarp prst="textNoShape">
-                  <a:avLst/>
-                </a:prstTxWarp>
-              </a:bodyPr>
-              <a:lstStyle/>
-              <a:p>
-                <a:endParaRPr lang="en-US" dirty="0"/>
-              </a:p>
-            </p:txBody>
-          </p:sp>
-          <p:sp>
-            <p:nvSpPr>
-              <p:cNvPr id="54" name="Freeform 87">
-                <a:extLst>
-                  <a:ext uri="{FF2B5EF4-FFF2-40B4-BE49-F238E27FC236}">
-                    <a16:creationId xmlns:a16="http://schemas.microsoft.com/office/drawing/2014/main" id="{A6CB1D4F-B62A-D73C-04CE-F1D3F509C2B8}"/>
-                  </a:ext>
-                  <a:ext uri="{C183D7F6-B498-43B3-948B-1728B52AA6E4}">
-                    <adec:decorative xmlns:adec="http://schemas.microsoft.com/office/drawing/2017/decorative" val="1"/>
-                  </a:ext>
-                </a:extLst>
-              </p:cNvPr>
-              <p:cNvSpPr>
-                <a:spLocks/>
-              </p:cNvSpPr>
-              <p:nvPr/>
-            </p:nvSpPr>
-            <p:spPr bwMode="auto">
-              <a:xfrm>
-                <a:off x="2516188" y="7146926"/>
-                <a:ext cx="250825" cy="377825"/>
-              </a:xfrm>
-              <a:custGeom>
-                <a:avLst/>
-                <a:gdLst>
-                  <a:gd name="T0" fmla="*/ 158 w 158"/>
-                  <a:gd name="T1" fmla="*/ 0 h 238"/>
-                  <a:gd name="T2" fmla="*/ 111 w 158"/>
-                  <a:gd name="T3" fmla="*/ 0 h 238"/>
-                  <a:gd name="T4" fmla="*/ 0 w 158"/>
-                  <a:gd name="T5" fmla="*/ 238 h 238"/>
-                  <a:gd name="T6" fmla="*/ 43 w 158"/>
-                  <a:gd name="T7" fmla="*/ 238 h 238"/>
-                  <a:gd name="T8" fmla="*/ 158 w 158"/>
-                  <a:gd name="T9" fmla="*/ 0 h 238"/>
-                </a:gdLst>
-                <a:ahLst/>
-                <a:cxnLst>
-                  <a:cxn ang="0">
-                    <a:pos x="T0" y="T1"/>
-                  </a:cxn>
-                  <a:cxn ang="0">
-                    <a:pos x="T2" y="T3"/>
-                  </a:cxn>
-                  <a:cxn ang="0">
-                    <a:pos x="T4" y="T5"/>
-                  </a:cxn>
-                  <a:cxn ang="0">
-                    <a:pos x="T6" y="T7"/>
-                  </a:cxn>
-                  <a:cxn ang="0">
-                    <a:pos x="T8" y="T9"/>
-                  </a:cxn>
-                </a:cxnLst>
-                <a:rect l="0" t="0" r="r" b="b"/>
-                <a:pathLst>
-                  <a:path w="158" h="238">
-                    <a:moveTo>
-                      <a:pt x="158" y="0"/>
-                    </a:moveTo>
-                    <a:lnTo>
-                      <a:pt x="111" y="0"/>
-                    </a:lnTo>
-                    <a:lnTo>
-                      <a:pt x="0" y="238"/>
-                    </a:lnTo>
-                    <a:lnTo>
-                      <a:pt x="43" y="238"/>
-                    </a:lnTo>
-                    <a:lnTo>
-                      <a:pt x="158" y="0"/>
-                    </a:lnTo>
-                  </a:path>
-                </a:pathLst>
-              </a:custGeom>
-              <a:noFill/>
-              <a:ln>
-                <a:noFill/>
-              </a:ln>
-              <a:extLst>
-                <a:ext uri="{909E8E84-426E-40DD-AFC4-6F175D3DCCD1}">
-                  <a14:hiddenFill xmlns:a14="http://schemas.microsoft.com/office/drawing/2010/main">
-                    <a:solidFill>
-                      <a:srgbClr val="FFFFFF"/>
-                    </a:solidFill>
-                  </a14:hiddenFill>
-                </a:ext>
-                <a:ext uri="{91240B29-F687-4F45-9708-019B960494DF}">
-                  <a14:hiddenLine xmlns:a14="http://schemas.microsoft.com/office/drawing/2010/main" w="9525">
-                    <a:solidFill>
-                      <a:srgbClr val="000000"/>
-                    </a:solidFill>
-                    <a:round/>
-                    <a:headEnd/>
-                    <a:tailEnd/>
-                  </a14:hiddenLine>
-                </a:ext>
-              </a:extLst>
             </p:spPr>
             <p:txBody>
               <a:bodyPr vert="horz" wrap="square" lIns="91440" tIns="45720" rIns="91440" bIns="45720" numCol="1" anchor="t" anchorCtr="0" compatLnSpc="1">
@@ -8094,7 +7844,7 @@
             </p:nvSpPr>
             <p:spPr bwMode="auto">
               <a:xfrm>
-                <a:off x="1857376" y="7146926"/>
+                <a:off x="1450989" y="7146926"/>
                 <a:ext cx="246063" cy="377825"/>
               </a:xfrm>
               <a:custGeom>
@@ -8413,7 +8163,7 @@
             </p:nvSpPr>
             <p:spPr bwMode="auto">
               <a:xfrm>
-                <a:off x="1195388" y="7146926"/>
+                <a:off x="1005742" y="7146926"/>
                 <a:ext cx="255588" cy="377825"/>
               </a:xfrm>
               <a:custGeom>
@@ -8733,7 +8483,7 @@
             <p:spPr bwMode="auto">
               <a:xfrm>
                 <a:off x="530225" y="7151688"/>
-                <a:ext cx="2832100" cy="382587"/>
+                <a:ext cx="2155826" cy="382587"/>
               </a:xfrm>
               <a:custGeom>
                 <a:avLst/>
@@ -8855,8 +8605,8 @@
           </p:nvSpPr>
           <p:spPr>
             <a:xfrm>
-              <a:off x="935452" y="12571426"/>
-              <a:ext cx="2629352" cy="923330"/>
+              <a:off x="874868" y="12440308"/>
+              <a:ext cx="2133278" cy="1200329"/>
             </a:xfrm>
             <a:prstGeom prst="rect">
               <a:avLst/>
@@ -8869,6 +8619,7 @@
             </a:bodyPr>
             <a:lstStyle/>
             <a:p>
+              <a:pPr algn="ctr"/>
               <a:r>
                 <a:rPr lang="en-US" sz="1800" dirty="0">
                   <a:solidFill>
@@ -8901,8 +8652,8 @@
           </p:nvSpPr>
           <p:spPr>
             <a:xfrm>
-              <a:off x="6693488" y="12540946"/>
-              <a:ext cx="2268367" cy="923330"/>
+              <a:off x="5106971" y="12427047"/>
+              <a:ext cx="1495773" cy="1200329"/>
             </a:xfrm>
             <a:prstGeom prst="rect">
               <a:avLst/>
@@ -8947,8 +8698,8 @@
           </p:nvSpPr>
           <p:spPr>
             <a:xfrm>
-              <a:off x="4238354" y="12556773"/>
-              <a:ext cx="1890904" cy="923330"/>
+              <a:off x="3404974" y="12429447"/>
+              <a:ext cx="1307962" cy="1200329"/>
             </a:xfrm>
             <a:prstGeom prst="rect">
               <a:avLst/>
@@ -8961,6 +8712,7 @@
             </a:bodyPr>
             <a:lstStyle/>
             <a:p>
+              <a:pPr algn="ctr"/>
               <a:r>
                 <a:rPr lang="en-US" sz="1800" dirty="0">
                   <a:solidFill>
@@ -8995,8 +8747,8 @@
           </p:nvSpPr>
           <p:spPr>
             <a:xfrm>
-              <a:off x="9445526" y="12557462"/>
-              <a:ext cx="1936105" cy="923330"/>
+              <a:off x="7179049" y="12557532"/>
+              <a:ext cx="1838902" cy="923330"/>
             </a:xfrm>
             <a:prstGeom prst="rect">
               <a:avLst/>
@@ -9062,8 +8814,8 @@
         </p:nvSpPr>
         <p:spPr>
           <a:xfrm>
-            <a:off x="11794313" y="3474673"/>
-            <a:ext cx="18033226" cy="12153947"/>
+            <a:off x="9107972" y="2468795"/>
+            <a:ext cx="21001522" cy="11490135"/>
           </a:xfrm>
           <a:prstGeom prst="rect">
             <a:avLst/>
@@ -9116,8 +8868,8 @@
         </p:nvSpPr>
         <p:spPr>
           <a:xfrm>
-            <a:off x="12019400" y="3623079"/>
-            <a:ext cx="8707120" cy="707886"/>
+            <a:off x="9270713" y="2617202"/>
+            <a:ext cx="8707120" cy="461665"/>
           </a:xfrm>
           <a:prstGeom prst="rect">
             <a:avLst/>
@@ -9131,14 +8883,14 @@
           <a:lstStyle/>
           <a:p>
             <a:r>
-              <a:rPr lang="en-US" sz="4000" dirty="0">
+              <a:rPr lang="en-US" sz="2400" dirty="0">
                 <a:solidFill>
                   <a:schemeClr val="accent1"/>
                 </a:solidFill>
                 <a:latin typeface="Roboto" panose="02000000000000000000" pitchFamily="2" charset="0"/>
                 <a:ea typeface="Roboto" panose="02000000000000000000" pitchFamily="2" charset="0"/>
               </a:rPr>
-              <a:t>IMPLEMENTATION &amp; VERIFICATION</a:t>
+              <a:t>APPLICATION</a:t>
             </a:r>
           </a:p>
         </p:txBody>
@@ -9157,8 +8909,8 @@
         </p:nvSpPr>
         <p:spPr>
           <a:xfrm>
-            <a:off x="11794313" y="15859622"/>
-            <a:ext cx="18033226" cy="5095486"/>
+            <a:off x="21218235" y="14163707"/>
+            <a:ext cx="8882871" cy="6791400"/>
           </a:xfrm>
           <a:prstGeom prst="rect">
             <a:avLst/>
@@ -9211,8 +8963,8 @@
         </p:nvSpPr>
         <p:spPr>
           <a:xfrm>
-            <a:off x="12050569" y="15987212"/>
-            <a:ext cx="7719079" cy="707886"/>
+            <a:off x="21440571" y="14163707"/>
+            <a:ext cx="4716640" cy="707886"/>
           </a:xfrm>
           <a:prstGeom prst="rect">
             <a:avLst/>
@@ -9253,14 +9005,14 @@
           <p:nvPr/>
         </p:nvPicPr>
         <p:blipFill>
-          <a:blip r:embed="rId2"/>
+          <a:blip r:embed="rId4"/>
           <a:stretch>
             <a:fillRect/>
           </a:stretch>
         </p:blipFill>
         <p:spPr>
           <a:xfrm>
-            <a:off x="20774852" y="484923"/>
+            <a:off x="21602619" y="122017"/>
             <a:ext cx="4485623" cy="1258343"/>
           </a:xfrm>
           <a:prstGeom prst="rect">
@@ -9283,23 +9035,23 @@
           <p:nvPr/>
         </p:nvPicPr>
         <p:blipFill>
-          <a:blip r:embed="rId3"/>
+          <a:blip r:embed="rId5"/>
           <a:stretch>
             <a:fillRect/>
           </a:stretch>
         </p:blipFill>
         <p:spPr>
           <a:xfrm>
-            <a:off x="25761368" y="129849"/>
-            <a:ext cx="4082795" cy="1754326"/>
+            <a:off x="26597225" y="54052"/>
+            <a:ext cx="3169005" cy="1361682"/>
           </a:xfrm>
           <a:prstGeom prst="rect">
             <a:avLst/>
           </a:prstGeom>
         </p:spPr>
       </p:pic>
-      <mc:AlternateContent xmlns:mc="http://schemas.openxmlformats.org/markup-compatibility/2006" xmlns:a14="http://schemas.microsoft.com/office/drawing/2010/main">
-        <mc:Choice Requires="a14">
+      <mc:AlternateContent xmlns:mc="http://schemas.openxmlformats.org/markup-compatibility/2006">
+        <mc:Choice xmlns:a14="http://schemas.microsoft.com/office/drawing/2010/main" Requires="a14">
           <p:sp>
             <p:nvSpPr>
               <p:cNvPr id="31" name="TextBox 30">
@@ -9314,8 +9066,8 @@
             </p:nvSpPr>
             <p:spPr>
               <a:xfrm>
-                <a:off x="495083" y="9524788"/>
-                <a:ext cx="10892913" cy="404919"/>
+                <a:off x="201962" y="8426601"/>
+                <a:ext cx="8750472" cy="371064"/>
               </a:xfrm>
               <a:prstGeom prst="rect">
                 <a:avLst/>
@@ -9334,14 +9086,14 @@
                     <m:sSub>
                       <m:sSubPr>
                         <m:ctrlPr>
-                          <a:rPr lang="en-GB" sz="2400" b="0" i="1" smtClean="0">
+                          <a:rPr lang="en-GB" sz="2200" b="0" i="1" smtClean="0">
                             <a:latin typeface="Cambria Math" panose="02040503050406030204" pitchFamily="18" charset="0"/>
                           </a:rPr>
                         </m:ctrlPr>
                       </m:sSubPr>
                       <m:e>
                         <m:r>
-                          <a:rPr lang="en-GB" sz="2400" b="0" i="1" smtClean="0">
+                          <a:rPr lang="en-GB" sz="2200" b="0" i="1" smtClean="0">
                             <a:latin typeface="Cambria Math" panose="02040503050406030204" pitchFamily="18" charset="0"/>
                           </a:rPr>
                           <m:t>𝐿</m:t>
@@ -9349,7 +9101,7 @@
                       </m:e>
                       <m:sub>
                         <m:r>
-                          <a:rPr lang="en-GB" sz="2400" b="0" i="1" smtClean="0">
+                          <a:rPr lang="en-GB" sz="2200" b="0" i="1" smtClean="0">
                             <a:latin typeface="Cambria Math" panose="02040503050406030204" pitchFamily="18" charset="0"/>
                           </a:rPr>
                           <m:t>𝑑</m:t>
@@ -9359,14 +9111,14 @@
                     <m:d>
                       <m:dPr>
                         <m:ctrlPr>
-                          <a:rPr lang="en-GB" sz="2400" b="0" i="1" smtClean="0">
+                          <a:rPr lang="en-GB" sz="2200" b="0" i="1" smtClean="0">
                             <a:latin typeface="Cambria Math" panose="02040503050406030204" pitchFamily="18" charset="0"/>
                           </a:rPr>
                         </m:ctrlPr>
                       </m:dPr>
                       <m:e>
                         <m:r>
-                          <a:rPr lang="en-GB" sz="2400" b="0" i="1" smtClean="0">
+                          <a:rPr lang="en-GB" sz="2200" b="0" i="1" smtClean="0">
                             <a:latin typeface="Cambria Math" panose="02040503050406030204" pitchFamily="18" charset="0"/>
                           </a:rPr>
                           <m:t>𝑖</m:t>
@@ -9374,7 +9126,7 @@
                       </m:e>
                     </m:d>
                     <m:r>
-                      <a:rPr lang="en-GB" sz="2400" b="0" i="1" smtClean="0">
+                      <a:rPr lang="en-GB" sz="2200" b="0" i="1" smtClean="0">
                         <a:latin typeface="Cambria Math" panose="02040503050406030204" pitchFamily="18" charset="0"/>
                       </a:rPr>
                       <m:t>= </m:t>
@@ -9382,14 +9134,14 @@
                     <m:sSub>
                       <m:sSubPr>
                         <m:ctrlPr>
-                          <a:rPr lang="en-GB" sz="2400" b="0" i="1" smtClean="0">
+                          <a:rPr lang="en-GB" sz="2200" b="0" i="1" smtClean="0">
                             <a:latin typeface="Cambria Math" panose="02040503050406030204" pitchFamily="18" charset="0"/>
                           </a:rPr>
                         </m:ctrlPr>
                       </m:sSubPr>
                       <m:e>
                         <m:r>
-                          <a:rPr lang="en-GB" sz="2400" b="0" i="1" smtClean="0">
+                          <a:rPr lang="en-GB" sz="2200" b="0" i="1" smtClean="0">
                             <a:latin typeface="Cambria Math" panose="02040503050406030204" pitchFamily="18" charset="0"/>
                           </a:rPr>
                           <m:t>𝐵</m:t>
@@ -9397,7 +9149,7 @@
                       </m:e>
                       <m:sub>
                         <m:r>
-                          <a:rPr lang="en-GB" sz="2400" b="0" i="1" smtClean="0">
+                          <a:rPr lang="en-GB" sz="2200" b="0" i="1" smtClean="0">
                             <a:latin typeface="Cambria Math" panose="02040503050406030204" pitchFamily="18" charset="0"/>
                           </a:rPr>
                           <m:t>𝑑</m:t>
@@ -9405,7 +9157,7 @@
                       </m:sub>
                     </m:sSub>
                     <m:r>
-                      <a:rPr lang="en-GB" sz="2400" b="0" i="1" smtClean="0">
+                      <a:rPr lang="en-GB" sz="2200" b="0" i="1" smtClean="0">
                         <a:latin typeface="Cambria Math" panose="02040503050406030204" pitchFamily="18" charset="0"/>
                       </a:rPr>
                       <m:t>+</m:t>
@@ -9413,14 +9165,14 @@
                     <m:sSub>
                       <m:sSubPr>
                         <m:ctrlPr>
-                          <a:rPr lang="en-GB" sz="2400" b="0" i="1" smtClean="0">
+                          <a:rPr lang="en-GB" sz="2200" b="0" i="1" smtClean="0">
                             <a:latin typeface="Cambria Math" panose="02040503050406030204" pitchFamily="18" charset="0"/>
                           </a:rPr>
                         </m:ctrlPr>
                       </m:sSubPr>
                       <m:e>
                         <m:r>
-                          <a:rPr lang="en-GB" sz="2400" b="0" i="1" smtClean="0">
+                          <a:rPr lang="en-GB" sz="2200" b="0" i="1" smtClean="0">
                             <a:latin typeface="Cambria Math" panose="02040503050406030204" pitchFamily="18" charset="0"/>
                           </a:rPr>
                           <m:t>𝐶</m:t>
@@ -9430,14 +9182,14 @@
                         <m:sSub>
                           <m:sSubPr>
                             <m:ctrlPr>
-                              <a:rPr lang="en-GB" sz="2400" b="0" i="1" smtClean="0">
+                              <a:rPr lang="en-GB" sz="2200" b="0" i="1" smtClean="0">
                                 <a:latin typeface="Cambria Math" panose="02040503050406030204" pitchFamily="18" charset="0"/>
                               </a:rPr>
                             </m:ctrlPr>
                           </m:sSubPr>
                           <m:e>
                             <m:r>
-                              <a:rPr lang="en-GB" sz="2400" b="0" i="1" smtClean="0">
+                              <a:rPr lang="en-GB" sz="2200" b="0" i="1" smtClean="0">
                                 <a:latin typeface="Cambria Math" panose="02040503050406030204" pitchFamily="18" charset="0"/>
                               </a:rPr>
                               <m:t>𝑐</m:t>
@@ -9445,7 +9197,7 @@
                           </m:e>
                           <m:sub>
                             <m:r>
-                              <a:rPr lang="en-GB" sz="2400" b="0" i="1" smtClean="0">
+                              <a:rPr lang="en-GB" sz="2200" b="0" i="1" smtClean="0">
                                 <a:latin typeface="Cambria Math" panose="02040503050406030204" pitchFamily="18" charset="0"/>
                               </a:rPr>
                               <m:t>𝑑</m:t>
@@ -9453,19 +9205,19 @@
                           </m:sub>
                         </m:sSub>
                         <m:r>
-                          <a:rPr lang="en-GB" sz="2400" b="0" i="1" smtClean="0">
+                          <a:rPr lang="en-GB" sz="2200" b="0" i="1" smtClean="0">
                             <a:latin typeface="Cambria Math" panose="02040503050406030204" pitchFamily="18" charset="0"/>
                           </a:rPr>
                           <m:t>(</m:t>
                         </m:r>
                         <m:r>
-                          <a:rPr lang="en-GB" sz="2400" b="0" i="1" smtClean="0">
+                          <a:rPr lang="en-GB" sz="2200" b="0" i="1" smtClean="0">
                             <a:latin typeface="Cambria Math" panose="02040503050406030204" pitchFamily="18" charset="0"/>
                           </a:rPr>
                           <m:t>𝑖</m:t>
                         </m:r>
                         <m:r>
-                          <a:rPr lang="en-GB" sz="2400" b="0" i="1" smtClean="0">
+                          <a:rPr lang="en-GB" sz="2200" b="0" i="1" smtClean="0">
                             <a:latin typeface="Cambria Math" panose="02040503050406030204" pitchFamily="18" charset="0"/>
                           </a:rPr>
                           <m:t>)</m:t>
@@ -9473,7 +9225,7 @@
                       </m:sub>
                     </m:sSub>
                     <m:r>
-                      <a:rPr lang="en-GB" sz="2400" b="0" i="1" smtClean="0">
+                      <a:rPr lang="en-GB" sz="2200" b="0" i="1" smtClean="0">
                         <a:latin typeface="Cambria Math" panose="02040503050406030204" pitchFamily="18" charset="0"/>
                       </a:rPr>
                       <m:t>+</m:t>
@@ -9481,14 +9233,14 @@
                     <m:sSub>
                       <m:sSubPr>
                         <m:ctrlPr>
-                          <a:rPr lang="en-GB" sz="2400" b="0" i="1" smtClean="0">
+                          <a:rPr lang="en-GB" sz="2200" b="0" i="1" smtClean="0">
                             <a:latin typeface="Cambria Math" panose="02040503050406030204" pitchFamily="18" charset="0"/>
                           </a:rPr>
                         </m:ctrlPr>
                       </m:sSubPr>
                       <m:e>
                         <m:r>
-                          <a:rPr lang="en-GB" sz="2400" b="0" i="1" smtClean="0">
+                          <a:rPr lang="en-GB" sz="2200" b="0" i="1" smtClean="0">
                             <a:latin typeface="Cambria Math" panose="02040503050406030204" pitchFamily="18" charset="0"/>
                           </a:rPr>
                           <m:t>𝐷</m:t>
@@ -9498,14 +9250,14 @@
                         <m:sSub>
                           <m:sSubPr>
                             <m:ctrlPr>
-                              <a:rPr lang="en-GB" sz="2400" i="1">
+                              <a:rPr lang="en-GB" sz="2200" i="1">
                                 <a:latin typeface="Cambria Math" panose="02040503050406030204" pitchFamily="18" charset="0"/>
                               </a:rPr>
                             </m:ctrlPr>
                           </m:sSubPr>
                           <m:e>
                             <m:r>
-                              <a:rPr lang="en-GB" sz="2400" i="1">
+                              <a:rPr lang="en-GB" sz="2200" i="1">
                                 <a:latin typeface="Cambria Math" panose="02040503050406030204" pitchFamily="18" charset="0"/>
                               </a:rPr>
                               <m:t>𝑐</m:t>
@@ -9513,7 +9265,7 @@
                           </m:e>
                           <m:sub>
                             <m:r>
-                              <a:rPr lang="en-GB" sz="2400" i="1">
+                              <a:rPr lang="en-GB" sz="2200" i="1">
                                 <a:latin typeface="Cambria Math" panose="02040503050406030204" pitchFamily="18" charset="0"/>
                               </a:rPr>
                               <m:t>𝑑</m:t>
@@ -9521,19 +9273,19 @@
                           </m:sub>
                         </m:sSub>
                         <m:r>
-                          <a:rPr lang="en-GB" sz="2400" i="1">
+                          <a:rPr lang="en-GB" sz="2200" i="1">
                             <a:latin typeface="Cambria Math" panose="02040503050406030204" pitchFamily="18" charset="0"/>
                           </a:rPr>
                           <m:t>(</m:t>
                         </m:r>
                         <m:r>
-                          <a:rPr lang="en-GB" sz="2400" i="1">
+                          <a:rPr lang="en-GB" sz="2200" i="1">
                             <a:latin typeface="Cambria Math" panose="02040503050406030204" pitchFamily="18" charset="0"/>
                           </a:rPr>
                           <m:t>𝑖</m:t>
                         </m:r>
                         <m:r>
-                          <a:rPr lang="en-GB" sz="2400" i="1">
+                          <a:rPr lang="en-GB" sz="2200" i="1">
                             <a:latin typeface="Cambria Math" panose="02040503050406030204" pitchFamily="18" charset="0"/>
                           </a:rPr>
                           <m:t>)</m:t>
@@ -9543,7 +9295,7 @@
                   </m:oMath>
                 </a14:m>
                 <a:r>
-                  <a:rPr lang="en-GB" sz="2400" dirty="0"/>
+                  <a:rPr lang="en-GB" sz="2200" dirty="0"/>
                   <a:t>(</a:t>
                 </a:r>
                 <a14:m>
@@ -9551,22 +9303,22 @@
                     <m:sSub>
                       <m:sSubPr>
                         <m:ctrlPr>
-                          <a:rPr lang="en-GB" sz="2400" i="1">
+                          <a:rPr lang="en-GB" sz="2200" b="0" i="1" smtClean="0">
                             <a:latin typeface="Cambria Math" panose="02040503050406030204" pitchFamily="18" charset="0"/>
                           </a:rPr>
                         </m:ctrlPr>
                       </m:sSubPr>
                       <m:e>
                         <m:r>
-                          <a:rPr lang="en-GB" sz="2400" i="1">
+                          <a:rPr lang="en-GB" sz="2200" b="0" i="1" smtClean="0">
                             <a:latin typeface="Cambria Math" panose="02040503050406030204" pitchFamily="18" charset="0"/>
                           </a:rPr>
-                          <m:t>𝐿</m:t>
+                          <m:t>𝑎</m:t>
                         </m:r>
                       </m:e>
                       <m:sub>
                         <m:r>
-                          <a:rPr lang="en-GB" sz="2400" i="1">
+                          <a:rPr lang="en-GB" sz="2200" i="1">
                             <a:latin typeface="Cambria Math" panose="02040503050406030204" pitchFamily="18" charset="0"/>
                           </a:rPr>
                           <m:t>𝑑</m:t>
@@ -9576,14 +9328,14 @@
                     <m:d>
                       <m:dPr>
                         <m:ctrlPr>
-                          <a:rPr lang="en-GB" sz="2400" i="1">
+                          <a:rPr lang="en-GB" sz="2200" i="1">
                             <a:latin typeface="Cambria Math" panose="02040503050406030204" pitchFamily="18" charset="0"/>
                           </a:rPr>
                         </m:ctrlPr>
                       </m:dPr>
                       <m:e>
                         <m:r>
-                          <a:rPr lang="en-GB" sz="2400" i="1">
+                          <a:rPr lang="en-GB" sz="2200" i="1">
                             <a:latin typeface="Cambria Math" panose="02040503050406030204" pitchFamily="18" charset="0"/>
                           </a:rPr>
                           <m:t>𝑖</m:t>
@@ -9591,7 +9343,7 @@
                       </m:e>
                     </m:d>
                     <m:r>
-                      <a:rPr lang="en-GB" sz="2400" b="0" i="1" smtClean="0">
+                      <a:rPr lang="en-GB" sz="2200" b="0" i="1" smtClean="0">
                         <a:latin typeface="Cambria Math" panose="02040503050406030204" pitchFamily="18" charset="0"/>
                       </a:rPr>
                       <m:t>)+</m:t>
@@ -9599,14 +9351,14 @@
                     <m:sSub>
                       <m:sSubPr>
                         <m:ctrlPr>
-                          <a:rPr lang="en-GB" sz="2400" b="0" i="1" smtClean="0">
+                          <a:rPr lang="en-GB" sz="2200" b="0" i="1" smtClean="0">
                             <a:latin typeface="Cambria Math" panose="02040503050406030204" pitchFamily="18" charset="0"/>
                           </a:rPr>
                         </m:ctrlPr>
                       </m:sSubPr>
                       <m:e>
                         <m:r>
-                          <a:rPr lang="en-GB" sz="2400" b="0" i="1" smtClean="0">
+                          <a:rPr lang="en-GB" sz="2200" b="0" i="1" smtClean="0">
                             <a:latin typeface="Cambria Math" panose="02040503050406030204" pitchFamily="18" charset="0"/>
                           </a:rPr>
                           <m:t>𝑊</m:t>
@@ -9614,7 +9366,55 @@
                       </m:e>
                       <m:sub>
                         <m:r>
-                          <a:rPr lang="en-GB" sz="2400" i="1">
+                          <a:rPr lang="en-GB" sz="2200" b="0" i="1" smtClean="0">
+                            <a:latin typeface="Cambria Math" panose="02040503050406030204" pitchFamily="18" charset="0"/>
+                          </a:rPr>
+                          <m:t>𝑐</m:t>
+                        </m:r>
+                      </m:sub>
+                    </m:sSub>
+                    <m:d>
+                      <m:dPr>
+                        <m:ctrlPr>
+                          <a:rPr lang="en-GB" sz="2200" i="1">
+                            <a:latin typeface="Cambria Math" panose="02040503050406030204" pitchFamily="18" charset="0"/>
+                          </a:rPr>
+                        </m:ctrlPr>
+                      </m:dPr>
+                      <m:e>
+                        <m:r>
+                          <a:rPr lang="en-GB" sz="2200" i="1">
+                            <a:latin typeface="Cambria Math" panose="02040503050406030204" pitchFamily="18" charset="0"/>
+                          </a:rPr>
+                          <m:t>𝑖</m:t>
+                        </m:r>
+                      </m:e>
+                    </m:d>
+                    <m:r>
+                      <a:rPr lang="en-GB" sz="2200" b="0" i="1" smtClean="0">
+                        <a:latin typeface="Cambria Math" panose="02040503050406030204" pitchFamily="18" charset="0"/>
+                      </a:rPr>
+                      <m:t>+</m:t>
+                    </m:r>
+                    <m:sSub>
+                      <m:sSubPr>
+                        <m:ctrlPr>
+                          <a:rPr lang="en-GB" sz="2200" b="0" i="1" smtClean="0">
+                            <a:latin typeface="Cambria Math" panose="02040503050406030204" pitchFamily="18" charset="0"/>
+                          </a:rPr>
+                        </m:ctrlPr>
+                      </m:sSubPr>
+                      <m:e>
+                        <m:r>
+                          <a:rPr lang="en-GB" sz="2200" b="0" i="1" smtClean="0">
+                            <a:latin typeface="Cambria Math" panose="02040503050406030204" pitchFamily="18" charset="0"/>
+                          </a:rPr>
+                          <m:t>𝑅</m:t>
+                        </m:r>
+                      </m:e>
+                      <m:sub>
+                        <m:r>
+                          <a:rPr lang="en-GB" sz="2200" i="1">
                             <a:latin typeface="Cambria Math" panose="02040503050406030204" pitchFamily="18" charset="0"/>
                           </a:rPr>
                           <m:t>𝑑</m:t>
@@ -9624,14 +9424,14 @@
                     <m:d>
                       <m:dPr>
                         <m:ctrlPr>
-                          <a:rPr lang="en-GB" sz="2400" i="1">
+                          <a:rPr lang="en-GB" sz="2200" i="1">
                             <a:latin typeface="Cambria Math" panose="02040503050406030204" pitchFamily="18" charset="0"/>
                           </a:rPr>
                         </m:ctrlPr>
                       </m:dPr>
                       <m:e>
                         <m:r>
-                          <a:rPr lang="en-GB" sz="2400" i="1">
+                          <a:rPr lang="en-GB" sz="2200" i="1">
                             <a:latin typeface="Cambria Math" panose="02040503050406030204" pitchFamily="18" charset="0"/>
                           </a:rPr>
                           <m:t>𝑖</m:t>
@@ -9639,7 +9439,7 @@
                       </m:e>
                     </m:d>
                     <m:r>
-                      <a:rPr lang="en-GB" sz="2400" b="0" i="1" smtClean="0">
+                      <a:rPr lang="en-GB" sz="2200" b="0" i="1" smtClean="0">
                         <a:latin typeface="Cambria Math" panose="02040503050406030204" pitchFamily="18" charset="0"/>
                       </a:rPr>
                       <m:t>+</m:t>
@@ -9647,22 +9447,22 @@
                     <m:sSub>
                       <m:sSubPr>
                         <m:ctrlPr>
-                          <a:rPr lang="en-GB" sz="2400" b="0" i="1" smtClean="0">
+                          <a:rPr lang="en-GB" sz="2200" b="0" i="1" smtClean="0">
                             <a:latin typeface="Cambria Math" panose="02040503050406030204" pitchFamily="18" charset="0"/>
                           </a:rPr>
                         </m:ctrlPr>
                       </m:sSubPr>
                       <m:e>
                         <m:r>
-                          <a:rPr lang="en-GB" sz="2400" b="0" i="1" smtClean="0">
+                          <a:rPr lang="en-GB" sz="2200" b="0" i="1" smtClean="0">
                             <a:latin typeface="Cambria Math" panose="02040503050406030204" pitchFamily="18" charset="0"/>
                           </a:rPr>
-                          <m:t>𝑅</m:t>
+                          <m:t>𝑄</m:t>
                         </m:r>
                       </m:e>
                       <m:sub>
                         <m:r>
-                          <a:rPr lang="en-GB" sz="2400" i="1">
+                          <a:rPr lang="en-GB" sz="2200" i="1">
                             <a:latin typeface="Cambria Math" panose="02040503050406030204" pitchFamily="18" charset="0"/>
                           </a:rPr>
                           <m:t>𝑑</m:t>
@@ -9672,62 +9472,14 @@
                     <m:d>
                       <m:dPr>
                         <m:ctrlPr>
-                          <a:rPr lang="en-GB" sz="2400" i="1">
+                          <a:rPr lang="en-GB" sz="2200" i="1">
                             <a:latin typeface="Cambria Math" panose="02040503050406030204" pitchFamily="18" charset="0"/>
                           </a:rPr>
                         </m:ctrlPr>
                       </m:dPr>
                       <m:e>
                         <m:r>
-                          <a:rPr lang="en-GB" sz="2400" i="1">
-                            <a:latin typeface="Cambria Math" panose="02040503050406030204" pitchFamily="18" charset="0"/>
-                          </a:rPr>
-                          <m:t>𝑖</m:t>
-                        </m:r>
-                      </m:e>
-                    </m:d>
-                    <m:r>
-                      <a:rPr lang="en-GB" sz="2400" b="0" i="1" smtClean="0">
-                        <a:latin typeface="Cambria Math" panose="02040503050406030204" pitchFamily="18" charset="0"/>
-                      </a:rPr>
-                      <m:t>+</m:t>
-                    </m:r>
-                    <m:sSub>
-                      <m:sSubPr>
-                        <m:ctrlPr>
-                          <a:rPr lang="en-GB" sz="2400" b="0" i="1" smtClean="0">
-                            <a:latin typeface="Cambria Math" panose="02040503050406030204" pitchFamily="18" charset="0"/>
-                          </a:rPr>
-                        </m:ctrlPr>
-                      </m:sSubPr>
-                      <m:e>
-                        <m:r>
-                          <a:rPr lang="en-GB" sz="2400" b="0" i="1" smtClean="0">
-                            <a:latin typeface="Cambria Math" panose="02040503050406030204" pitchFamily="18" charset="0"/>
-                          </a:rPr>
-                          <m:t>𝑄</m:t>
-                        </m:r>
-                      </m:e>
-                      <m:sub>
-                        <m:r>
-                          <a:rPr lang="en-GB" sz="2400" i="1">
-                            <a:latin typeface="Cambria Math" panose="02040503050406030204" pitchFamily="18" charset="0"/>
-                          </a:rPr>
-                          <m:t>𝑑</m:t>
-                        </m:r>
-                      </m:sub>
-                    </m:sSub>
-                    <m:d>
-                      <m:dPr>
-                        <m:ctrlPr>
-                          <a:rPr lang="en-GB" sz="2400" i="1">
-                            <a:latin typeface="Cambria Math" panose="02040503050406030204" pitchFamily="18" charset="0"/>
-                          </a:rPr>
-                        </m:ctrlPr>
-                      </m:dPr>
-                      <m:e>
-                        <m:r>
-                          <a:rPr lang="en-GB" sz="2400" i="1">
+                          <a:rPr lang="en-GB" sz="2200" i="1">
                             <a:latin typeface="Cambria Math" panose="02040503050406030204" pitchFamily="18" charset="0"/>
                           </a:rPr>
                           <m:t>𝑖</m:t>
@@ -9736,12 +9488,12 @@
                     </m:d>
                   </m:oMath>
                 </a14:m>
-                <a:endParaRPr lang="en-GB" sz="2400" dirty="0"/>
+                <a:endParaRPr lang="en-GB" sz="2200" dirty="0"/>
               </a:p>
             </p:txBody>
           </p:sp>
         </mc:Choice>
-        <mc:Fallback xmlns="">
+        <mc:Fallback>
           <p:sp>
             <p:nvSpPr>
               <p:cNvPr id="31" name="TextBox 30">
@@ -9758,16 +9510,16 @@
             </p:nvSpPr>
             <p:spPr>
               <a:xfrm>
-                <a:off x="495083" y="9524788"/>
-                <a:ext cx="10892913" cy="404919"/>
+                <a:off x="201962" y="8426601"/>
+                <a:ext cx="8750472" cy="371064"/>
               </a:xfrm>
               <a:prstGeom prst="rect">
                 <a:avLst/>
               </a:prstGeom>
               <a:blipFill>
-                <a:blip r:embed="rId4"/>
+                <a:blip r:embed="rId6"/>
                 <a:stretch>
-                  <a:fillRect t="-19403" b="-38806"/>
+                  <a:fillRect t="-19672" b="-39344"/>
                 </a:stretch>
               </a:blipFill>
             </p:spPr>
@@ -9786,8 +9538,8 @@
           </p:sp>
         </mc:Fallback>
       </mc:AlternateContent>
-      <mc:AlternateContent xmlns:mc="http://schemas.openxmlformats.org/markup-compatibility/2006" xmlns:a14="http://schemas.microsoft.com/office/drawing/2010/main">
-        <mc:Choice Requires="a14">
+      <mc:AlternateContent xmlns:mc="http://schemas.openxmlformats.org/markup-compatibility/2006">
+        <mc:Choice xmlns:a14="http://schemas.microsoft.com/office/drawing/2010/main" Requires="a14">
           <p:sp>
             <p:nvSpPr>
               <p:cNvPr id="63" name="TextBox 62">
@@ -9802,8 +9554,8 @@
             </p:nvSpPr>
             <p:spPr>
               <a:xfrm>
-                <a:off x="495083" y="10101017"/>
-                <a:ext cx="10809982" cy="425822"/>
+                <a:off x="201961" y="8972350"/>
+                <a:ext cx="8750472" cy="390363"/>
               </a:xfrm>
               <a:prstGeom prst="rect">
                 <a:avLst/>
@@ -9821,7 +9573,7 @@
                   <m:oMathPara xmlns:m="http://schemas.openxmlformats.org/officeDocument/2006/math">
                     <m:oMath>
                       <m:r>
-                        <a:rPr lang="en-GB" sz="2400" b="0" i="1" smtClean="0">
+                        <a:rPr lang="en-GB" sz="2200" b="0" i="1" smtClean="0">
                           <a:latin typeface="Cambria Math" panose="02040503050406030204" pitchFamily="18" charset="0"/>
                         </a:rPr>
                         <m:t>𝐺</m:t>
@@ -9829,14 +9581,14 @@
                       <m:d>
                         <m:dPr>
                           <m:ctrlPr>
-                            <a:rPr lang="en-GB" sz="2400" b="0" i="1" smtClean="0">
+                            <a:rPr lang="en-GB" sz="2200" b="0" i="1" smtClean="0">
                               <a:latin typeface="Cambria Math" panose="02040503050406030204" pitchFamily="18" charset="0"/>
                             </a:rPr>
                           </m:ctrlPr>
                         </m:dPr>
                         <m:e>
                           <m:r>
-                            <a:rPr lang="en-GB" sz="2400" b="0" i="1" smtClean="0">
+                            <a:rPr lang="en-GB" sz="2200" b="0" i="1" smtClean="0">
                               <a:latin typeface="Cambria Math" panose="02040503050406030204" pitchFamily="18" charset="0"/>
                             </a:rPr>
                             <m:t>𝑚</m:t>
@@ -9844,7 +9596,7 @@
                         </m:e>
                       </m:d>
                       <m:r>
-                        <a:rPr lang="en-GB" sz="2400" b="0" i="1" smtClean="0">
+                        <a:rPr lang="en-GB" sz="2200" b="0" i="1" smtClean="0">
                           <a:latin typeface="Cambria Math" panose="02040503050406030204" pitchFamily="18" charset="0"/>
                         </a:rPr>
                         <m:t>= </m:t>
@@ -9852,14 +9604,14 @@
                       <m:sSub>
                         <m:sSubPr>
                           <m:ctrlPr>
-                            <a:rPr lang="en-GB" sz="2400" b="0" i="1" smtClean="0">
+                            <a:rPr lang="en-GB" sz="2200" b="0" i="1" smtClean="0">
                               <a:latin typeface="Cambria Math" panose="02040503050406030204" pitchFamily="18" charset="0"/>
                             </a:rPr>
                           </m:ctrlPr>
                         </m:sSubPr>
                         <m:e>
                           <m:r>
-                            <a:rPr lang="en-GB" sz="2400" b="0" i="1" smtClean="0">
+                            <a:rPr lang="en-GB" sz="2200" b="0" i="1" smtClean="0">
                               <a:latin typeface="Cambria Math" panose="02040503050406030204" pitchFamily="18" charset="0"/>
                             </a:rPr>
                             <m:t>𝐺</m:t>
@@ -9867,7 +9619,7 @@
                         </m:e>
                         <m:sub>
                           <m:r>
-                            <a:rPr lang="en-GB" sz="2400" b="0" i="1" smtClean="0">
+                            <a:rPr lang="en-GB" sz="2200" b="0" i="1" smtClean="0">
                               <a:latin typeface="Cambria Math" panose="02040503050406030204" pitchFamily="18" charset="0"/>
                             </a:rPr>
                             <m:t>0</m:t>
@@ -9875,7 +9627,7 @@
                         </m:sub>
                       </m:sSub>
                       <m:r>
-                        <a:rPr lang="en-GB" sz="2400" b="0" i="1" smtClean="0">
+                        <a:rPr lang="en-GB" sz="2200" b="0" i="1" smtClean="0">
                           <a:latin typeface="Cambria Math" panose="02040503050406030204" pitchFamily="18" charset="0"/>
                         </a:rPr>
                         <m:t>+</m:t>
@@ -9885,7 +9637,7 @@
                           <m:begChr m:val="["/>
                           <m:endChr m:val="]"/>
                           <m:ctrlPr>
-                            <a:rPr lang="en-GB" sz="2400" b="0" i="1" smtClean="0">
+                            <a:rPr lang="en-GB" sz="2200" b="0" i="1" smtClean="0">
                               <a:latin typeface="Cambria Math" panose="02040503050406030204" pitchFamily="18" charset="0"/>
                             </a:rPr>
                           </m:ctrlPr>
@@ -9894,14 +9646,14 @@
                           <m:sSub>
                             <m:sSubPr>
                               <m:ctrlPr>
-                                <a:rPr lang="en-GB" sz="2400" b="0" i="1" smtClean="0">
+                                <a:rPr lang="en-GB" sz="2200" b="0" i="1" smtClean="0">
                                   <a:latin typeface="Cambria Math" panose="02040503050406030204" pitchFamily="18" charset="0"/>
                                 </a:rPr>
                               </m:ctrlPr>
                             </m:sSubPr>
                             <m:e>
                               <m:r>
-                                <a:rPr lang="en-GB" sz="2400" b="0" i="1" smtClean="0">
+                                <a:rPr lang="en-GB" sz="2200" b="0" i="1" smtClean="0">
                                   <a:latin typeface="Cambria Math" panose="02040503050406030204" pitchFamily="18" charset="0"/>
                                 </a:rPr>
                                 <m:t>𝑇</m:t>
@@ -9909,7 +9661,7 @@
                             </m:e>
                             <m:sub>
                               <m:r>
-                                <a:rPr lang="en-GB" sz="2400" b="0" i="1" smtClean="0">
+                                <a:rPr lang="en-GB" sz="2200" b="0" i="1" smtClean="0">
                                   <a:latin typeface="Cambria Math" panose="02040503050406030204" pitchFamily="18" charset="0"/>
                                 </a:rPr>
                                 <m:t>𝑎𝑡𝑡</m:t>
@@ -9919,14 +9671,14 @@
                           <m:d>
                             <m:dPr>
                               <m:ctrlPr>
-                                <a:rPr lang="en-GB" sz="2400" b="0" i="1" smtClean="0">
+                                <a:rPr lang="en-GB" sz="2200" b="0" i="1" smtClean="0">
                                   <a:latin typeface="Cambria Math" panose="02040503050406030204" pitchFamily="18" charset="0"/>
                                 </a:rPr>
                               </m:ctrlPr>
                             </m:dPr>
                             <m:e>
                               <m:r>
-                                <a:rPr lang="en-GB" sz="2400" b="0" i="1" smtClean="0">
+                                <a:rPr lang="en-GB" sz="2200" b="0" i="1" smtClean="0">
                                   <a:latin typeface="Cambria Math" panose="02040503050406030204" pitchFamily="18" charset="0"/>
                                 </a:rPr>
                                 <m:t>𝑚</m:t>
@@ -9934,7 +9686,7 @@
                             </m:e>
                           </m:d>
                           <m:r>
-                            <a:rPr lang="en-GB" sz="2400" b="0" i="1" smtClean="0">
+                            <a:rPr lang="en-GB" sz="2200" b="0" i="1" smtClean="0">
                               <a:latin typeface="Cambria Math" panose="02040503050406030204" pitchFamily="18" charset="0"/>
                             </a:rPr>
                             <m:t>−</m:t>
@@ -9942,14 +9694,14 @@
                           <m:sSub>
                             <m:sSubPr>
                               <m:ctrlPr>
-                                <a:rPr lang="en-GB" sz="2400" b="0" i="1" smtClean="0">
+                                <a:rPr lang="en-GB" sz="2200" b="0" i="1" smtClean="0">
                                   <a:latin typeface="Cambria Math" panose="02040503050406030204" pitchFamily="18" charset="0"/>
                                 </a:rPr>
                               </m:ctrlPr>
                             </m:sSubPr>
                             <m:e>
                               <m:r>
-                                <a:rPr lang="en-GB" sz="2400" b="0" i="1" smtClean="0">
+                                <a:rPr lang="en-GB" sz="2200" b="0" i="1" smtClean="0">
                                   <a:latin typeface="Cambria Math" panose="02040503050406030204" pitchFamily="18" charset="0"/>
                                 </a:rPr>
                                 <m:t>𝑇</m:t>
@@ -9957,7 +9709,7 @@
                             </m:e>
                             <m:sub>
                               <m:r>
-                                <a:rPr lang="en-GB" sz="2400" b="0" i="1" smtClean="0">
+                                <a:rPr lang="en-GB" sz="2200" b="0" i="1" smtClean="0">
                                   <a:latin typeface="Cambria Math" panose="02040503050406030204" pitchFamily="18" charset="0"/>
                                 </a:rPr>
                                 <m:t>𝑡𝑔𝑡</m:t>
@@ -9965,19 +9717,19 @@
                             </m:sub>
                           </m:sSub>
                           <m:r>
-                            <a:rPr lang="en-GB" sz="2400" b="0" i="1" smtClean="0">
+                            <a:rPr lang="en-GB" sz="2200" b="0" i="1" smtClean="0">
                               <a:latin typeface="Cambria Math" panose="02040503050406030204" pitchFamily="18" charset="0"/>
                             </a:rPr>
                             <m:t>(</m:t>
                           </m:r>
                           <m:r>
-                            <a:rPr lang="en-GB" sz="2400" b="0" i="1" smtClean="0">
+                            <a:rPr lang="en-GB" sz="2200" b="0" i="1" smtClean="0">
                               <a:latin typeface="Cambria Math" panose="02040503050406030204" pitchFamily="18" charset="0"/>
                             </a:rPr>
                             <m:t>𝑚</m:t>
                           </m:r>
                           <m:r>
-                            <a:rPr lang="en-GB" sz="2400" b="0" i="1" smtClean="0">
+                            <a:rPr lang="en-GB" sz="2200" b="0" i="1" smtClean="0">
                               <a:latin typeface="Cambria Math" panose="02040503050406030204" pitchFamily="18" charset="0"/>
                             </a:rPr>
                             <m:t>)</m:t>
@@ -9987,12 +9739,12 @@
                     </m:oMath>
                   </m:oMathPara>
                 </a14:m>
-                <a:endParaRPr lang="en-GB" sz="2400" dirty="0"/>
+                <a:endParaRPr lang="en-GB" sz="2200" dirty="0"/>
               </a:p>
             </p:txBody>
           </p:sp>
         </mc:Choice>
-        <mc:Fallback xmlns="">
+        <mc:Fallback>
           <p:sp>
             <p:nvSpPr>
               <p:cNvPr id="63" name="TextBox 62">
@@ -10009,552 +9761,16 @@
             </p:nvSpPr>
             <p:spPr>
               <a:xfrm>
-                <a:off x="495083" y="10101017"/>
-                <a:ext cx="10809982" cy="425822"/>
+                <a:off x="201961" y="8972350"/>
+                <a:ext cx="8750472" cy="390363"/>
               </a:xfrm>
               <a:prstGeom prst="rect">
                 <a:avLst/>
               </a:prstGeom>
               <a:blipFill>
-                <a:blip r:embed="rId5"/>
+                <a:blip r:embed="rId7"/>
                 <a:stretch>
-                  <a:fillRect/>
-                </a:stretch>
-              </a:blipFill>
-            </p:spPr>
-            <p:txBody>
-              <a:bodyPr/>
-              <a:lstStyle/>
-              <a:p>
-                <a:r>
-                  <a:rPr lang="en-GB">
-                    <a:noFill/>
-                  </a:rPr>
-                  <a:t> </a:t>
-                </a:r>
-              </a:p>
-            </p:txBody>
-          </p:sp>
-        </mc:Fallback>
-      </mc:AlternateContent>
-      <mc:AlternateContent xmlns:mc="http://schemas.openxmlformats.org/markup-compatibility/2006" xmlns:a14="http://schemas.microsoft.com/office/drawing/2010/main">
-        <mc:Choice Requires="a14">
-          <p:sp>
-            <p:nvSpPr>
-              <p:cNvPr id="67" name="TextBox 66">
-                <a:extLst>
-                  <a:ext uri="{FF2B5EF4-FFF2-40B4-BE49-F238E27FC236}">
-                    <a16:creationId xmlns:a16="http://schemas.microsoft.com/office/drawing/2014/main" id="{382BF83C-E493-7A4A-10FF-3E4E02C3D77C}"/>
-                  </a:ext>
-                </a:extLst>
-              </p:cNvPr>
-              <p:cNvSpPr txBox="1"/>
-              <p:nvPr/>
-            </p:nvSpPr>
-            <p:spPr>
-              <a:xfrm>
-                <a:off x="591376" y="10644451"/>
-                <a:ext cx="10662889" cy="4190571"/>
-              </a:xfrm>
-              <a:prstGeom prst="rect">
-                <a:avLst/>
-              </a:prstGeom>
-              <a:noFill/>
-            </p:spPr>
-            <p:txBody>
-              <a:bodyPr wrap="square">
-                <a:spAutoFit/>
-              </a:bodyPr>
-              <a:lstStyle/>
-              <a:p>
-                <a14:m>
-                  <m:oMath xmlns:m="http://schemas.openxmlformats.org/officeDocument/2006/math">
-                    <m:sSub>
-                      <m:sSubPr>
-                        <m:ctrlPr>
-                          <a:rPr lang="en-GB" sz="2400" i="1">
-                            <a:latin typeface="Cambria Math" panose="02040503050406030204" pitchFamily="18" charset="0"/>
-                          </a:rPr>
-                        </m:ctrlPr>
-                      </m:sSubPr>
-                      <m:e>
-                        <m:r>
-                          <a:rPr lang="en-GB" sz="2400" i="1">
-                            <a:latin typeface="Cambria Math" panose="02040503050406030204" pitchFamily="18" charset="0"/>
-                          </a:rPr>
-                          <m:t>𝐿</m:t>
-                        </m:r>
-                      </m:e>
-                      <m:sub>
-                        <m:r>
-                          <a:rPr lang="en-GB" sz="2400" i="1">
-                            <a:latin typeface="Cambria Math" panose="02040503050406030204" pitchFamily="18" charset="0"/>
-                          </a:rPr>
-                          <m:t>𝑑</m:t>
-                        </m:r>
-                      </m:sub>
-                    </m:sSub>
-                    <m:d>
-                      <m:dPr>
-                        <m:ctrlPr>
-                          <a:rPr lang="en-GB" sz="2400" i="1">
-                            <a:latin typeface="Cambria Math" panose="02040503050406030204" pitchFamily="18" charset="0"/>
-                          </a:rPr>
-                        </m:ctrlPr>
-                      </m:dPr>
-                      <m:e>
-                        <m:r>
-                          <a:rPr lang="en-GB" sz="2400" i="1">
-                            <a:latin typeface="Cambria Math" panose="02040503050406030204" pitchFamily="18" charset="0"/>
-                          </a:rPr>
-                          <m:t>𝑖</m:t>
-                        </m:r>
-                      </m:e>
-                    </m:d>
-                    <m:r>
-                      <a:rPr lang="en-GB" sz="2400" i="1">
-                        <a:latin typeface="Cambria Math" panose="02040503050406030204" pitchFamily="18" charset="0"/>
-                      </a:rPr>
-                      <m:t> </m:t>
-                    </m:r>
-                  </m:oMath>
-                </a14:m>
-                <a:r>
-                  <a:rPr lang="en-US" sz="2400" dirty="0">
-                    <a:ea typeface="Roboto" panose="02000000000000000000" pitchFamily="2" charset="0"/>
-                  </a:rPr>
-                  <a:t>- </a:t>
-                </a:r>
-                <a:r>
-                  <a:rPr lang="en-GB" sz="2400" dirty="0">
-                    <a:ea typeface="Roboto" panose="02000000000000000000" pitchFamily="2" charset="0"/>
-                  </a:rPr>
-                  <a:t>Predicted lap time for driver </a:t>
-                </a:r>
-                <a:r>
-                  <a:rPr lang="en-GB" sz="2400" i="1" dirty="0">
-                    <a:ea typeface="Roboto" panose="02000000000000000000" pitchFamily="2" charset="0"/>
-                  </a:rPr>
-                  <a:t>d</a:t>
-                </a:r>
-                <a:r>
-                  <a:rPr lang="en-GB" sz="2400" dirty="0">
-                    <a:ea typeface="Roboto" panose="02000000000000000000" pitchFamily="2" charset="0"/>
-                  </a:rPr>
-                  <a:t> on lap </a:t>
-                </a:r>
-                <a:r>
-                  <a:rPr lang="en-GB" sz="2400" i="1" dirty="0" err="1">
-                    <a:ea typeface="Roboto" panose="02000000000000000000" pitchFamily="2" charset="0"/>
-                  </a:rPr>
-                  <a:t>i</a:t>
-                </a:r>
-                <a:endParaRPr lang="en-US" sz="2400" i="1" dirty="0">
-                  <a:ea typeface="Roboto" panose="02000000000000000000" pitchFamily="2" charset="0"/>
-                </a:endParaRPr>
-              </a:p>
-              <a:p>
-                <a14:m>
-                  <m:oMath xmlns:m="http://schemas.openxmlformats.org/officeDocument/2006/math">
-                    <m:sSub>
-                      <m:sSubPr>
-                        <m:ctrlPr>
-                          <a:rPr lang="en-GB" sz="2400" b="0" i="1" smtClean="0">
-                            <a:latin typeface="Cambria Math" panose="02040503050406030204" pitchFamily="18" charset="0"/>
-                            <a:ea typeface="Roboto" panose="02000000000000000000" pitchFamily="2" charset="0"/>
-                          </a:rPr>
-                        </m:ctrlPr>
-                      </m:sSubPr>
-                      <m:e>
-                        <m:r>
-                          <a:rPr lang="en-GB" sz="2400" b="0" i="1" smtClean="0">
-                            <a:latin typeface="Cambria Math" panose="02040503050406030204" pitchFamily="18" charset="0"/>
-                            <a:ea typeface="Roboto" panose="02000000000000000000" pitchFamily="2" charset="0"/>
-                          </a:rPr>
-                          <m:t>𝐵</m:t>
-                        </m:r>
-                      </m:e>
-                      <m:sub>
-                        <m:r>
-                          <a:rPr lang="en-GB" sz="2400" b="0" i="1" smtClean="0">
-                            <a:latin typeface="Cambria Math" panose="02040503050406030204" pitchFamily="18" charset="0"/>
-                            <a:ea typeface="Roboto" panose="02000000000000000000" pitchFamily="2" charset="0"/>
-                          </a:rPr>
-                          <m:t>𝑑</m:t>
-                        </m:r>
-                      </m:sub>
-                    </m:sSub>
-                  </m:oMath>
-                </a14:m>
-                <a:r>
-                  <a:rPr lang="en-US" sz="2400" dirty="0">
-                    <a:ea typeface="Roboto" panose="02000000000000000000" pitchFamily="2" charset="0"/>
-                  </a:rPr>
-                  <a:t> - </a:t>
-                </a:r>
-                <a:r>
-                  <a:rPr lang="en-GB" sz="2400" dirty="0">
-                    <a:ea typeface="Roboto" panose="02000000000000000000" pitchFamily="2" charset="0"/>
-                  </a:rPr>
-                  <a:t>Baseline lap time for driver </a:t>
-                </a:r>
-                <a:r>
-                  <a:rPr lang="en-GB" sz="2400" i="1" dirty="0">
-                    <a:ea typeface="Roboto" panose="02000000000000000000" pitchFamily="2" charset="0"/>
-                  </a:rPr>
-                  <a:t>d</a:t>
-                </a:r>
-                <a:r>
-                  <a:rPr lang="en-GB" sz="2400" dirty="0">
-                    <a:ea typeface="Roboto" panose="02000000000000000000" pitchFamily="2" charset="0"/>
-                  </a:rPr>
-                  <a:t>, calculated from the reference lap time and  driver/car pace offset.</a:t>
-                </a:r>
-              </a:p>
-              <a:p>
-                <a14:m>
-                  <m:oMath xmlns:m="http://schemas.openxmlformats.org/officeDocument/2006/math">
-                    <m:sSub>
-                      <m:sSubPr>
-                        <m:ctrlPr>
-                          <a:rPr lang="en-GB" sz="2400" i="1">
-                            <a:latin typeface="Cambria Math" panose="02040503050406030204" pitchFamily="18" charset="0"/>
-                          </a:rPr>
-                        </m:ctrlPr>
-                      </m:sSubPr>
-                      <m:e>
-                        <m:r>
-                          <a:rPr lang="en-GB" sz="2400" i="1">
-                            <a:latin typeface="Cambria Math" panose="02040503050406030204" pitchFamily="18" charset="0"/>
-                          </a:rPr>
-                          <m:t>𝐷</m:t>
-                        </m:r>
-                      </m:e>
-                      <m:sub>
-                        <m:sSub>
-                          <m:sSubPr>
-                            <m:ctrlPr>
-                              <a:rPr lang="en-GB" sz="2400" i="1">
-                                <a:latin typeface="Cambria Math" panose="02040503050406030204" pitchFamily="18" charset="0"/>
-                              </a:rPr>
-                            </m:ctrlPr>
-                          </m:sSubPr>
-                          <m:e>
-                            <m:r>
-                              <a:rPr lang="en-GB" sz="2400" i="1">
-                                <a:latin typeface="Cambria Math" panose="02040503050406030204" pitchFamily="18" charset="0"/>
-                              </a:rPr>
-                              <m:t>𝑐</m:t>
-                            </m:r>
-                          </m:e>
-                          <m:sub>
-                            <m:r>
-                              <a:rPr lang="en-GB" sz="2400" i="1">
-                                <a:latin typeface="Cambria Math" panose="02040503050406030204" pitchFamily="18" charset="0"/>
-                              </a:rPr>
-                              <m:t>𝑑</m:t>
-                            </m:r>
-                          </m:sub>
-                        </m:sSub>
-                        <m:r>
-                          <a:rPr lang="en-GB" sz="2400" i="1">
-                            <a:latin typeface="Cambria Math" panose="02040503050406030204" pitchFamily="18" charset="0"/>
-                          </a:rPr>
-                          <m:t>(</m:t>
-                        </m:r>
-                        <m:r>
-                          <a:rPr lang="en-GB" sz="2400" i="1">
-                            <a:latin typeface="Cambria Math" panose="02040503050406030204" pitchFamily="18" charset="0"/>
-                          </a:rPr>
-                          <m:t>𝑖</m:t>
-                        </m:r>
-                        <m:r>
-                          <a:rPr lang="en-GB" sz="2400" i="1">
-                            <a:latin typeface="Cambria Math" panose="02040503050406030204" pitchFamily="18" charset="0"/>
-                          </a:rPr>
-                          <m:t>)</m:t>
-                        </m:r>
-                      </m:sub>
-                    </m:sSub>
-                  </m:oMath>
-                </a14:m>
-                <a:r>
-                  <a:rPr lang="en-US" sz="2400" dirty="0">
-                    <a:ea typeface="Roboto" panose="02000000000000000000" pitchFamily="2" charset="0"/>
-                  </a:rPr>
-                  <a:t> - Lap time loss due to tyre degradation for compound </a:t>
-                </a:r>
-                <a:r>
-                  <a:rPr lang="en-US" sz="2400" i="1" dirty="0">
-                    <a:ea typeface="Roboto" panose="02000000000000000000" pitchFamily="2" charset="0"/>
-                  </a:rPr>
-                  <a:t>c</a:t>
-                </a:r>
-                <a:r>
-                  <a:rPr lang="en-US" sz="2400" dirty="0">
-                    <a:ea typeface="Roboto" panose="02000000000000000000" pitchFamily="2" charset="0"/>
-                  </a:rPr>
-                  <a:t> on lap </a:t>
-                </a:r>
-                <a:r>
-                  <a:rPr lang="en-US" sz="2400" i="1" dirty="0" err="1">
-                    <a:ea typeface="Roboto" panose="02000000000000000000" pitchFamily="2" charset="0"/>
-                  </a:rPr>
-                  <a:t>i</a:t>
-                </a:r>
-                <a:r>
-                  <a:rPr lang="en-US" sz="2400" i="1" dirty="0">
-                    <a:ea typeface="Roboto" panose="02000000000000000000" pitchFamily="2" charset="0"/>
-                  </a:rPr>
-                  <a:t> </a:t>
-                </a:r>
-                <a:r>
-                  <a:rPr lang="en-US" sz="2400" dirty="0">
-                    <a:ea typeface="Roboto" panose="02000000000000000000" pitchFamily="2" charset="0"/>
-                  </a:rPr>
-                  <a:t>for driver </a:t>
-                </a:r>
-                <a:r>
-                  <a:rPr lang="en-US" sz="2400" i="1" dirty="0">
-                    <a:ea typeface="Roboto" panose="02000000000000000000" pitchFamily="2" charset="0"/>
-                  </a:rPr>
-                  <a:t>d</a:t>
-                </a:r>
-                <a:r>
-                  <a:rPr lang="en-US" sz="2400" dirty="0">
-                    <a:ea typeface="Roboto" panose="02000000000000000000" pitchFamily="2" charset="0"/>
-                  </a:rPr>
-                  <a:t>.</a:t>
-                </a:r>
-                <a:endParaRPr lang="en-GB" sz="2400" dirty="0">
-                  <a:ea typeface="Roboto" panose="02000000000000000000" pitchFamily="2" charset="0"/>
-                </a:endParaRPr>
-              </a:p>
-              <a:p>
-                <a14:m>
-                  <m:oMath xmlns:m="http://schemas.openxmlformats.org/officeDocument/2006/math">
-                    <m:sSub>
-                      <m:sSubPr>
-                        <m:ctrlPr>
-                          <a:rPr lang="en-GB" sz="2400" i="1">
-                            <a:latin typeface="Cambria Math" panose="02040503050406030204" pitchFamily="18" charset="0"/>
-                          </a:rPr>
-                        </m:ctrlPr>
-                      </m:sSubPr>
-                      <m:e>
-                        <m:r>
-                          <a:rPr lang="en-GB" sz="2400" i="1">
-                            <a:latin typeface="Cambria Math" panose="02040503050406030204" pitchFamily="18" charset="0"/>
-                          </a:rPr>
-                          <m:t>𝑊</m:t>
-                        </m:r>
-                      </m:e>
-                      <m:sub>
-                        <m:r>
-                          <a:rPr lang="en-GB" sz="2400" i="1">
-                            <a:latin typeface="Cambria Math" panose="02040503050406030204" pitchFamily="18" charset="0"/>
-                          </a:rPr>
-                          <m:t>𝑑</m:t>
-                        </m:r>
-                      </m:sub>
-                    </m:sSub>
-                    <m:d>
-                      <m:dPr>
-                        <m:ctrlPr>
-                          <a:rPr lang="en-GB" sz="2400" i="1">
-                            <a:latin typeface="Cambria Math" panose="02040503050406030204" pitchFamily="18" charset="0"/>
-                          </a:rPr>
-                        </m:ctrlPr>
-                      </m:dPr>
-                      <m:e>
-                        <m:r>
-                          <a:rPr lang="en-GB" sz="2400" i="1">
-                            <a:latin typeface="Cambria Math" panose="02040503050406030204" pitchFamily="18" charset="0"/>
-                          </a:rPr>
-                          <m:t>𝑖</m:t>
-                        </m:r>
-                      </m:e>
-                    </m:d>
-                    <m:r>
-                      <a:rPr lang="en-GB" sz="2400" b="0" i="1" smtClean="0">
-                        <a:latin typeface="Cambria Math" panose="02040503050406030204" pitchFamily="18" charset="0"/>
-                      </a:rPr>
-                      <m:t> </m:t>
-                    </m:r>
-                  </m:oMath>
-                </a14:m>
-                <a:r>
-                  <a:rPr lang="en-US" sz="2400" dirty="0">
-                    <a:ea typeface="Roboto" panose="02000000000000000000" pitchFamily="2" charset="0"/>
-                  </a:rPr>
-                  <a:t>- Configurable lap time penalty from tyre warm-up applied following a tyre change.</a:t>
-                </a:r>
-                <a:endParaRPr lang="en-GB" sz="2400" dirty="0">
-                  <a:ea typeface="Roboto" panose="02000000000000000000" pitchFamily="2" charset="0"/>
-                </a:endParaRPr>
-              </a:p>
-              <a:p>
-                <a14:m>
-                  <m:oMath xmlns:m="http://schemas.openxmlformats.org/officeDocument/2006/math">
-                    <m:sSub>
-                      <m:sSubPr>
-                        <m:ctrlPr>
-                          <a:rPr lang="en-GB" sz="2400" i="1">
-                            <a:latin typeface="Cambria Math" panose="02040503050406030204" pitchFamily="18" charset="0"/>
-                          </a:rPr>
-                        </m:ctrlPr>
-                      </m:sSubPr>
-                      <m:e>
-                        <m:r>
-                          <a:rPr lang="en-GB" sz="2400" i="1">
-                            <a:latin typeface="Cambria Math" panose="02040503050406030204" pitchFamily="18" charset="0"/>
-                          </a:rPr>
-                          <m:t>𝑅</m:t>
-                        </m:r>
-                      </m:e>
-                      <m:sub>
-                        <m:r>
-                          <a:rPr lang="en-GB" sz="2400" i="1">
-                            <a:latin typeface="Cambria Math" panose="02040503050406030204" pitchFamily="18" charset="0"/>
-                          </a:rPr>
-                          <m:t>𝑑</m:t>
-                        </m:r>
-                      </m:sub>
-                    </m:sSub>
-                    <m:d>
-                      <m:dPr>
-                        <m:ctrlPr>
-                          <a:rPr lang="en-GB" sz="2400" i="1">
-                            <a:latin typeface="Cambria Math" panose="02040503050406030204" pitchFamily="18" charset="0"/>
-                          </a:rPr>
-                        </m:ctrlPr>
-                      </m:dPr>
-                      <m:e>
-                        <m:r>
-                          <a:rPr lang="en-GB" sz="2400" i="1">
-                            <a:latin typeface="Cambria Math" panose="02040503050406030204" pitchFamily="18" charset="0"/>
-                          </a:rPr>
-                          <m:t>𝑖</m:t>
-                        </m:r>
-                      </m:e>
-                    </m:d>
-                  </m:oMath>
-                </a14:m>
-                <a:r>
-                  <a:rPr lang="en-US" sz="2400" dirty="0">
-                    <a:ea typeface="Roboto" panose="02000000000000000000" pitchFamily="2" charset="0"/>
-                  </a:rPr>
-                  <a:t> - Configurable lap time penalty to model traffic interaction.</a:t>
-                </a:r>
-                <a:endParaRPr lang="en-GB" sz="2400" dirty="0">
-                  <a:ea typeface="Roboto" panose="02000000000000000000" pitchFamily="2" charset="0"/>
-                </a:endParaRPr>
-              </a:p>
-              <a:p>
-                <a14:m>
-                  <m:oMath xmlns:m="http://schemas.openxmlformats.org/officeDocument/2006/math">
-                    <m:sSub>
-                      <m:sSubPr>
-                        <m:ctrlPr>
-                          <a:rPr lang="en-GB" sz="2400" b="0" i="1">
-                            <a:latin typeface="Cambria Math" panose="02040503050406030204" pitchFamily="18" charset="0"/>
-                          </a:rPr>
-                        </m:ctrlPr>
-                      </m:sSubPr>
-                      <m:e>
-                        <m:r>
-                          <a:rPr lang="en-GB" sz="2400" b="0" i="1">
-                            <a:latin typeface="Cambria Math" panose="02040503050406030204" pitchFamily="18" charset="0"/>
-                          </a:rPr>
-                          <m:t>𝑄</m:t>
-                        </m:r>
-                      </m:e>
-                      <m:sub>
-                        <m:r>
-                          <a:rPr lang="en-GB" sz="2400" b="0" i="1">
-                            <a:latin typeface="Cambria Math" panose="02040503050406030204" pitchFamily="18" charset="0"/>
-                          </a:rPr>
-                          <m:t>𝑑</m:t>
-                        </m:r>
-                      </m:sub>
-                    </m:sSub>
-                    <m:d>
-                      <m:dPr>
-                        <m:ctrlPr>
-                          <a:rPr lang="en-GB" sz="2400" b="0" i="1">
-                            <a:latin typeface="Cambria Math" panose="02040503050406030204" pitchFamily="18" charset="0"/>
-                          </a:rPr>
-                        </m:ctrlPr>
-                      </m:dPr>
-                      <m:e>
-                        <m:r>
-                          <a:rPr lang="en-GB" sz="2400" b="0" i="1">
-                            <a:latin typeface="Cambria Math" panose="02040503050406030204" pitchFamily="18" charset="0"/>
-                          </a:rPr>
-                          <m:t>𝑖</m:t>
-                        </m:r>
-                      </m:e>
-                    </m:d>
-                  </m:oMath>
-                </a14:m>
-                <a:r>
-                  <a:rPr lang="en-US" sz="2400" dirty="0">
-                    <a:ea typeface="Roboto" panose="02000000000000000000" pitchFamily="2" charset="0"/>
-                  </a:rPr>
-                  <a:t> - Configurable lap time penalty to represent pit stop loss</a:t>
-                </a:r>
-                <a:br>
-                  <a:rPr lang="en-US" sz="2400" dirty="0">
-                    <a:ea typeface="Roboto" panose="02000000000000000000" pitchFamily="2" charset="0"/>
-                  </a:rPr>
-                </a:br>
-                <a:br>
-                  <a:rPr lang="en-US" sz="2400" dirty="0">
-                    <a:ea typeface="Roboto" panose="02000000000000000000" pitchFamily="2" charset="0"/>
-                  </a:rPr>
-                </a:br>
-                <a:r>
-                  <a:rPr lang="en-GB" sz="2400" dirty="0">
-                    <a:solidFill>
-                      <a:srgbClr val="30363D"/>
-                    </a:solidFill>
-                  </a:rPr>
-                  <a:t>Positive G = attacker behind. ΔG isolates the time generated by the undercut from whether it changes track position.</a:t>
-                </a:r>
-                <a:endParaRPr lang="en-US" sz="2400" dirty="0">
-                  <a:ea typeface="Roboto" panose="02000000000000000000" pitchFamily="2" charset="0"/>
-                </a:endParaRPr>
-              </a:p>
-            </p:txBody>
-          </p:sp>
-        </mc:Choice>
-        <mc:Fallback xmlns="">
-          <p:sp>
-            <p:nvSpPr>
-              <p:cNvPr id="67" name="TextBox 66">
-                <a:extLst>
-                  <a:ext uri="{FF2B5EF4-FFF2-40B4-BE49-F238E27FC236}">
-                    <a16:creationId xmlns:a16="http://schemas.microsoft.com/office/drawing/2014/main" id="{382BF83C-E493-7A4A-10FF-3E4E02C3D77C}"/>
-                  </a:ext>
-                </a:extLst>
-              </p:cNvPr>
-              <p:cNvSpPr txBox="1">
-                <a:spLocks noRot="1" noChangeAspect="1" noMove="1" noResize="1" noEditPoints="1" noAdjustHandles="1" noChangeArrowheads="1" noChangeShapeType="1" noTextEdit="1"/>
-              </p:cNvSpPr>
-              <p:nvPr/>
-            </p:nvSpPr>
-            <p:spPr>
-              <a:xfrm>
-                <a:off x="591376" y="10644451"/>
-                <a:ext cx="10662889" cy="4190571"/>
-              </a:xfrm>
-              <a:prstGeom prst="rect">
-                <a:avLst/>
-              </a:prstGeom>
-              <a:blipFill>
-                <a:blip r:embed="rId6"/>
-                <a:stretch>
-                  <a:fillRect l="-858" t="-1163" r="-1029" b="-2326"/>
+                  <a:fillRect b="-21875"/>
                 </a:stretch>
               </a:blipFill>
             </p:spPr>
@@ -10587,8 +9803,8 @@
         </p:nvSpPr>
         <p:spPr>
           <a:xfrm>
-            <a:off x="447676" y="15127365"/>
-            <a:ext cx="11161732" cy="5789534"/>
+            <a:off x="165719" y="15514688"/>
+            <a:ext cx="8778327" cy="4732851"/>
           </a:xfrm>
           <a:prstGeom prst="rect">
             <a:avLst/>
@@ -10641,8 +9857,8 @@
         </p:nvSpPr>
         <p:spPr>
           <a:xfrm>
-            <a:off x="703573" y="15251429"/>
-            <a:ext cx="10753865" cy="707886"/>
+            <a:off x="255361" y="15529514"/>
+            <a:ext cx="8522429" cy="646331"/>
           </a:xfrm>
           <a:prstGeom prst="rect">
             <a:avLst/>
@@ -10656,7 +9872,7 @@
           <a:lstStyle/>
           <a:p>
             <a:r>
-              <a:rPr lang="en-US" sz="4000" dirty="0">
+              <a:rPr lang="en-US" sz="3600" dirty="0">
                 <a:solidFill>
                   <a:schemeClr val="accent1"/>
                 </a:solidFill>
@@ -10682,8 +9898,8 @@
         </p:nvSpPr>
         <p:spPr>
           <a:xfrm>
-            <a:off x="703574" y="16175608"/>
-            <a:ext cx="10601492" cy="3634906"/>
+            <a:off x="298254" y="16191492"/>
+            <a:ext cx="8472122" cy="4056047"/>
           </a:xfrm>
           <a:prstGeom prst="rect">
             <a:avLst/>
@@ -10705,12 +9921,12 @@
               </a:spcAft>
             </a:pPr>
             <a:r>
-              <a:rPr lang="en-GB" sz="2400" dirty="0">
+              <a:rPr lang="en-GB" sz="2200" dirty="0">
                 <a:solidFill>
                   <a:srgbClr val="2D343C"/>
                 </a:solidFill>
               </a:rPr>
-              <a:t>Historic race data is acquired from public sources online, and decision points created based on each driver’s cumulative time at the sector two line. The model only uses parameters available to at the decision point and does not use any information from later in the race. The model operating window is designed around standard green-flag racing. It is not designed to operate in changing weather conditions or handle unexpected racing conditions such as safety cars. </a:t>
+              <a:t>Historic race data is acquired from public sources online, and decision points created based on each driver’s cumulative time at sector line two. The model only uses parameters available at the decision point and does not use any information from later in the race. The model operating window is designed around standard green-flag racing. It is not designed to operate in changing weather conditions or handle unexpected racing conditions such as safety cars. </a:t>
             </a:r>
           </a:p>
           <a:p>
@@ -10723,18 +9939,23 @@
               </a:spcAft>
             </a:pPr>
             <a:r>
-              <a:rPr lang="en-GB" sz="2400" dirty="0">
+              <a:rPr lang="en-GB" sz="2200" dirty="0">
                 <a:solidFill>
                   <a:srgbClr val="2D343C"/>
                 </a:solidFill>
               </a:rPr>
-              <a:t>Model parameters for testing &amp; validation were generated from full race data to provide representative inputs to represent data F1 teams would use from pre-race.</a:t>
+              <a:t>The prediction architecture is causal and does not use future race state, but historic validation parameters were retrospectively derived from full-race data to provide representative engineering inputs.</a:t>
             </a:r>
+            <a:endParaRPr lang="en-GB" sz="2000" dirty="0">
+              <a:solidFill>
+                <a:srgbClr val="2D343C"/>
+              </a:solidFill>
+            </a:endParaRPr>
           </a:p>
         </p:txBody>
       </p:sp>
-      <mc:AlternateContent xmlns:mc="http://schemas.openxmlformats.org/markup-compatibility/2006" xmlns:a14="http://schemas.microsoft.com/office/drawing/2010/main">
-        <mc:Choice Requires="a14">
+      <mc:AlternateContent xmlns:mc="http://schemas.openxmlformats.org/markup-compatibility/2006">
+        <mc:Choice xmlns:a14="http://schemas.microsoft.com/office/drawing/2010/main" Requires="a14">
           <p:graphicFrame>
             <p:nvGraphicFramePr>
               <p:cNvPr id="96" name="Table 95">
@@ -10750,14 +9971,14 @@
               <p:nvPr>
                 <p:extLst>
                   <p:ext uri="{D42A27DB-BD31-4B8C-83A1-F6EECF244321}">
-                    <p14:modId xmlns:p14="http://schemas.microsoft.com/office/powerpoint/2010/main" val="1982378214"/>
+                    <p14:modId xmlns:p14="http://schemas.microsoft.com/office/powerpoint/2010/main" val="419790620"/>
                   </p:ext>
                 </p:extLst>
               </p:nvPr>
             </p:nvGraphicFramePr>
             <p:xfrm>
-              <a:off x="20915228" y="3709164"/>
-              <a:ext cx="8707120" cy="3874047"/>
+              <a:off x="19778308" y="3045466"/>
+              <a:ext cx="10083925" cy="2934194"/>
             </p:xfrm>
             <a:graphic>
               <a:graphicData uri="http://schemas.openxmlformats.org/drawingml/2006/table">
@@ -10766,28 +9987,28 @@
                     <a:tableStyleId>{5C22544A-7EE6-4342-B048-85BDC9FD1C3A}</a:tableStyleId>
                   </a:tblPr>
                   <a:tblGrid>
-                    <a:gridCol w="3465703">
+                    <a:gridCol w="4986692">
                       <a:extLst>
                         <a:ext uri="{9D8B030D-6E8A-4147-A177-3AD203B41FA5}">
                           <a16:colId xmlns:a16="http://schemas.microsoft.com/office/drawing/2014/main" val="1303726572"/>
                         </a:ext>
                       </a:extLst>
                     </a:gridCol>
-                    <a:gridCol w="1587881">
+                    <a:gridCol w="1478280">
                       <a:extLst>
                         <a:ext uri="{9D8B030D-6E8A-4147-A177-3AD203B41FA5}">
                           <a16:colId xmlns:a16="http://schemas.microsoft.com/office/drawing/2014/main" val="452372859"/>
                         </a:ext>
                       </a:extLst>
                     </a:gridCol>
-                    <a:gridCol w="1591056">
+                    <a:gridCol w="1471867">
                       <a:extLst>
                         <a:ext uri="{9D8B030D-6E8A-4147-A177-3AD203B41FA5}">
                           <a16:colId xmlns:a16="http://schemas.microsoft.com/office/drawing/2014/main" val="3630223555"/>
                         </a:ext>
                       </a:extLst>
                     </a:gridCol>
-                    <a:gridCol w="2062480">
+                    <a:gridCol w="2147086">
                       <a:extLst>
                         <a:ext uri="{9D8B030D-6E8A-4147-A177-3AD203B41FA5}">
                           <a16:colId xmlns:a16="http://schemas.microsoft.com/office/drawing/2014/main" val="2743505408"/>
@@ -10803,7 +10024,7 @@
                         <a:p>
                           <a:pPr algn="ctr"/>
                           <a:r>
-                            <a:rPr lang="en-GB" sz="2400" dirty="0"/>
+                            <a:rPr lang="en-GB" sz="2200" dirty="0"/>
                             <a:t>Race</a:t>
                           </a:r>
                         </a:p>
@@ -10817,7 +10038,7 @@
                         <a:p>
                           <a:pPr algn="ctr"/>
                           <a:r>
-                            <a:rPr lang="en-GB" sz="2400" dirty="0"/>
+                            <a:rPr lang="en-GB" sz="2200" dirty="0"/>
                             <a:t>Predicted</a:t>
                           </a:r>
                         </a:p>
@@ -10831,7 +10052,7 @@
                         <a:p>
                           <a:pPr algn="ctr"/>
                           <a:r>
-                            <a:rPr lang="en-GB" sz="2400" dirty="0"/>
+                            <a:rPr lang="en-GB" sz="2200" dirty="0"/>
                             <a:t>Observed</a:t>
                           </a:r>
                         </a:p>
@@ -10845,32 +10066,32 @@
                         <a:p>
                           <a:pPr algn="ctr"/>
                           <a:r>
-                            <a:rPr lang="en-GB" sz="2400" dirty="0"/>
+                            <a:rPr lang="en-GB" sz="2200" dirty="0"/>
                             <a:t>Error at </a:t>
                           </a:r>
                           <a14:m>
                             <m:oMath xmlns:m="http://schemas.openxmlformats.org/officeDocument/2006/math">
                               <m:r>
-                                <a:rPr lang="en-GB" sz="2400" b="1" i="1" smtClean="0">
+                                <a:rPr lang="en-GB" sz="2200" b="1" i="1" smtClean="0">
                                   <a:latin typeface="Cambria Math" panose="02040503050406030204" pitchFamily="18" charset="0"/>
                                 </a:rPr>
                                 <m:t>𝒏</m:t>
                               </m:r>
                               <m:r>
-                                <a:rPr lang="en-GB" sz="2400" b="1" i="1" smtClean="0">
+                                <a:rPr lang="en-GB" sz="2200" b="1" i="1" smtClean="0">
                                   <a:latin typeface="Cambria Math" panose="02040503050406030204" pitchFamily="18" charset="0"/>
                                 </a:rPr>
                                 <m:t>+</m:t>
                               </m:r>
                               <m:r>
-                                <a:rPr lang="en-GB" sz="2400" b="1" i="1" smtClean="0">
+                                <a:rPr lang="en-GB" sz="2200" b="1" i="1" smtClean="0">
                                   <a:latin typeface="Cambria Math" panose="02040503050406030204" pitchFamily="18" charset="0"/>
                                 </a:rPr>
                                 <m:t>𝒐</m:t>
                               </m:r>
                             </m:oMath>
                           </a14:m>
-                          <a:endParaRPr lang="en-GB" sz="2400" dirty="0"/>
+                          <a:endParaRPr lang="en-GB" sz="2200" dirty="0"/>
                         </a:p>
                       </a:txBody>
                       <a:tcPr anchor="ctr"/>
@@ -10881,7 +10102,7 @@
                       </a:ext>
                     </a:extLst>
                   </a:tr>
-                  <a:tr h="582207">
+                  <a:tr h="605366">
                     <a:tc>
                       <a:txBody>
                         <a:bodyPr/>
@@ -10905,15 +10126,8 @@
                             <a:defRPr/>
                           </a:pPr>
                           <a:r>
-                            <a:rPr lang="en-GB" sz="2400" dirty="0"/>
-                            <a:t>Hungary 2023</a:t>
-                          </a:r>
-                          <a:br>
-                            <a:rPr lang="en-GB" sz="2400" dirty="0"/>
-                          </a:br>
-                          <a:r>
-                            <a:rPr lang="en-GB" sz="2400" dirty="0"/>
-                            <a:t>Norris → Piastri (L17)</a:t>
+                            <a:rPr lang="en-GB" sz="2200" dirty="0"/>
+                            <a:t>Hungary 2023 - Norris → Piastri (L17)</a:t>
                           </a:r>
                         </a:p>
                       </a:txBody>
@@ -10926,7 +10140,7 @@
                         <a:p>
                           <a:pPr algn="ctr"/>
                           <a:r>
-                            <a:rPr lang="en-GB" sz="2400" dirty="0"/>
+                            <a:rPr lang="en-GB" sz="2200" dirty="0"/>
                             <a:t>Behind</a:t>
                           </a:r>
                         </a:p>
@@ -10940,7 +10154,7 @@
                         <a:p>
                           <a:pPr algn="ctr"/>
                           <a:r>
-                            <a:rPr lang="en-GB" sz="2400" dirty="0"/>
+                            <a:rPr lang="en-GB" sz="2200" dirty="0"/>
                             <a:t>Ahead</a:t>
                           </a:r>
                         </a:p>
@@ -10954,7 +10168,7 @@
                         <a:p>
                           <a:pPr algn="ctr"/>
                           <a:r>
-                            <a:rPr lang="en-GB" sz="2400" dirty="0"/>
+                            <a:rPr lang="en-GB" sz="2200" dirty="0"/>
                             <a:t>1.148s</a:t>
                           </a:r>
                         </a:p>
@@ -10991,15 +10205,8 @@
                             <a:defRPr/>
                           </a:pPr>
                           <a:r>
-                            <a:rPr lang="en-GB" sz="2400" dirty="0"/>
-                            <a:t>Belgium 2024</a:t>
-                          </a:r>
-                          <a:br>
-                            <a:rPr lang="en-GB" sz="2400" dirty="0"/>
-                          </a:br>
-                          <a:r>
-                            <a:rPr lang="en-GB" sz="2400" dirty="0"/>
-                            <a:t>Leclerc → Hamilton (L25)</a:t>
+                            <a:rPr lang="en-GB" sz="2200" dirty="0"/>
+                            <a:t>Belgium 2024 - Leclerc → Hamilton (L25)</a:t>
                           </a:r>
                         </a:p>
                       </a:txBody>
@@ -11012,7 +10219,7 @@
                         <a:p>
                           <a:pPr algn="ctr"/>
                           <a:r>
-                            <a:rPr lang="en-GB" sz="2400" dirty="0"/>
+                            <a:rPr lang="en-GB" sz="2200" dirty="0"/>
                             <a:t>Behind</a:t>
                           </a:r>
                         </a:p>
@@ -11026,7 +10233,7 @@
                         <a:p>
                           <a:pPr algn="ctr"/>
                           <a:r>
-                            <a:rPr lang="en-GB" sz="2400" dirty="0"/>
+                            <a:rPr lang="en-GB" sz="2200" dirty="0"/>
                             <a:t>Behind</a:t>
                           </a:r>
                         </a:p>
@@ -11040,7 +10247,7 @@
                         <a:p>
                           <a:pPr algn="ctr"/>
                           <a:r>
-                            <a:rPr lang="en-GB" sz="2400" dirty="0"/>
+                            <a:rPr lang="en-GB" sz="2200" dirty="0"/>
                             <a:t>0.024s</a:t>
                           </a:r>
                         </a:p>
@@ -11077,15 +10284,8 @@
                             <a:defRPr/>
                           </a:pPr>
                           <a:r>
-                            <a:rPr lang="en-GB" sz="2400" dirty="0"/>
-                            <a:t>Italy 2024</a:t>
-                          </a:r>
-                          <a:br>
-                            <a:rPr lang="en-GB" sz="2400" dirty="0"/>
-                          </a:br>
-                          <a:r>
-                            <a:rPr lang="en-GB" sz="2400" dirty="0"/>
-                            <a:t>Norris → Leclerc (LXX)</a:t>
+                            <a:rPr lang="en-GB" sz="2200" dirty="0"/>
+                            <a:t>Italy 2024 - Norris → Leclerc (L14)</a:t>
                           </a:r>
                         </a:p>
                       </a:txBody>
@@ -11098,7 +10298,7 @@
                         <a:p>
                           <a:pPr algn="ctr"/>
                           <a:r>
-                            <a:rPr lang="en-GB" sz="2400" dirty="0"/>
+                            <a:rPr lang="en-GB" sz="2200" dirty="0"/>
                             <a:t>Ahead</a:t>
                           </a:r>
                         </a:p>
@@ -11112,7 +10312,7 @@
                         <a:p>
                           <a:pPr algn="ctr"/>
                           <a:r>
-                            <a:rPr lang="en-GB" sz="2400" dirty="0"/>
+                            <a:rPr lang="en-GB" sz="2200" dirty="0"/>
                             <a:t>Ahead</a:t>
                           </a:r>
                         </a:p>
@@ -11126,7 +10326,7 @@
                         <a:p>
                           <a:pPr algn="ctr"/>
                           <a:r>
-                            <a:rPr lang="en-GB" sz="2400" dirty="0"/>
+                            <a:rPr lang="en-GB" sz="2200" dirty="0"/>
                             <a:t>1.615s</a:t>
                           </a:r>
                         </a:p>
@@ -11163,15 +10363,8 @@
                             <a:defRPr/>
                           </a:pPr>
                           <a:r>
-                            <a:rPr lang="en-GB" sz="2400" dirty="0"/>
-                            <a:t>Japan 2025</a:t>
-                          </a:r>
-                          <a:br>
-                            <a:rPr lang="en-GB" sz="2400" dirty="0"/>
-                          </a:br>
-                          <a:r>
-                            <a:rPr lang="en-GB" sz="2400" dirty="0"/>
-                            <a:t>Russell → Leclerc (LXX)</a:t>
+                            <a:rPr lang="en-GB" sz="2200" dirty="0"/>
+                            <a:t>Japan 2025 - Russell → Leclerc (L19)</a:t>
                           </a:r>
                         </a:p>
                       </a:txBody>
@@ -11184,7 +10377,7 @@
                         <a:p>
                           <a:pPr algn="ctr"/>
                           <a:r>
-                            <a:rPr lang="en-GB" sz="2400" dirty="0"/>
+                            <a:rPr lang="en-GB" sz="2200" dirty="0"/>
                             <a:t>Behind</a:t>
                           </a:r>
                         </a:p>
@@ -11198,7 +10391,7 @@
                         <a:p>
                           <a:pPr algn="ctr"/>
                           <a:r>
-                            <a:rPr lang="en-GB" sz="2400" dirty="0"/>
+                            <a:rPr lang="en-GB" sz="2200" dirty="0"/>
                             <a:t>Behind</a:t>
                           </a:r>
                         </a:p>
@@ -11212,7 +10405,7 @@
                         <a:p>
                           <a:pPr algn="ctr"/>
                           <a:r>
-                            <a:rPr lang="en-GB" sz="2400" dirty="0"/>
+                            <a:rPr lang="en-GB" sz="2200" dirty="0"/>
                             <a:t>0.189s</a:t>
                           </a:r>
                         </a:p>
@@ -11230,7 +10423,7 @@
             </a:graphic>
           </p:graphicFrame>
         </mc:Choice>
-        <mc:Fallback xmlns="">
+        <mc:Fallback>
           <p:graphicFrame>
             <p:nvGraphicFramePr>
               <p:cNvPr id="96" name="Table 95">
@@ -11246,14 +10439,14 @@
               <p:nvPr>
                 <p:extLst>
                   <p:ext uri="{D42A27DB-BD31-4B8C-83A1-F6EECF244321}">
-                    <p14:modId xmlns:p14="http://schemas.microsoft.com/office/powerpoint/2010/main" val="1982378214"/>
+                    <p14:modId xmlns:p14="http://schemas.microsoft.com/office/powerpoint/2010/main" val="419790620"/>
                   </p:ext>
                 </p:extLst>
               </p:nvPr>
             </p:nvGraphicFramePr>
             <p:xfrm>
-              <a:off x="20915228" y="3709164"/>
-              <a:ext cx="8707120" cy="3874047"/>
+              <a:off x="19778308" y="3045466"/>
+              <a:ext cx="10083925" cy="2934194"/>
             </p:xfrm>
             <a:graphic>
               <a:graphicData uri="http://schemas.openxmlformats.org/drawingml/2006/table">
@@ -11262,28 +10455,28 @@
                     <a:tableStyleId>{5C22544A-7EE6-4342-B048-85BDC9FD1C3A}</a:tableStyleId>
                   </a:tblPr>
                   <a:tblGrid>
-                    <a:gridCol w="3465703">
+                    <a:gridCol w="4986692">
                       <a:extLst>
                         <a:ext uri="{9D8B030D-6E8A-4147-A177-3AD203B41FA5}">
                           <a16:colId xmlns:a16="http://schemas.microsoft.com/office/drawing/2014/main" val="1303726572"/>
                         </a:ext>
                       </a:extLst>
                     </a:gridCol>
-                    <a:gridCol w="1587881">
+                    <a:gridCol w="1478280">
                       <a:extLst>
                         <a:ext uri="{9D8B030D-6E8A-4147-A177-3AD203B41FA5}">
                           <a16:colId xmlns:a16="http://schemas.microsoft.com/office/drawing/2014/main" val="452372859"/>
                         </a:ext>
                       </a:extLst>
                     </a:gridCol>
-                    <a:gridCol w="1591056">
+                    <a:gridCol w="1471867">
                       <a:extLst>
                         <a:ext uri="{9D8B030D-6E8A-4147-A177-3AD203B41FA5}">
                           <a16:colId xmlns:a16="http://schemas.microsoft.com/office/drawing/2014/main" val="3630223555"/>
                         </a:ext>
                       </a:extLst>
                     </a:gridCol>
-                    <a:gridCol w="2062480">
+                    <a:gridCol w="2147086">
                       <a:extLst>
                         <a:ext uri="{9D8B030D-6E8A-4147-A177-3AD203B41FA5}">
                           <a16:colId xmlns:a16="http://schemas.microsoft.com/office/drawing/2014/main" val="2743505408"/>
@@ -11299,7 +10492,7 @@
                         <a:p>
                           <a:pPr algn="ctr"/>
                           <a:r>
-                            <a:rPr lang="en-GB" sz="2400" dirty="0"/>
+                            <a:rPr lang="en-GB" sz="2200" dirty="0"/>
                             <a:t>Race</a:t>
                           </a:r>
                         </a:p>
@@ -11313,7 +10506,7 @@
                         <a:p>
                           <a:pPr algn="ctr"/>
                           <a:r>
-                            <a:rPr lang="en-GB" sz="2400" dirty="0"/>
+                            <a:rPr lang="en-GB" sz="2200" dirty="0"/>
                             <a:t>Predicted</a:t>
                           </a:r>
                         </a:p>
@@ -11327,7 +10520,7 @@
                         <a:p>
                           <a:pPr algn="ctr"/>
                           <a:r>
-                            <a:rPr lang="en-GB" sz="2400" dirty="0"/>
+                            <a:rPr lang="en-GB" sz="2200" dirty="0"/>
                             <a:t>Observed</a:t>
                           </a:r>
                         </a:p>
@@ -11344,9 +10537,9 @@
                       </a:txBody>
                       <a:tcPr anchor="ctr">
                         <a:blipFill>
-                          <a:blip r:embed="rId7"/>
+                          <a:blip r:embed="rId8"/>
                           <a:stretch>
-                            <a:fillRect l="-322124" t="-1042" r="-1180" b="-586458"/>
+                            <a:fillRect l="-370455" t="-1042" r="-1136" b="-410417"/>
                           </a:stretch>
                         </a:blipFill>
                       </a:tcPr>
@@ -11357,7 +10550,7 @@
                       </a:ext>
                     </a:extLst>
                   </a:tr>
-                  <a:tr h="822960">
+                  <a:tr h="605366">
                     <a:tc>
                       <a:txBody>
                         <a:bodyPr/>
@@ -11381,15 +10574,8 @@
                             <a:defRPr/>
                           </a:pPr>
                           <a:r>
-                            <a:rPr lang="en-GB" sz="2400" dirty="0"/>
-                            <a:t>Hungary 2023</a:t>
-                          </a:r>
-                          <a:br>
-                            <a:rPr lang="en-GB" sz="2400" dirty="0"/>
-                          </a:br>
-                          <a:r>
-                            <a:rPr lang="en-GB" sz="2400" dirty="0"/>
-                            <a:t>Norris → Piastri (L17)</a:t>
+                            <a:rPr lang="en-GB" sz="2200" dirty="0"/>
+                            <a:t>Hungary 2023 - Norris → Piastri (L17)</a:t>
                           </a:r>
                         </a:p>
                       </a:txBody>
@@ -11402,7 +10588,7 @@
                         <a:p>
                           <a:pPr algn="ctr"/>
                           <a:r>
-                            <a:rPr lang="en-GB" sz="2400" dirty="0"/>
+                            <a:rPr lang="en-GB" sz="2200" dirty="0"/>
                             <a:t>Behind</a:t>
                           </a:r>
                         </a:p>
@@ -11416,7 +10602,7 @@
                         <a:p>
                           <a:pPr algn="ctr"/>
                           <a:r>
-                            <a:rPr lang="en-GB" sz="2400" dirty="0"/>
+                            <a:rPr lang="en-GB" sz="2200" dirty="0"/>
                             <a:t>Ahead</a:t>
                           </a:r>
                         </a:p>
@@ -11430,7 +10616,7 @@
                         <a:p>
                           <a:pPr algn="ctr"/>
                           <a:r>
-                            <a:rPr lang="en-GB" sz="2400" dirty="0"/>
+                            <a:rPr lang="en-GB" sz="2200" dirty="0"/>
                             <a:t>1.148s</a:t>
                           </a:r>
                         </a:p>
@@ -11443,7 +10629,7 @@
                       </a:ext>
                     </a:extLst>
                   </a:tr>
-                  <a:tr h="822960">
+                  <a:tr h="582207">
                     <a:tc>
                       <a:txBody>
                         <a:bodyPr/>
@@ -11467,15 +10653,8 @@
                             <a:defRPr/>
                           </a:pPr>
                           <a:r>
-                            <a:rPr lang="en-GB" sz="2400" dirty="0"/>
-                            <a:t>Belgium 2024</a:t>
-                          </a:r>
-                          <a:br>
-                            <a:rPr lang="en-GB" sz="2400" dirty="0"/>
-                          </a:br>
-                          <a:r>
-                            <a:rPr lang="en-GB" sz="2400" dirty="0"/>
-                            <a:t>Leclerc → Hamilton (L25)</a:t>
+                            <a:rPr lang="en-GB" sz="2200" dirty="0"/>
+                            <a:t>Belgium 2024 - Leclerc → Hamilton (L25)</a:t>
                           </a:r>
                         </a:p>
                       </a:txBody>
@@ -11488,7 +10667,7 @@
                         <a:p>
                           <a:pPr algn="ctr"/>
                           <a:r>
-                            <a:rPr lang="en-GB" sz="2400" dirty="0"/>
+                            <a:rPr lang="en-GB" sz="2200" dirty="0"/>
                             <a:t>Behind</a:t>
                           </a:r>
                         </a:p>
@@ -11502,7 +10681,7 @@
                         <a:p>
                           <a:pPr algn="ctr"/>
                           <a:r>
-                            <a:rPr lang="en-GB" sz="2400" dirty="0"/>
+                            <a:rPr lang="en-GB" sz="2200" dirty="0"/>
                             <a:t>Behind</a:t>
                           </a:r>
                         </a:p>
@@ -11516,7 +10695,7 @@
                         <a:p>
                           <a:pPr algn="ctr"/>
                           <a:r>
-                            <a:rPr lang="en-GB" sz="2400" dirty="0"/>
+                            <a:rPr lang="en-GB" sz="2200" dirty="0"/>
                             <a:t>0.024s</a:t>
                           </a:r>
                         </a:p>
@@ -11529,7 +10708,7 @@
                       </a:ext>
                     </a:extLst>
                   </a:tr>
-                  <a:tr h="822960">
+                  <a:tr h="582207">
                     <a:tc>
                       <a:txBody>
                         <a:bodyPr/>
@@ -11553,15 +10732,8 @@
                             <a:defRPr/>
                           </a:pPr>
                           <a:r>
-                            <a:rPr lang="en-GB" sz="2400" dirty="0"/>
-                            <a:t>Italy 2024</a:t>
-                          </a:r>
-                          <a:br>
-                            <a:rPr lang="en-GB" sz="2400" dirty="0"/>
-                          </a:br>
-                          <a:r>
-                            <a:rPr lang="en-GB" sz="2400" dirty="0"/>
-                            <a:t>Norris → Leclerc (LXX)</a:t>
+                            <a:rPr lang="en-GB" sz="2200" dirty="0"/>
+                            <a:t>Italy 2024 - Norris → Leclerc (L14)</a:t>
                           </a:r>
                         </a:p>
                       </a:txBody>
@@ -11574,7 +10746,7 @@
                         <a:p>
                           <a:pPr algn="ctr"/>
                           <a:r>
-                            <a:rPr lang="en-GB" sz="2400" dirty="0"/>
+                            <a:rPr lang="en-GB" sz="2200" dirty="0"/>
                             <a:t>Ahead</a:t>
                           </a:r>
                         </a:p>
@@ -11588,7 +10760,7 @@
                         <a:p>
                           <a:pPr algn="ctr"/>
                           <a:r>
-                            <a:rPr lang="en-GB" sz="2400" dirty="0"/>
+                            <a:rPr lang="en-GB" sz="2200" dirty="0"/>
                             <a:t>Ahead</a:t>
                           </a:r>
                         </a:p>
@@ -11602,7 +10774,7 @@
                         <a:p>
                           <a:pPr algn="ctr"/>
                           <a:r>
-                            <a:rPr lang="en-GB" sz="2400" dirty="0"/>
+                            <a:rPr lang="en-GB" sz="2200" dirty="0"/>
                             <a:t>1.615s</a:t>
                           </a:r>
                         </a:p>
@@ -11615,7 +10787,7 @@
                       </a:ext>
                     </a:extLst>
                   </a:tr>
-                  <a:tr h="822960">
+                  <a:tr h="582207">
                     <a:tc>
                       <a:txBody>
                         <a:bodyPr/>
@@ -11639,15 +10811,8 @@
                             <a:defRPr/>
                           </a:pPr>
                           <a:r>
-                            <a:rPr lang="en-GB" sz="2400" dirty="0"/>
-                            <a:t>Japan 2025</a:t>
-                          </a:r>
-                          <a:br>
-                            <a:rPr lang="en-GB" sz="2400" dirty="0"/>
-                          </a:br>
-                          <a:r>
-                            <a:rPr lang="en-GB" sz="2400" dirty="0"/>
-                            <a:t>Russell → Leclerc (LXX)</a:t>
+                            <a:rPr lang="en-GB" sz="2200" dirty="0"/>
+                            <a:t>Japan 2025 - Russell → Leclerc (L19)</a:t>
                           </a:r>
                         </a:p>
                       </a:txBody>
@@ -11660,7 +10825,7 @@
                         <a:p>
                           <a:pPr algn="ctr"/>
                           <a:r>
-                            <a:rPr lang="en-GB" sz="2400" dirty="0"/>
+                            <a:rPr lang="en-GB" sz="2200" dirty="0"/>
                             <a:t>Behind</a:t>
                           </a:r>
                         </a:p>
@@ -11674,7 +10839,7 @@
                         <a:p>
                           <a:pPr algn="ctr"/>
                           <a:r>
-                            <a:rPr lang="en-GB" sz="2400" dirty="0"/>
+                            <a:rPr lang="en-GB" sz="2200" dirty="0"/>
                             <a:t>Behind</a:t>
                           </a:r>
                         </a:p>
@@ -11688,7 +10853,7 @@
                         <a:p>
                           <a:pPr algn="ctr"/>
                           <a:r>
-                            <a:rPr lang="en-GB" sz="2400" dirty="0"/>
+                            <a:rPr lang="en-GB" sz="2200" dirty="0"/>
                             <a:t>0.189s</a:t>
                           </a:r>
                         </a:p>
@@ -11721,8 +10886,8 @@
         </p:nvSpPr>
         <p:spPr>
           <a:xfrm>
-            <a:off x="12019401" y="16638997"/>
-            <a:ext cx="16647039" cy="4154984"/>
+            <a:off x="21400292" y="14781466"/>
+            <a:ext cx="8576667" cy="6186309"/>
           </a:xfrm>
           <a:prstGeom prst="rect">
             <a:avLst/>
@@ -11736,61 +10901,139 @@
           <a:lstStyle/>
           <a:p>
             <a:r>
-              <a:rPr lang="en-GB" sz="2400" dirty="0">
+              <a:rPr lang="en-GB" sz="2200" dirty="0">
                 <a:solidFill>
                   <a:srgbClr val="000000"/>
                 </a:solidFill>
                 <a:ea typeface="Roboto" panose="02000000000000000000" pitchFamily="2" charset="0"/>
               </a:rPr>
-              <a:t> The model consistently identified whether pitting first generated a relative gain or loss across the four historic cases.</a:t>
+              <a:t> The model consistently identified whether pitting first generated </a:t>
             </a:r>
-          </a:p>
-          <a:p>
             <a:r>
-              <a:rPr lang="en-GB" sz="2400" dirty="0">
+              <a:rPr lang="en-GB" sz="2200" b="1" dirty="0">
                 <a:solidFill>
                   <a:srgbClr val="000000"/>
                 </a:solidFill>
                 <a:ea typeface="Roboto" panose="02000000000000000000" pitchFamily="2" charset="0"/>
               </a:rPr>
-              <a:t>• Exact realised gaps were less reliable because fixed deterministic inputs cannot reproduce every short-term race effect.</a:t>
+              <a:t>a relative gain or loss across the four historic cases.</a:t>
             </a:r>
           </a:p>
           <a:p>
             <a:r>
-              <a:rPr lang="en-GB" sz="2400" dirty="0">
+              <a:rPr lang="en-GB" sz="2200" dirty="0">
                 <a:solidFill>
                   <a:srgbClr val="000000"/>
                 </a:solidFill>
                 <a:ea typeface="Roboto" panose="02000000000000000000" pitchFamily="2" charset="0"/>
               </a:rPr>
-              <a:t>• Initial gap and undercut gain must be considered separately: a beneficial undercut can still leave the attacker behind.</a:t>
+              <a:t>• </a:t>
             </a:r>
-          </a:p>
-          <a:p>
             <a:r>
-              <a:rPr lang="en-GB" sz="2400" dirty="0">
+              <a:rPr lang="en-GB" sz="2200" b="1" dirty="0">
                 <a:solidFill>
                   <a:srgbClr val="000000"/>
                 </a:solidFill>
                 <a:ea typeface="Roboto" panose="02000000000000000000" pitchFamily="2" charset="0"/>
               </a:rPr>
-              <a:t>• Important omitted / simplified effects include dynamic traffic, unequal pit-stop execution, nonlinear tyre behaviour and stochastic lap-to-lap variation.</a:t>
+              <a:t>Exact realised gaps were less reliable</a:t>
             </a:r>
-          </a:p>
-          <a:p>
             <a:r>
-              <a:rPr lang="en-GB" sz="2400" dirty="0">
+              <a:rPr lang="en-GB" sz="2200" dirty="0">
                 <a:solidFill>
                   <a:srgbClr val="000000"/>
                 </a:solidFill>
                 <a:ea typeface="Roboto" panose="02000000000000000000" pitchFamily="2" charset="0"/>
               </a:rPr>
-              <a:t>• The deterministic structure remains inspectable: the contribution of each model term can be traced rather than hidden inside an unexplained recommendation.</a:t>
+              <a:t> because fixed deterministic inputs cannot reproduce every short-term race effect.</a:t>
             </a:r>
           </a:p>
           <a:p>
-            <a:endParaRPr lang="en-GB" sz="2400" dirty="0">
+            <a:r>
+              <a:rPr lang="en-GB" sz="2200" dirty="0">
+                <a:solidFill>
+                  <a:srgbClr val="000000"/>
+                </a:solidFill>
+                <a:ea typeface="Roboto" panose="02000000000000000000" pitchFamily="2" charset="0"/>
+              </a:rPr>
+              <a:t>• </a:t>
+            </a:r>
+            <a:r>
+              <a:rPr lang="en-GB" sz="2200" b="1" dirty="0">
+                <a:solidFill>
+                  <a:srgbClr val="000000"/>
+                </a:solidFill>
+                <a:ea typeface="Roboto" panose="02000000000000000000" pitchFamily="2" charset="0"/>
+              </a:rPr>
+              <a:t>Initial gap and undercut gain must be considered separately</a:t>
+            </a:r>
+            <a:r>
+              <a:rPr lang="en-GB" sz="2200" dirty="0">
+                <a:solidFill>
+                  <a:srgbClr val="000000"/>
+                </a:solidFill>
+                <a:ea typeface="Roboto" panose="02000000000000000000" pitchFamily="2" charset="0"/>
+              </a:rPr>
+              <a:t>: a beneficial undercut can still leave the attacker behind.</a:t>
+            </a:r>
+          </a:p>
+          <a:p>
+            <a:r>
+              <a:rPr lang="en-GB" sz="2200" b="1" dirty="0">
+                <a:solidFill>
+                  <a:srgbClr val="000000"/>
+                </a:solidFill>
+                <a:ea typeface="Roboto" panose="02000000000000000000" pitchFamily="2" charset="0"/>
+              </a:rPr>
+              <a:t>• Important omitted or simplified effects </a:t>
+            </a:r>
+            <a:r>
+              <a:rPr lang="en-GB" sz="2200" dirty="0">
+                <a:solidFill>
+                  <a:srgbClr val="000000"/>
+                </a:solidFill>
+                <a:ea typeface="Roboto" panose="02000000000000000000" pitchFamily="2" charset="0"/>
+              </a:rPr>
+              <a:t>include dynamic traffic, unequal pit-stop execution, nonlinear tyre behaviour and stochastic lap-to-lap variation.</a:t>
+            </a:r>
+          </a:p>
+          <a:p>
+            <a:r>
+              <a:rPr lang="en-GB" sz="2200" dirty="0">
+                <a:solidFill>
+                  <a:srgbClr val="000000"/>
+                </a:solidFill>
+                <a:ea typeface="Roboto" panose="02000000000000000000" pitchFamily="2" charset="0"/>
+              </a:rPr>
+              <a:t>• </a:t>
+            </a:r>
+            <a:r>
+              <a:rPr lang="en-GB" sz="2200" b="1" dirty="0">
+                <a:solidFill>
+                  <a:srgbClr val="000000"/>
+                </a:solidFill>
+                <a:ea typeface="Roboto" panose="02000000000000000000" pitchFamily="2" charset="0"/>
+              </a:rPr>
+              <a:t>The deterministic structure remains inspectable</a:t>
+            </a:r>
+            <a:r>
+              <a:rPr lang="en-GB" sz="2200" dirty="0">
+                <a:solidFill>
+                  <a:srgbClr val="000000"/>
+                </a:solidFill>
+                <a:ea typeface="Roboto" panose="02000000000000000000" pitchFamily="2" charset="0"/>
+              </a:rPr>
+              <a:t>: the contribution of each model term can be traced rather than hidden inside an unexplained recommendation.</a:t>
+            </a:r>
+            <a:br>
+              <a:rPr lang="en-GB" sz="2200" dirty="0">
+                <a:solidFill>
+                  <a:srgbClr val="000000"/>
+                </a:solidFill>
+                <a:ea typeface="Roboto" panose="02000000000000000000" pitchFamily="2" charset="0"/>
+              </a:rPr>
+            </a:br>
+            <a:endParaRPr lang="en-GB" sz="2200" dirty="0">
               <a:solidFill>
                 <a:srgbClr val="000000"/>
               </a:solidFill>
@@ -11799,48 +11042,100 @@
           </a:p>
           <a:p>
             <a:r>
-              <a:rPr lang="en-GB" sz="2400" dirty="0">
+              <a:rPr lang="en-GB" sz="2200" dirty="0">
                 <a:solidFill>
                   <a:srgbClr val="000000"/>
                 </a:solidFill>
                 <a:ea typeface="Roboto" panose="02000000000000000000" pitchFamily="2" charset="0"/>
               </a:rPr>
-              <a:t>A transparent deterministic model can provide useful engineering analysis of undercut opportunities within Formula One races within a defined operating domain. It is best treated as an analysis tool to support an engineer’s decision-making progress, not a complete race strategy simulator, or an autonomous pit stop recommendation.</a:t>
+              <a:t>A transparent deterministic model can provide useful engineering analysis of undercut opportunities in Formula One races within a defined operating domain. It is best treated as </a:t>
             </a:r>
-            <a:endParaRPr lang="en-US" sz="2400" dirty="0">
+            <a:r>
+              <a:rPr lang="en-GB" sz="2200" b="1" dirty="0">
+                <a:solidFill>
+                  <a:srgbClr val="000000"/>
+                </a:solidFill>
+                <a:ea typeface="Roboto" panose="02000000000000000000" pitchFamily="2" charset="0"/>
+              </a:rPr>
+              <a:t>an analysis tool to support an engineer’s decision-making process</a:t>
+            </a:r>
+            <a:r>
+              <a:rPr lang="en-GB" sz="2200" dirty="0">
+                <a:solidFill>
+                  <a:srgbClr val="000000"/>
+                </a:solidFill>
+                <a:ea typeface="Roboto" panose="02000000000000000000" pitchFamily="2" charset="0"/>
+              </a:rPr>
+              <a:t>, not a complete race strategy simulator, or an autonomous pit stop recommendation.</a:t>
+            </a:r>
+            <a:endParaRPr lang="en-US" sz="2200" dirty="0">
               <a:ea typeface="Roboto" panose="02000000000000000000" pitchFamily="2" charset="0"/>
             </a:endParaRPr>
           </a:p>
         </p:txBody>
       </p:sp>
-      <p:graphicFrame>
-        <p:nvGraphicFramePr>
-          <p:cNvPr id="106" name="Chart 105">
-            <a:extLst>
-              <a:ext uri="{FF2B5EF4-FFF2-40B4-BE49-F238E27FC236}">
-                <a16:creationId xmlns:a16="http://schemas.microsoft.com/office/drawing/2014/main" id="{03712FD7-7E7C-286C-9198-E902F9533B71}"/>
-              </a:ext>
-            </a:extLst>
-          </p:cNvPr>
-          <p:cNvGraphicFramePr/>
-          <p:nvPr>
-            <p:extLst>
-              <p:ext uri="{D42A27DB-BD31-4B8C-83A1-F6EECF244321}">
-                <p14:modId xmlns:p14="http://schemas.microsoft.com/office/powerpoint/2010/main" val="1842575030"/>
-              </p:ext>
-            </p:extLst>
-          </p:nvPr>
-        </p:nvGraphicFramePr>
-        <p:xfrm>
-          <a:off x="20915228" y="8139514"/>
-          <a:ext cx="8707120" cy="6017714"/>
-        </p:xfrm>
-        <a:graphic>
-          <a:graphicData uri="http://schemas.openxmlformats.org/drawingml/2006/chart">
-            <c:chart xmlns:c="http://schemas.openxmlformats.org/drawingml/2006/chart" xmlns:r="http://schemas.openxmlformats.org/officeDocument/2006/relationships" r:id="rId8"/>
-          </a:graphicData>
-        </a:graphic>
-      </p:graphicFrame>
+      <mc:AlternateContent xmlns:mc="http://schemas.openxmlformats.org/markup-compatibility/2006">
+        <mc:Choice xmlns:a14="http://schemas.microsoft.com/office/drawing/2010/main" Requires="a14">
+          <p:graphicFrame>
+            <p:nvGraphicFramePr>
+              <p:cNvPr id="106" name="Chart 105">
+                <a:extLst>
+                  <a:ext uri="{FF2B5EF4-FFF2-40B4-BE49-F238E27FC236}">
+                    <a16:creationId xmlns:a16="http://schemas.microsoft.com/office/drawing/2014/main" id="{03712FD7-7E7C-286C-9198-E902F9533B71}"/>
+                  </a:ext>
+                </a:extLst>
+              </p:cNvPr>
+              <p:cNvGraphicFramePr/>
+              <p:nvPr>
+                <p:extLst>
+                  <p:ext uri="{D42A27DB-BD31-4B8C-83A1-F6EECF244321}">
+                    <p14:modId xmlns:p14="http://schemas.microsoft.com/office/powerpoint/2010/main" val="989793396"/>
+                  </p:ext>
+                </p:extLst>
+              </p:nvPr>
+            </p:nvGraphicFramePr>
+            <p:xfrm>
+              <a:off x="19778309" y="6768809"/>
+              <a:ext cx="10181516" cy="7036707"/>
+            </p:xfrm>
+            <a:graphic>
+              <a:graphicData uri="http://schemas.openxmlformats.org/drawingml/2006/chart">
+                <c:chart xmlns:c="http://schemas.openxmlformats.org/drawingml/2006/chart" xmlns:r="http://schemas.openxmlformats.org/officeDocument/2006/relationships" r:id="rId9"/>
+              </a:graphicData>
+            </a:graphic>
+          </p:graphicFrame>
+        </mc:Choice>
+        <mc:Fallback>
+          <p:graphicFrame>
+            <p:nvGraphicFramePr>
+              <p:cNvPr id="106" name="Chart 105">
+                <a:extLst>
+                  <a:ext uri="{FF2B5EF4-FFF2-40B4-BE49-F238E27FC236}">
+                    <a16:creationId xmlns:a16="http://schemas.microsoft.com/office/drawing/2014/main" id="{03712FD7-7E7C-286C-9198-E902F9533B71}"/>
+                  </a:ext>
+                </a:extLst>
+              </p:cNvPr>
+              <p:cNvGraphicFramePr/>
+              <p:nvPr>
+                <p:extLst>
+                  <p:ext uri="{D42A27DB-BD31-4B8C-83A1-F6EECF244321}">
+                    <p14:modId xmlns:p14="http://schemas.microsoft.com/office/powerpoint/2010/main" val="989793396"/>
+                  </p:ext>
+                </p:extLst>
+              </p:nvPr>
+            </p:nvGraphicFramePr>
+            <p:xfrm>
+              <a:off x="19778309" y="6768809"/>
+              <a:ext cx="10181516" cy="7036707"/>
+            </p:xfrm>
+            <a:graphic>
+              <a:graphicData uri="http://schemas.openxmlformats.org/drawingml/2006/chart">
+                <c:chart xmlns:c="http://schemas.openxmlformats.org/drawingml/2006/chart" xmlns:r="http://schemas.openxmlformats.org/officeDocument/2006/relationships" r:id="rId9"/>
+              </a:graphicData>
+            </a:graphic>
+          </p:graphicFrame>
+        </mc:Fallback>
+      </mc:AlternateContent>
       <p:sp>
         <p:nvSpPr>
           <p:cNvPr id="17" name="TextBox 16">
@@ -11855,8 +11150,8 @@
         </p:nvSpPr>
         <p:spPr>
           <a:xfrm>
-            <a:off x="11962294" y="4325121"/>
-            <a:ext cx="8812557" cy="11172289"/>
+            <a:off x="9275953" y="3043332"/>
+            <a:ext cx="10502355" cy="1785104"/>
           </a:xfrm>
           <a:prstGeom prst="rect">
             <a:avLst/>
@@ -11870,78 +11165,1935 @@
           <a:lstStyle/>
           <a:p>
             <a:r>
-              <a:rPr lang="en-GB" sz="2400" dirty="0">
+              <a:rPr lang="en-GB" sz="2200" dirty="0">
                 <a:solidFill>
                   <a:srgbClr val="000000"/>
                 </a:solidFill>
                 <a:ea typeface="Roboto" panose="02000000000000000000" pitchFamily="2" charset="0"/>
               </a:rPr>
-              <a:t>A C#/.NET application was written using WPF to run predictions on single drivers and scan across full race distances and multiple drivers. Results are displayed on a race-trace visualisation and exposes intermediate model behaviour. Prediction logic was kept separate from data retrieval and presentation to assist verification and allow easy future expansion.</a:t>
+              <a:t>A </a:t>
             </a:r>
-          </a:p>
-          <a:p>
             <a:r>
-              <a:rPr lang="en-GB" sz="2400" dirty="0">
+              <a:rPr lang="en-GB" sz="2200" b="1" dirty="0">
                 <a:solidFill>
                   <a:srgbClr val="000000"/>
                 </a:solidFill>
                 <a:ea typeface="Roboto" panose="02000000000000000000" pitchFamily="2" charset="0"/>
               </a:rPr>
-              <a:t>Automated testing was written to verify the software implementation, with 460 tests and 37 research-focused cases giving 95.6% core line  coverage and 89.7% branch coverage. Independent calculations matched software outputs, and tests cover lap-time terms, pit sequence, tyre-age progression, sign convention, G(m)/ΔG(m), classification boundaries, limiting</a:t>
+              <a:t>C#/.NET WPF application </a:t>
             </a:r>
-          </a:p>
-          <a:p>
             <a:r>
-              <a:rPr lang="en-GB" sz="2400" dirty="0">
+              <a:rPr lang="en-GB" sz="2200" dirty="0">
                 <a:solidFill>
                   <a:srgbClr val="000000"/>
                 </a:solidFill>
                 <a:ea typeface="Roboto" panose="02000000000000000000" pitchFamily="2" charset="0"/>
               </a:rPr>
-              <a:t>cases and deterministic repeatability.</a:t>
+              <a:t>was written to run predictions on single drivers and scan across full race distances and multiple drivers. Data is retrieved from the </a:t>
             </a:r>
-          </a:p>
-          <a:p>
             <a:r>
-              <a:rPr lang="en-GB" sz="2400" dirty="0">
+              <a:rPr lang="en-GB" sz="2200" b="1" dirty="0">
                 <a:solidFill>
                   <a:srgbClr val="000000"/>
                 </a:solidFill>
                 <a:ea typeface="Roboto" panose="02000000000000000000" pitchFamily="2" charset="0"/>
               </a:rPr>
-              <a:t>Historic cases were selected to include successful and unsuccessful undercut attempts, one or two lap responses, and different tyre-state transitions. The model matched 3 of 4 classifications but 4 of 4 directions of change. Belgium provided the strongest immediate numerical agreement with </a:t>
+              <a:t>OpenF1 API </a:t>
             </a:r>
             <a:r>
-              <a:rPr lang="en-GB" sz="2400" b="1" dirty="0">
+              <a:rPr lang="en-GB" sz="2200" dirty="0">
                 <a:solidFill>
                   <a:srgbClr val="000000"/>
                 </a:solidFill>
                 <a:ea typeface="Roboto" panose="02000000000000000000" pitchFamily="2" charset="0"/>
               </a:rPr>
-              <a:t>0.024s error at n+1</a:t>
+              <a:t>[2]. Results are displayed on a race-trace visualisation which exposes intermediate model behaviour. Prediction logic was kept separate from data retrieval and presentation to assist verification and allow easy future expansion.</a:t>
             </a:r>
+            <a:endParaRPr lang="en-US" sz="2200" dirty="0">
+              <a:ea typeface="Roboto" panose="02000000000000000000" pitchFamily="2" charset="0"/>
+            </a:endParaRPr>
+          </a:p>
+        </p:txBody>
+      </p:sp>
+      <p:sp>
+        <p:nvSpPr>
+          <p:cNvPr id="15" name="TextBox 14">
+            <a:extLst>
+              <a:ext uri="{FF2B5EF4-FFF2-40B4-BE49-F238E27FC236}">
+                <a16:creationId xmlns:a16="http://schemas.microsoft.com/office/drawing/2014/main" id="{0147D99D-7397-2235-FA32-139A8079361F}"/>
+              </a:ext>
+            </a:extLst>
+          </p:cNvPr>
+          <p:cNvSpPr txBox="1"/>
+          <p:nvPr/>
+        </p:nvSpPr>
+        <p:spPr>
+          <a:xfrm>
+            <a:off x="9292561" y="8017021"/>
+            <a:ext cx="10340369" cy="2462213"/>
+          </a:xfrm>
+          <a:prstGeom prst="rect">
+            <a:avLst/>
+          </a:prstGeom>
+          <a:noFill/>
+        </p:spPr>
+        <p:txBody>
+          <a:bodyPr wrap="square">
+            <a:spAutoFit/>
+          </a:bodyPr>
+          <a:lstStyle/>
+          <a:p>
             <a:r>
-              <a:rPr lang="en-GB" sz="2400" dirty="0">
+              <a:rPr lang="en-GB" sz="2200" dirty="0">
                 <a:solidFill>
                   <a:srgbClr val="000000"/>
                 </a:solidFill>
                 <a:ea typeface="Roboto" panose="02000000000000000000" pitchFamily="2" charset="0"/>
               </a:rPr>
-              <a:t>; Hungary generated the correct strategic decision but underestimated the gain, providing an incorrect classification, but this could be partially explained by real-world factors such as differences in stationary pit stop time.</a:t>
+              <a:t>Historic cases were selected to include successful and unsuccessful undercut attempts, one- or two-lap responses, and different tyre-state transitions. The model matched </a:t>
             </a:r>
-          </a:p>
-          <a:p>
             <a:r>
-              <a:rPr lang="en-GB" sz="2400" dirty="0">
+              <a:rPr lang="en-GB" sz="2200" b="1" dirty="0">
                 <a:solidFill>
                   <a:srgbClr val="000000"/>
                 </a:solidFill>
                 <a:ea typeface="Roboto" panose="02000000000000000000" pitchFamily="2" charset="0"/>
               </a:rPr>
-              <a:t>One-at-a-time sweeps tested the impact of compound pace, degradation, target response offset, and relative driver/car pace. Most impactful was compound offset at Italy 2024 (shown in graph to the right): varying Hard-compound pace alone can move the result into Marginal; the Ahead-Marginal crossover occurs at C_H -0.037 s. Analysis proved that parameter influence is scenario dependant, so does not claim to create a universal sensitivity ranking of parameters and their influence.</a:t>
+              <a:t>3 of 4 classifications </a:t>
             </a:r>
-            <a:endParaRPr lang="en-US" sz="2400" dirty="0">
-              <a:ea typeface="Roboto" panose="02000000000000000000" pitchFamily="2" charset="0"/>
+            <a:r>
+              <a:rPr lang="en-GB" sz="2200" dirty="0">
+                <a:solidFill>
+                  <a:srgbClr val="000000"/>
+                </a:solidFill>
+                <a:ea typeface="Roboto" panose="02000000000000000000" pitchFamily="2" charset="0"/>
+              </a:rPr>
+              <a:t>but </a:t>
+            </a:r>
+            <a:r>
+              <a:rPr lang="en-GB" sz="2200" b="1" dirty="0">
+                <a:solidFill>
+                  <a:srgbClr val="000000"/>
+                </a:solidFill>
+                <a:ea typeface="Roboto" panose="02000000000000000000" pitchFamily="2" charset="0"/>
+              </a:rPr>
+              <a:t>4 of 4 directions of change</a:t>
+            </a:r>
+            <a:r>
+              <a:rPr lang="en-GB" sz="2200" dirty="0">
+                <a:solidFill>
+                  <a:srgbClr val="000000"/>
+                </a:solidFill>
+                <a:ea typeface="Roboto" panose="02000000000000000000" pitchFamily="2" charset="0"/>
+              </a:rPr>
+              <a:t>. Belgium provided the strongest immediate numerical agreement with </a:t>
+            </a:r>
+            <a:r>
+              <a:rPr lang="en-GB" sz="2200" b="1" dirty="0">
+                <a:solidFill>
+                  <a:srgbClr val="000000"/>
+                </a:solidFill>
+                <a:ea typeface="Roboto" panose="02000000000000000000" pitchFamily="2" charset="0"/>
+              </a:rPr>
+              <a:t>0.024 s error at </a:t>
+            </a:r>
+            <a:r>
+              <a:rPr lang="en-GB" sz="2200" b="1" dirty="0" err="1">
+                <a:solidFill>
+                  <a:srgbClr val="000000"/>
+                </a:solidFill>
+                <a:ea typeface="Roboto" panose="02000000000000000000" pitchFamily="2" charset="0"/>
+              </a:rPr>
+              <a:t>n+o</a:t>
+            </a:r>
+            <a:r>
+              <a:rPr lang="en-GB" sz="2200" dirty="0">
+                <a:solidFill>
+                  <a:srgbClr val="000000"/>
+                </a:solidFill>
+                <a:ea typeface="Roboto" panose="02000000000000000000" pitchFamily="2" charset="0"/>
+              </a:rPr>
+              <a:t>; Hungary predicted the correct direction of relative gain but underestimated its magnitude, resulting in an incorrect classification. The discrepancy was partly attributed to real-world factors such as differences in stationary pit stop time.</a:t>
+            </a:r>
+          </a:p>
+        </p:txBody>
+      </p:sp>
+      <p:sp>
+        <p:nvSpPr>
+          <p:cNvPr id="18" name="TextBox 17">
+            <a:extLst>
+              <a:ext uri="{FF2B5EF4-FFF2-40B4-BE49-F238E27FC236}">
+                <a16:creationId xmlns:a16="http://schemas.microsoft.com/office/drawing/2014/main" id="{4687DC98-3B3C-ECDA-B1AD-C19109EA7DC4}"/>
+              </a:ext>
+            </a:extLst>
+          </p:cNvPr>
+          <p:cNvSpPr txBox="1"/>
+          <p:nvPr/>
+        </p:nvSpPr>
+        <p:spPr>
+          <a:xfrm>
+            <a:off x="9311199" y="5492382"/>
+            <a:ext cx="10168925" cy="2123658"/>
+          </a:xfrm>
+          <a:prstGeom prst="rect">
+            <a:avLst/>
+          </a:prstGeom>
+          <a:noFill/>
+        </p:spPr>
+        <p:txBody>
+          <a:bodyPr wrap="square">
+            <a:spAutoFit/>
+          </a:bodyPr>
+          <a:lstStyle/>
+          <a:p>
+            <a:r>
+              <a:rPr lang="en-GB" sz="2200" dirty="0">
+                <a:solidFill>
+                  <a:srgbClr val="000000"/>
+                </a:solidFill>
+                <a:ea typeface="Roboto" panose="02000000000000000000" pitchFamily="2" charset="0"/>
+              </a:rPr>
+              <a:t>Automated testing was written to verify the software implementation, with </a:t>
+            </a:r>
+            <a:r>
+              <a:rPr lang="en-GB" sz="2200" b="1" dirty="0">
+                <a:solidFill>
+                  <a:srgbClr val="000000"/>
+                </a:solidFill>
+                <a:ea typeface="Roboto" panose="02000000000000000000" pitchFamily="2" charset="0"/>
+              </a:rPr>
+              <a:t>460 tests </a:t>
+            </a:r>
+            <a:r>
+              <a:rPr lang="en-GB" sz="2200" dirty="0">
+                <a:solidFill>
+                  <a:srgbClr val="000000"/>
+                </a:solidFill>
+                <a:ea typeface="Roboto" panose="02000000000000000000" pitchFamily="2" charset="0"/>
+              </a:rPr>
+              <a:t>and </a:t>
+            </a:r>
+            <a:r>
+              <a:rPr lang="en-GB" sz="2200" b="1" dirty="0">
+                <a:solidFill>
+                  <a:srgbClr val="000000"/>
+                </a:solidFill>
+                <a:ea typeface="Roboto" panose="02000000000000000000" pitchFamily="2" charset="0"/>
+              </a:rPr>
+              <a:t>37 research-focused cases</a:t>
+            </a:r>
+            <a:r>
+              <a:rPr lang="en-GB" sz="2200" dirty="0">
+                <a:solidFill>
+                  <a:srgbClr val="000000"/>
+                </a:solidFill>
+                <a:ea typeface="Roboto" panose="02000000000000000000" pitchFamily="2" charset="0"/>
+              </a:rPr>
+              <a:t> giving </a:t>
+            </a:r>
+            <a:r>
+              <a:rPr lang="en-GB" sz="2200" b="1" dirty="0">
+                <a:solidFill>
+                  <a:srgbClr val="000000"/>
+                </a:solidFill>
+                <a:ea typeface="Roboto" panose="02000000000000000000" pitchFamily="2" charset="0"/>
+              </a:rPr>
+              <a:t>95.6% core line  coverage </a:t>
+            </a:r>
+            <a:r>
+              <a:rPr lang="en-GB" sz="2200" dirty="0">
+                <a:solidFill>
+                  <a:srgbClr val="000000"/>
+                </a:solidFill>
+                <a:ea typeface="Roboto" panose="02000000000000000000" pitchFamily="2" charset="0"/>
+              </a:rPr>
+              <a:t>and </a:t>
+            </a:r>
+            <a:r>
+              <a:rPr lang="en-GB" sz="2200" b="1" dirty="0">
+                <a:solidFill>
+                  <a:srgbClr val="000000"/>
+                </a:solidFill>
+                <a:ea typeface="Roboto" panose="02000000000000000000" pitchFamily="2" charset="0"/>
+              </a:rPr>
+              <a:t>89.7% branch coverage</a:t>
+            </a:r>
+            <a:r>
+              <a:rPr lang="en-GB" sz="2200" dirty="0">
+                <a:solidFill>
+                  <a:srgbClr val="000000"/>
+                </a:solidFill>
+                <a:ea typeface="Roboto" panose="02000000000000000000" pitchFamily="2" charset="0"/>
+              </a:rPr>
+              <a:t>. Independent calculations matched software outputs, and tests cover lap-time terms, pit sequence, tyre-age progression, sign convention, G(m) and ΔG(m), classification boundaries, limiting cases and deterministic repeatability.</a:t>
+            </a:r>
+          </a:p>
+        </p:txBody>
+      </p:sp>
+      <mc:AlternateContent xmlns:mc="http://schemas.openxmlformats.org/markup-compatibility/2006">
+        <mc:Choice xmlns:a14="http://schemas.microsoft.com/office/drawing/2010/main" Requires="a14">
+          <p:sp>
+            <p:nvSpPr>
+              <p:cNvPr id="24" name="TextBox 23">
+                <a:extLst>
+                  <a:ext uri="{FF2B5EF4-FFF2-40B4-BE49-F238E27FC236}">
+                    <a16:creationId xmlns:a16="http://schemas.microsoft.com/office/drawing/2014/main" id="{C228FA38-5F17-D49C-BEF5-DDCFC5310ACB}"/>
+                  </a:ext>
+                </a:extLst>
+              </p:cNvPr>
+              <p:cNvSpPr txBox="1"/>
+              <p:nvPr/>
+            </p:nvSpPr>
+            <p:spPr>
+              <a:xfrm>
+                <a:off x="9262151" y="10900182"/>
+                <a:ext cx="10340369" cy="2462213"/>
+              </a:xfrm>
+              <a:prstGeom prst="rect">
+                <a:avLst/>
+              </a:prstGeom>
+              <a:noFill/>
+            </p:spPr>
+            <p:txBody>
+              <a:bodyPr wrap="square">
+                <a:spAutoFit/>
+              </a:bodyPr>
+              <a:lstStyle/>
+              <a:p>
+                <a:r>
+                  <a:rPr lang="en-GB" sz="2200" dirty="0">
+                    <a:solidFill>
+                      <a:srgbClr val="000000"/>
+                    </a:solidFill>
+                    <a:ea typeface="Roboto" panose="02000000000000000000" pitchFamily="2" charset="0"/>
+                  </a:rPr>
+                  <a:t>One-at-a-time sweeps [3] tested the impact of compound pace, degradation, target response offset, and relative driver/car pace. </a:t>
+                </a:r>
+                <a:r>
+                  <a:rPr lang="en-GB" sz="2200" b="1" dirty="0">
+                    <a:solidFill>
+                      <a:srgbClr val="000000"/>
+                    </a:solidFill>
+                    <a:ea typeface="Roboto" panose="02000000000000000000" pitchFamily="2" charset="0"/>
+                  </a:rPr>
+                  <a:t>Italy 2024 showed particularly strong sensitivity to compound pace offset</a:t>
+                </a:r>
+                <a:r>
+                  <a:rPr lang="en-GB" sz="2200" dirty="0">
+                    <a:solidFill>
+                      <a:srgbClr val="000000"/>
+                    </a:solidFill>
+                    <a:ea typeface="Roboto" panose="02000000000000000000" pitchFamily="2" charset="0"/>
+                  </a:rPr>
+                  <a:t> (shown in graph to the right): varying Hard-compound pace alone can move the result into Marginal; the </a:t>
+                </a:r>
+                <a:r>
+                  <a:rPr lang="en-GB" sz="2200" b="1" dirty="0">
+                    <a:solidFill>
+                      <a:srgbClr val="000000"/>
+                    </a:solidFill>
+                    <a:ea typeface="Roboto" panose="02000000000000000000" pitchFamily="2" charset="0"/>
+                  </a:rPr>
+                  <a:t>Ahead-Marginal crossover occurs at </a:t>
+                </a:r>
+                <a14:m>
+                  <m:oMath xmlns:m="http://schemas.openxmlformats.org/officeDocument/2006/math">
+                    <m:sSub>
+                      <m:sSubPr>
+                        <m:ctrlPr>
+                          <a:rPr lang="en-GB" sz="2200" b="1" i="1" smtClean="0">
+                            <a:solidFill>
+                              <a:srgbClr val="000000"/>
+                            </a:solidFill>
+                            <a:latin typeface="Cambria Math" panose="02040503050406030204" pitchFamily="18" charset="0"/>
+                            <a:ea typeface="Roboto" panose="02000000000000000000" pitchFamily="2" charset="0"/>
+                          </a:rPr>
+                        </m:ctrlPr>
+                      </m:sSubPr>
+                      <m:e>
+                        <m:r>
+                          <a:rPr lang="en-GB" sz="2200" b="1" i="1" smtClean="0">
+                            <a:solidFill>
+                              <a:srgbClr val="000000"/>
+                            </a:solidFill>
+                            <a:latin typeface="Cambria Math" panose="02040503050406030204" pitchFamily="18" charset="0"/>
+                            <a:ea typeface="Roboto" panose="02000000000000000000" pitchFamily="2" charset="0"/>
+                          </a:rPr>
+                          <m:t>𝑪</m:t>
+                        </m:r>
+                      </m:e>
+                      <m:sub>
+                        <m:r>
+                          <a:rPr lang="en-GB" sz="2200" b="1" i="1" smtClean="0">
+                            <a:solidFill>
+                              <a:srgbClr val="000000"/>
+                            </a:solidFill>
+                            <a:latin typeface="Cambria Math" panose="02040503050406030204" pitchFamily="18" charset="0"/>
+                            <a:ea typeface="Roboto" panose="02000000000000000000" pitchFamily="2" charset="0"/>
+                          </a:rPr>
+                          <m:t>𝑯</m:t>
+                        </m:r>
+                      </m:sub>
+                    </m:sSub>
+                    <m:r>
+                      <a:rPr lang="en-GB" sz="2200" b="1" i="1" smtClean="0">
+                        <a:solidFill>
+                          <a:srgbClr val="000000"/>
+                        </a:solidFill>
+                        <a:latin typeface="Cambria Math" panose="02040503050406030204" pitchFamily="18" charset="0"/>
+                        <a:ea typeface="Cambria Math" panose="02040503050406030204" pitchFamily="18" charset="0"/>
+                      </a:rPr>
+                      <m:t>≈−</m:t>
+                    </m:r>
+                    <m:r>
+                      <a:rPr lang="en-GB" sz="2200" b="1" i="1" smtClean="0">
+                        <a:solidFill>
+                          <a:srgbClr val="000000"/>
+                        </a:solidFill>
+                        <a:latin typeface="Cambria Math" panose="02040503050406030204" pitchFamily="18" charset="0"/>
+                        <a:ea typeface="Cambria Math" panose="02040503050406030204" pitchFamily="18" charset="0"/>
+                      </a:rPr>
+                      <m:t>𝟎</m:t>
+                    </m:r>
+                    <m:r>
+                      <a:rPr lang="en-GB" sz="2200" b="1" i="1" smtClean="0">
+                        <a:solidFill>
+                          <a:srgbClr val="000000"/>
+                        </a:solidFill>
+                        <a:latin typeface="Cambria Math" panose="02040503050406030204" pitchFamily="18" charset="0"/>
+                        <a:ea typeface="Cambria Math" panose="02040503050406030204" pitchFamily="18" charset="0"/>
+                      </a:rPr>
+                      <m:t>.</m:t>
+                    </m:r>
+                    <m:r>
+                      <a:rPr lang="en-GB" sz="2200" b="1" i="1" smtClean="0">
+                        <a:solidFill>
+                          <a:srgbClr val="000000"/>
+                        </a:solidFill>
+                        <a:latin typeface="Cambria Math" panose="02040503050406030204" pitchFamily="18" charset="0"/>
+                        <a:ea typeface="Cambria Math" panose="02040503050406030204" pitchFamily="18" charset="0"/>
+                      </a:rPr>
+                      <m:t>𝟎𝟑𝟕</m:t>
+                    </m:r>
+                    <m:r>
+                      <a:rPr lang="en-GB" sz="2200" b="1" i="1" smtClean="0">
+                        <a:solidFill>
+                          <a:srgbClr val="000000"/>
+                        </a:solidFill>
+                        <a:latin typeface="Cambria Math" panose="02040503050406030204" pitchFamily="18" charset="0"/>
+                        <a:ea typeface="Cambria Math" panose="02040503050406030204" pitchFamily="18" charset="0"/>
+                      </a:rPr>
+                      <m:t>𝒔</m:t>
+                    </m:r>
+                  </m:oMath>
+                </a14:m>
+                <a:r>
+                  <a:rPr lang="en-GB" sz="2200" b="1" dirty="0">
+                    <a:solidFill>
+                      <a:srgbClr val="000000"/>
+                    </a:solidFill>
+                    <a:ea typeface="Roboto" panose="02000000000000000000" pitchFamily="2" charset="0"/>
+                  </a:rPr>
+                  <a:t>/lap</a:t>
+                </a:r>
+                <a:r>
+                  <a:rPr lang="en-GB" sz="2200" dirty="0">
+                    <a:solidFill>
+                      <a:srgbClr val="000000"/>
+                    </a:solidFill>
+                    <a:ea typeface="Roboto" panose="02000000000000000000" pitchFamily="2" charset="0"/>
+                  </a:rPr>
+                  <a:t>. Analysis suggested that parameter influence is scenario-dependent; therefore, the research does not claim to create a universal sensitivity ranking of parameters and their influence.</a:t>
+                </a:r>
+                <a:endParaRPr lang="en-US" sz="2200" dirty="0">
+                  <a:ea typeface="Roboto" panose="02000000000000000000" pitchFamily="2" charset="0"/>
+                </a:endParaRPr>
+              </a:p>
+            </p:txBody>
+          </p:sp>
+        </mc:Choice>
+        <mc:Fallback>
+          <p:sp>
+            <p:nvSpPr>
+              <p:cNvPr id="24" name="TextBox 23">
+                <a:extLst>
+                  <a:ext uri="{FF2B5EF4-FFF2-40B4-BE49-F238E27FC236}">
+                    <a16:creationId xmlns:a16="http://schemas.microsoft.com/office/drawing/2014/main" id="{C228FA38-5F17-D49C-BEF5-DDCFC5310ACB}"/>
+                  </a:ext>
+                </a:extLst>
+              </p:cNvPr>
+              <p:cNvSpPr txBox="1">
+                <a:spLocks noRot="1" noChangeAspect="1" noMove="1" noResize="1" noEditPoints="1" noAdjustHandles="1" noChangeArrowheads="1" noChangeShapeType="1" noTextEdit="1"/>
+              </p:cNvSpPr>
+              <p:nvPr/>
+            </p:nvSpPr>
+            <p:spPr>
+              <a:xfrm>
+                <a:off x="9262151" y="10900182"/>
+                <a:ext cx="10340369" cy="2462213"/>
+              </a:xfrm>
+              <a:prstGeom prst="rect">
+                <a:avLst/>
+              </a:prstGeom>
+              <a:blipFill>
+                <a:blip r:embed="rId10"/>
+                <a:stretch>
+                  <a:fillRect l="-766" t="-1733" r="-354" b="-4208"/>
+                </a:stretch>
+              </a:blipFill>
+            </p:spPr>
+            <p:txBody>
+              <a:bodyPr/>
+              <a:lstStyle/>
+              <a:p>
+                <a:r>
+                  <a:rPr lang="en-GB">
+                    <a:noFill/>
+                  </a:rPr>
+                  <a:t> </a:t>
+                </a:r>
+              </a:p>
+            </p:txBody>
+          </p:sp>
+        </mc:Fallback>
+      </mc:AlternateContent>
+      <p:sp>
+        <p:nvSpPr>
+          <p:cNvPr id="27" name="TextBox 26">
+            <a:extLst>
+              <a:ext uri="{FF2B5EF4-FFF2-40B4-BE49-F238E27FC236}">
+                <a16:creationId xmlns:a16="http://schemas.microsoft.com/office/drawing/2014/main" id="{3F74E607-E647-B7FA-3774-ED63903EEA41}"/>
+              </a:ext>
+            </a:extLst>
+          </p:cNvPr>
+          <p:cNvSpPr txBox="1"/>
+          <p:nvPr/>
+        </p:nvSpPr>
+        <p:spPr>
+          <a:xfrm>
+            <a:off x="9275954" y="5072281"/>
+            <a:ext cx="8707120" cy="461665"/>
+          </a:xfrm>
+          <a:prstGeom prst="rect">
+            <a:avLst/>
+          </a:prstGeom>
+          <a:noFill/>
+        </p:spPr>
+        <p:txBody>
+          <a:bodyPr wrap="square" rtlCol="0">
+            <a:spAutoFit/>
+          </a:bodyPr>
+          <a:lstStyle/>
+          <a:p>
+            <a:r>
+              <a:rPr lang="en-US" sz="2400" dirty="0">
+                <a:solidFill>
+                  <a:schemeClr val="accent1"/>
+                </a:solidFill>
+                <a:latin typeface="Roboto" panose="02000000000000000000" pitchFamily="2" charset="0"/>
+                <a:ea typeface="Roboto" panose="02000000000000000000" pitchFamily="2" charset="0"/>
+              </a:rPr>
+              <a:t>SOFTWARE VERIFICATION</a:t>
+            </a:r>
+          </a:p>
+        </p:txBody>
+      </p:sp>
+      <p:sp>
+        <p:nvSpPr>
+          <p:cNvPr id="29" name="TextBox 28">
+            <a:extLst>
+              <a:ext uri="{FF2B5EF4-FFF2-40B4-BE49-F238E27FC236}">
+                <a16:creationId xmlns:a16="http://schemas.microsoft.com/office/drawing/2014/main" id="{75C4A1F9-AF56-5A63-C952-C63A316672FE}"/>
+              </a:ext>
+            </a:extLst>
+          </p:cNvPr>
+          <p:cNvSpPr txBox="1"/>
+          <p:nvPr/>
+        </p:nvSpPr>
+        <p:spPr>
+          <a:xfrm>
+            <a:off x="9284390" y="7630630"/>
+            <a:ext cx="8707120" cy="461665"/>
+          </a:xfrm>
+          <a:prstGeom prst="rect">
+            <a:avLst/>
+          </a:prstGeom>
+          <a:noFill/>
+        </p:spPr>
+        <p:txBody>
+          <a:bodyPr wrap="square" rtlCol="0">
+            <a:spAutoFit/>
+          </a:bodyPr>
+          <a:lstStyle/>
+          <a:p>
+            <a:r>
+              <a:rPr lang="en-US" sz="2400" dirty="0">
+                <a:solidFill>
+                  <a:schemeClr val="accent1"/>
+                </a:solidFill>
+                <a:latin typeface="Roboto" panose="02000000000000000000" pitchFamily="2" charset="0"/>
+                <a:ea typeface="Roboto" panose="02000000000000000000" pitchFamily="2" charset="0"/>
+              </a:rPr>
+              <a:t>MODEL VALIDATION</a:t>
+            </a:r>
+          </a:p>
+        </p:txBody>
+      </p:sp>
+      <p:sp>
+        <p:nvSpPr>
+          <p:cNvPr id="32" name="TextBox 31">
+            <a:extLst>
+              <a:ext uri="{FF2B5EF4-FFF2-40B4-BE49-F238E27FC236}">
+                <a16:creationId xmlns:a16="http://schemas.microsoft.com/office/drawing/2014/main" id="{14DCA57F-A372-6B47-4E9E-E795AF7EEBDA}"/>
+              </a:ext>
+            </a:extLst>
+          </p:cNvPr>
+          <p:cNvSpPr txBox="1"/>
+          <p:nvPr/>
+        </p:nvSpPr>
+        <p:spPr>
+          <a:xfrm>
+            <a:off x="9251743" y="10517820"/>
+            <a:ext cx="5890229" cy="461665"/>
+          </a:xfrm>
+          <a:prstGeom prst="rect">
+            <a:avLst/>
+          </a:prstGeom>
+          <a:noFill/>
+        </p:spPr>
+        <p:txBody>
+          <a:bodyPr wrap="square" rtlCol="0">
+            <a:spAutoFit/>
+          </a:bodyPr>
+          <a:lstStyle/>
+          <a:p>
+            <a:r>
+              <a:rPr lang="en-US" sz="2400" dirty="0">
+                <a:solidFill>
+                  <a:schemeClr val="accent1"/>
+                </a:solidFill>
+                <a:latin typeface="Roboto" panose="02000000000000000000" pitchFamily="2" charset="0"/>
+                <a:ea typeface="Roboto" panose="02000000000000000000" pitchFamily="2" charset="0"/>
+              </a:rPr>
+              <a:t>SENSITIVITY ANALYSIS</a:t>
+            </a:r>
+          </a:p>
+        </p:txBody>
+      </p:sp>
+      <p:pic>
+        <p:nvPicPr>
+          <p:cNvPr id="34" name="Picture 33">
+            <a:extLst>
+              <a:ext uri="{FF2B5EF4-FFF2-40B4-BE49-F238E27FC236}">
+                <a16:creationId xmlns:a16="http://schemas.microsoft.com/office/drawing/2014/main" id="{9445AC05-B1D9-B360-9AD3-70196D80CCFD}"/>
+              </a:ext>
+            </a:extLst>
+          </p:cNvPr>
+          <p:cNvPicPr>
+            <a:picLocks noChangeAspect="1"/>
+          </p:cNvPicPr>
+          <p:nvPr/>
+        </p:nvPicPr>
+        <p:blipFill>
+          <a:blip r:embed="rId11"/>
+          <a:srcRect l="739" t="4068" r="1053" b="2094"/>
+          <a:stretch>
+            <a:fillRect/>
+          </a:stretch>
+        </p:blipFill>
+        <p:spPr>
+          <a:xfrm>
+            <a:off x="9292606" y="14092051"/>
+            <a:ext cx="11662061" cy="6272747"/>
+          </a:xfrm>
+          <a:prstGeom prst="rect">
+            <a:avLst/>
+          </a:prstGeom>
+        </p:spPr>
+      </p:pic>
+      <mc:AlternateContent xmlns:mc="http://schemas.openxmlformats.org/markup-compatibility/2006">
+        <mc:Choice xmlns:a14="http://schemas.microsoft.com/office/drawing/2010/main" Requires="a14">
+          <p:sp>
+            <p:nvSpPr>
+              <p:cNvPr id="65" name="TextBox 64">
+                <a:extLst>
+                  <a:ext uri="{FF2B5EF4-FFF2-40B4-BE49-F238E27FC236}">
+                    <a16:creationId xmlns:a16="http://schemas.microsoft.com/office/drawing/2014/main" id="{D29EF385-CDF0-4616-C732-243DF99D67F6}"/>
+                  </a:ext>
+                </a:extLst>
+              </p:cNvPr>
+              <p:cNvSpPr txBox="1"/>
+              <p:nvPr/>
+            </p:nvSpPr>
+            <p:spPr>
+              <a:xfrm>
+                <a:off x="262061" y="9490040"/>
+                <a:ext cx="8546387" cy="5837560"/>
+              </a:xfrm>
+              <a:prstGeom prst="rect">
+                <a:avLst/>
+              </a:prstGeom>
+              <a:noFill/>
+            </p:spPr>
+            <p:txBody>
+              <a:bodyPr wrap="square">
+                <a:spAutoFit/>
+              </a:bodyPr>
+              <a:lstStyle/>
+              <a:p>
+                <a:pPr>
+                  <a:lnSpc>
+                    <a:spcPct val="105000"/>
+                  </a:lnSpc>
+                  <a:spcAft>
+                    <a:spcPts val="500"/>
+                  </a:spcAft>
+                </a:pPr>
+                <a14:m>
+                  <m:oMath xmlns:m="http://schemas.openxmlformats.org/officeDocument/2006/math">
+                    <m:sSub>
+                      <m:sSubPr>
+                        <m:ctrlPr>
+                          <a:rPr lang="en-GB" sz="2200" b="0" i="1" smtClean="0">
+                            <a:solidFill>
+                              <a:srgbClr val="2D343C"/>
+                            </a:solidFill>
+                            <a:latin typeface="Cambria Math" panose="02040503050406030204" pitchFamily="18" charset="0"/>
+                          </a:rPr>
+                        </m:ctrlPr>
+                      </m:sSubPr>
+                      <m:e>
+                        <m:r>
+                          <a:rPr lang="en-GB" sz="2200" b="0" i="1" smtClean="0">
+                            <a:solidFill>
+                              <a:srgbClr val="2D343C"/>
+                            </a:solidFill>
+                            <a:latin typeface="Cambria Math" panose="02040503050406030204" pitchFamily="18" charset="0"/>
+                          </a:rPr>
+                          <m:t>𝐿</m:t>
+                        </m:r>
+                      </m:e>
+                      <m:sub>
+                        <m:r>
+                          <a:rPr lang="en-GB" sz="2200" b="0" i="1" smtClean="0">
+                            <a:solidFill>
+                              <a:srgbClr val="2D343C"/>
+                            </a:solidFill>
+                            <a:latin typeface="Cambria Math" panose="02040503050406030204" pitchFamily="18" charset="0"/>
+                          </a:rPr>
+                          <m:t>𝑑</m:t>
+                        </m:r>
+                      </m:sub>
+                    </m:sSub>
+                    <m:d>
+                      <m:dPr>
+                        <m:ctrlPr>
+                          <a:rPr lang="en-GB" sz="2200" b="0" i="1" smtClean="0">
+                            <a:solidFill>
+                              <a:srgbClr val="2D343C"/>
+                            </a:solidFill>
+                            <a:latin typeface="Cambria Math" panose="02040503050406030204" pitchFamily="18" charset="0"/>
+                          </a:rPr>
+                        </m:ctrlPr>
+                      </m:dPr>
+                      <m:e>
+                        <m:r>
+                          <a:rPr lang="en-GB" sz="2200" b="0" i="1" smtClean="0">
+                            <a:solidFill>
+                              <a:srgbClr val="2D343C"/>
+                            </a:solidFill>
+                            <a:latin typeface="Cambria Math" panose="02040503050406030204" pitchFamily="18" charset="0"/>
+                          </a:rPr>
+                          <m:t>𝑖</m:t>
+                        </m:r>
+                      </m:e>
+                    </m:d>
+                  </m:oMath>
+                </a14:m>
+                <a:r>
+                  <a:rPr lang="en-GB" sz="2200" dirty="0">
+                    <a:solidFill>
+                      <a:srgbClr val="2D343C"/>
+                    </a:solidFill>
+                  </a:rPr>
+                  <a:t> - Predicted lap time for driver </a:t>
+                </a:r>
+                <a:r>
+                  <a:rPr lang="en-GB" sz="2200" i="1" dirty="0">
+                    <a:solidFill>
+                      <a:srgbClr val="2D343C"/>
+                    </a:solidFill>
+                  </a:rPr>
+                  <a:t>d</a:t>
+                </a:r>
+                <a:r>
+                  <a:rPr lang="en-GB" sz="2200" dirty="0">
+                    <a:solidFill>
+                      <a:srgbClr val="2D343C"/>
+                    </a:solidFill>
+                  </a:rPr>
+                  <a:t> on lap </a:t>
+                </a:r>
+                <a:r>
+                  <a:rPr lang="en-GB" sz="2200" i="1" dirty="0">
+                    <a:solidFill>
+                      <a:srgbClr val="2D343C"/>
+                    </a:solidFill>
+                  </a:rPr>
+                  <a:t>i</a:t>
+                </a:r>
+                <a:br>
+                  <a:rPr lang="en-GB" sz="2200" dirty="0">
+                    <a:solidFill>
+                      <a:srgbClr val="2D343C"/>
+                    </a:solidFill>
+                  </a:rPr>
+                </a:br>
+                <a14:m>
+                  <m:oMath xmlns:m="http://schemas.openxmlformats.org/officeDocument/2006/math">
+                    <m:sSub>
+                      <m:sSubPr>
+                        <m:ctrlPr>
+                          <a:rPr lang="en-GB" sz="2200" b="0" i="1" smtClean="0">
+                            <a:solidFill>
+                              <a:srgbClr val="2D343C"/>
+                            </a:solidFill>
+                            <a:latin typeface="Cambria Math" panose="02040503050406030204" pitchFamily="18" charset="0"/>
+                          </a:rPr>
+                        </m:ctrlPr>
+                      </m:sSubPr>
+                      <m:e>
+                        <m:r>
+                          <a:rPr lang="en-GB" sz="2200" b="0" i="1" smtClean="0">
+                            <a:solidFill>
+                              <a:srgbClr val="2D343C"/>
+                            </a:solidFill>
+                            <a:latin typeface="Cambria Math" panose="02040503050406030204" pitchFamily="18" charset="0"/>
+                          </a:rPr>
+                          <m:t>𝐵</m:t>
+                        </m:r>
+                      </m:e>
+                      <m:sub>
+                        <m:r>
+                          <a:rPr lang="en-GB" sz="2200" b="0" i="1" smtClean="0">
+                            <a:solidFill>
+                              <a:srgbClr val="2D343C"/>
+                            </a:solidFill>
+                            <a:latin typeface="Cambria Math" panose="02040503050406030204" pitchFamily="18" charset="0"/>
+                          </a:rPr>
+                          <m:t>𝑑</m:t>
+                        </m:r>
+                      </m:sub>
+                    </m:sSub>
+                  </m:oMath>
+                </a14:m>
+                <a:r>
+                  <a:rPr lang="en-GB" sz="2200" dirty="0">
+                    <a:solidFill>
+                      <a:srgbClr val="2D343C"/>
+                    </a:solidFill>
+                  </a:rPr>
+                  <a:t> - Baseline lap time for driver </a:t>
+                </a:r>
+                <a:r>
+                  <a:rPr lang="en-GB" sz="2200" i="1" dirty="0">
+                    <a:solidFill>
+                      <a:srgbClr val="2D343C"/>
+                    </a:solidFill>
+                  </a:rPr>
+                  <a:t>d</a:t>
+                </a:r>
+                <a:r>
+                  <a:rPr lang="en-GB" sz="2200" dirty="0">
+                    <a:solidFill>
+                      <a:srgbClr val="2D343C"/>
+                    </a:solidFill>
+                  </a:rPr>
+                  <a:t>, calculated from the reference lap time and driver/car pace offset.</a:t>
+                </a:r>
+                <a:br>
+                  <a:rPr lang="en-GB" sz="2200" dirty="0">
+                    <a:solidFill>
+                      <a:srgbClr val="2D343C"/>
+                    </a:solidFill>
+                  </a:rPr>
+                </a:br>
+                <a14:m>
+                  <m:oMath xmlns:m="http://schemas.openxmlformats.org/officeDocument/2006/math">
+                    <m:sSub>
+                      <m:sSubPr>
+                        <m:ctrlPr>
+                          <a:rPr lang="en-GB" sz="2200" b="0" i="1" smtClean="0">
+                            <a:solidFill>
+                              <a:srgbClr val="2D343C"/>
+                            </a:solidFill>
+                            <a:latin typeface="Cambria Math" panose="02040503050406030204" pitchFamily="18" charset="0"/>
+                          </a:rPr>
+                        </m:ctrlPr>
+                      </m:sSubPr>
+                      <m:e>
+                        <m:r>
+                          <a:rPr lang="en-GB" sz="2200" b="0" i="1" smtClean="0">
+                            <a:solidFill>
+                              <a:srgbClr val="2D343C"/>
+                            </a:solidFill>
+                            <a:latin typeface="Cambria Math" panose="02040503050406030204" pitchFamily="18" charset="0"/>
+                          </a:rPr>
+                          <m:t>𝐶</m:t>
+                        </m:r>
+                      </m:e>
+                      <m:sub>
+                        <m:sSub>
+                          <m:sSubPr>
+                            <m:ctrlPr>
+                              <a:rPr lang="en-GB" sz="2200" b="0" i="1" smtClean="0">
+                                <a:solidFill>
+                                  <a:srgbClr val="2D343C"/>
+                                </a:solidFill>
+                                <a:latin typeface="Cambria Math" panose="02040503050406030204" pitchFamily="18" charset="0"/>
+                              </a:rPr>
+                            </m:ctrlPr>
+                          </m:sSubPr>
+                          <m:e>
+                            <m:r>
+                              <a:rPr lang="en-GB" sz="2200" b="0" i="1" smtClean="0">
+                                <a:solidFill>
+                                  <a:srgbClr val="2D343C"/>
+                                </a:solidFill>
+                                <a:latin typeface="Cambria Math" panose="02040503050406030204" pitchFamily="18" charset="0"/>
+                              </a:rPr>
+                              <m:t>𝑐</m:t>
+                            </m:r>
+                          </m:e>
+                          <m:sub>
+                            <m:r>
+                              <a:rPr lang="en-GB" sz="2200" b="0" i="1" smtClean="0">
+                                <a:solidFill>
+                                  <a:srgbClr val="2D343C"/>
+                                </a:solidFill>
+                                <a:latin typeface="Cambria Math" panose="02040503050406030204" pitchFamily="18" charset="0"/>
+                              </a:rPr>
+                              <m:t>𝑑</m:t>
+                            </m:r>
+                          </m:sub>
+                        </m:sSub>
+                        <m:r>
+                          <a:rPr lang="en-GB" sz="2200" b="0" i="1" smtClean="0">
+                            <a:solidFill>
+                              <a:srgbClr val="2D343C"/>
+                            </a:solidFill>
+                            <a:latin typeface="Cambria Math" panose="02040503050406030204" pitchFamily="18" charset="0"/>
+                          </a:rPr>
+                          <m:t>(</m:t>
+                        </m:r>
+                        <m:r>
+                          <a:rPr lang="en-GB" sz="2200" b="0" i="1" smtClean="0">
+                            <a:solidFill>
+                              <a:srgbClr val="2D343C"/>
+                            </a:solidFill>
+                            <a:latin typeface="Cambria Math" panose="02040503050406030204" pitchFamily="18" charset="0"/>
+                          </a:rPr>
+                          <m:t>𝑖</m:t>
+                        </m:r>
+                        <m:r>
+                          <a:rPr lang="en-GB" sz="2200" b="0" i="1" smtClean="0">
+                            <a:solidFill>
+                              <a:srgbClr val="2D343C"/>
+                            </a:solidFill>
+                            <a:latin typeface="Cambria Math" panose="02040503050406030204" pitchFamily="18" charset="0"/>
+                          </a:rPr>
+                          <m:t>)</m:t>
+                        </m:r>
+                      </m:sub>
+                    </m:sSub>
+                  </m:oMath>
+                </a14:m>
+                <a:r>
+                  <a:rPr lang="en-GB" sz="2200" dirty="0">
+                    <a:solidFill>
+                      <a:srgbClr val="2D343C"/>
+                    </a:solidFill>
+                  </a:rPr>
+                  <a:t> - Lap time offset for compound </a:t>
+                </a:r>
+                <a:r>
+                  <a:rPr lang="en-GB" sz="2200" i="1" dirty="0">
+                    <a:solidFill>
+                      <a:srgbClr val="2D343C"/>
+                    </a:solidFill>
+                  </a:rPr>
+                  <a:t>c </a:t>
+                </a:r>
+                <a:r>
+                  <a:rPr lang="en-GB" sz="2200" dirty="0">
+                    <a:solidFill>
+                      <a:srgbClr val="2D343C"/>
+                    </a:solidFill>
+                  </a:rPr>
+                  <a:t>fitted to driver </a:t>
+                </a:r>
+                <a:r>
+                  <a:rPr lang="en-GB" sz="2200" i="1" dirty="0">
+                    <a:solidFill>
+                      <a:srgbClr val="2D343C"/>
+                    </a:solidFill>
+                  </a:rPr>
+                  <a:t>d </a:t>
+                </a:r>
+                <a:r>
+                  <a:rPr lang="en-GB" sz="2200" dirty="0">
+                    <a:solidFill>
+                      <a:srgbClr val="2D343C"/>
+                    </a:solidFill>
+                  </a:rPr>
+                  <a:t>on lap </a:t>
+                </a:r>
+                <a:r>
+                  <a:rPr lang="en-GB" sz="2200" i="1" dirty="0">
+                    <a:solidFill>
+                      <a:srgbClr val="2D343C"/>
+                    </a:solidFill>
+                  </a:rPr>
+                  <a:t>i</a:t>
+                </a:r>
+                <a:r>
+                  <a:rPr lang="en-GB" sz="2200" dirty="0">
+                    <a:solidFill>
+                      <a:srgbClr val="2D343C"/>
+                    </a:solidFill>
+                  </a:rPr>
+                  <a:t>.</a:t>
+                </a:r>
+                <a:br>
+                  <a:rPr lang="en-GB" sz="2200" dirty="0">
+                    <a:solidFill>
+                      <a:srgbClr val="2D343C"/>
+                    </a:solidFill>
+                  </a:rPr>
+                </a:br>
+                <a14:m>
+                  <m:oMath xmlns:m="http://schemas.openxmlformats.org/officeDocument/2006/math">
+                    <m:sSub>
+                      <m:sSubPr>
+                        <m:ctrlPr>
+                          <a:rPr lang="en-GB" sz="2200" b="0" i="1" smtClean="0">
+                            <a:solidFill>
+                              <a:srgbClr val="2D343C"/>
+                            </a:solidFill>
+                            <a:latin typeface="Cambria Math" panose="02040503050406030204" pitchFamily="18" charset="0"/>
+                          </a:rPr>
+                        </m:ctrlPr>
+                      </m:sSubPr>
+                      <m:e>
+                        <m:r>
+                          <a:rPr lang="en-GB" sz="2200" b="0" i="1" smtClean="0">
+                            <a:solidFill>
+                              <a:srgbClr val="2D343C"/>
+                            </a:solidFill>
+                            <a:latin typeface="Cambria Math" panose="02040503050406030204" pitchFamily="18" charset="0"/>
+                          </a:rPr>
+                          <m:t>𝐷</m:t>
+                        </m:r>
+                      </m:e>
+                      <m:sub>
+                        <m:sSub>
+                          <m:sSubPr>
+                            <m:ctrlPr>
+                              <a:rPr lang="en-GB" sz="2200" i="1">
+                                <a:solidFill>
+                                  <a:srgbClr val="2D343C"/>
+                                </a:solidFill>
+                                <a:latin typeface="Cambria Math" panose="02040503050406030204" pitchFamily="18" charset="0"/>
+                              </a:rPr>
+                            </m:ctrlPr>
+                          </m:sSubPr>
+                          <m:e>
+                            <m:r>
+                              <a:rPr lang="en-GB" sz="2200" i="1">
+                                <a:solidFill>
+                                  <a:srgbClr val="2D343C"/>
+                                </a:solidFill>
+                                <a:latin typeface="Cambria Math" panose="02040503050406030204" pitchFamily="18" charset="0"/>
+                              </a:rPr>
+                              <m:t>𝑐</m:t>
+                            </m:r>
+                          </m:e>
+                          <m:sub>
+                            <m:r>
+                              <a:rPr lang="en-GB" sz="2200" i="1">
+                                <a:solidFill>
+                                  <a:srgbClr val="2D343C"/>
+                                </a:solidFill>
+                                <a:latin typeface="Cambria Math" panose="02040503050406030204" pitchFamily="18" charset="0"/>
+                              </a:rPr>
+                              <m:t>𝑑</m:t>
+                            </m:r>
+                          </m:sub>
+                        </m:sSub>
+                        <m:r>
+                          <a:rPr lang="en-GB" sz="2200" i="1">
+                            <a:solidFill>
+                              <a:srgbClr val="2D343C"/>
+                            </a:solidFill>
+                            <a:latin typeface="Cambria Math" panose="02040503050406030204" pitchFamily="18" charset="0"/>
+                          </a:rPr>
+                          <m:t>(</m:t>
+                        </m:r>
+                        <m:r>
+                          <a:rPr lang="en-GB" sz="2200" i="1">
+                            <a:solidFill>
+                              <a:srgbClr val="2D343C"/>
+                            </a:solidFill>
+                            <a:latin typeface="Cambria Math" panose="02040503050406030204" pitchFamily="18" charset="0"/>
+                          </a:rPr>
+                          <m:t>𝑖</m:t>
+                        </m:r>
+                        <m:r>
+                          <a:rPr lang="en-GB" sz="2200" i="1">
+                            <a:solidFill>
+                              <a:srgbClr val="2D343C"/>
+                            </a:solidFill>
+                            <a:latin typeface="Cambria Math" panose="02040503050406030204" pitchFamily="18" charset="0"/>
+                          </a:rPr>
+                          <m:t>)</m:t>
+                        </m:r>
+                      </m:sub>
+                    </m:sSub>
+                  </m:oMath>
+                </a14:m>
+                <a:r>
+                  <a:rPr lang="en-GB" sz="2200" dirty="0">
+                    <a:solidFill>
+                      <a:srgbClr val="2D343C"/>
+                    </a:solidFill>
+                  </a:rPr>
+                  <a:t> - Lap time loss due to degradation of the fitted tyre compound.</a:t>
+                </a:r>
+                <a:br>
+                  <a:rPr lang="en-GB" sz="2200" dirty="0">
+                    <a:solidFill>
+                      <a:srgbClr val="2D343C"/>
+                    </a:solidFill>
+                  </a:rPr>
+                </a:br>
+                <a14:m>
+                  <m:oMath xmlns:m="http://schemas.openxmlformats.org/officeDocument/2006/math">
+                    <m:sSub>
+                      <m:sSubPr>
+                        <m:ctrlPr>
+                          <a:rPr lang="en-GB" sz="2200" b="0" i="1" smtClean="0">
+                            <a:solidFill>
+                              <a:srgbClr val="2D343C"/>
+                            </a:solidFill>
+                            <a:latin typeface="Cambria Math" panose="02040503050406030204" pitchFamily="18" charset="0"/>
+                          </a:rPr>
+                        </m:ctrlPr>
+                      </m:sSubPr>
+                      <m:e>
+                        <m:r>
+                          <a:rPr lang="en-GB" sz="2200" b="0" i="1" smtClean="0">
+                            <a:solidFill>
+                              <a:srgbClr val="2D343C"/>
+                            </a:solidFill>
+                            <a:latin typeface="Cambria Math" panose="02040503050406030204" pitchFamily="18" charset="0"/>
+                          </a:rPr>
+                          <m:t>𝑎</m:t>
+                        </m:r>
+                      </m:e>
+                      <m:sub>
+                        <m:r>
+                          <a:rPr lang="en-GB" sz="2200" i="1">
+                            <a:solidFill>
+                              <a:srgbClr val="2D343C"/>
+                            </a:solidFill>
+                            <a:latin typeface="Cambria Math" panose="02040503050406030204" pitchFamily="18" charset="0"/>
+                          </a:rPr>
+                          <m:t>𝑑</m:t>
+                        </m:r>
+                      </m:sub>
+                    </m:sSub>
+                    <m:d>
+                      <m:dPr>
+                        <m:ctrlPr>
+                          <a:rPr lang="en-GB" sz="2200" i="1">
+                            <a:solidFill>
+                              <a:srgbClr val="2D343C"/>
+                            </a:solidFill>
+                            <a:latin typeface="Cambria Math" panose="02040503050406030204" pitchFamily="18" charset="0"/>
+                          </a:rPr>
+                        </m:ctrlPr>
+                      </m:dPr>
+                      <m:e>
+                        <m:r>
+                          <a:rPr lang="en-GB" sz="2200" i="1">
+                            <a:solidFill>
+                              <a:srgbClr val="2D343C"/>
+                            </a:solidFill>
+                            <a:latin typeface="Cambria Math" panose="02040503050406030204" pitchFamily="18" charset="0"/>
+                          </a:rPr>
+                          <m:t>𝑖</m:t>
+                        </m:r>
+                      </m:e>
+                    </m:d>
+                  </m:oMath>
+                </a14:m>
+                <a:r>
+                  <a:rPr lang="en-GB" sz="2200" dirty="0">
+                    <a:solidFill>
+                      <a:srgbClr val="2D343C"/>
+                    </a:solidFill>
+                  </a:rPr>
+                  <a:t> - Tyre age for driver </a:t>
+                </a:r>
+                <a:r>
+                  <a:rPr lang="en-GB" sz="2200" i="1" dirty="0">
+                    <a:solidFill>
+                      <a:srgbClr val="2D343C"/>
+                    </a:solidFill>
+                  </a:rPr>
+                  <a:t>d</a:t>
+                </a:r>
+                <a:r>
+                  <a:rPr lang="en-GB" sz="2200" dirty="0">
+                    <a:solidFill>
+                      <a:srgbClr val="2D343C"/>
+                    </a:solidFill>
+                  </a:rPr>
+                  <a:t> on lap </a:t>
+                </a:r>
+                <a:r>
+                  <a:rPr lang="en-GB" sz="2200" i="1" dirty="0">
+                    <a:solidFill>
+                      <a:srgbClr val="2D343C"/>
+                    </a:solidFill>
+                  </a:rPr>
+                  <a:t>i</a:t>
+                </a:r>
+                <a:r>
+                  <a:rPr lang="en-GB" sz="2200" dirty="0">
+                    <a:solidFill>
+                      <a:srgbClr val="2D343C"/>
+                    </a:solidFill>
+                  </a:rPr>
+                  <a:t>.</a:t>
+                </a:r>
+                <a:br>
+                  <a:rPr lang="en-GB" sz="2200" dirty="0">
+                    <a:solidFill>
+                      <a:srgbClr val="2D343C"/>
+                    </a:solidFill>
+                  </a:rPr>
+                </a:br>
+                <a14:m>
+                  <m:oMath xmlns:m="http://schemas.openxmlformats.org/officeDocument/2006/math">
+                    <m:sSub>
+                      <m:sSubPr>
+                        <m:ctrlPr>
+                          <a:rPr lang="en-GB" sz="2200" b="0" i="1" smtClean="0">
+                            <a:solidFill>
+                              <a:srgbClr val="2D343C"/>
+                            </a:solidFill>
+                            <a:latin typeface="Cambria Math" panose="02040503050406030204" pitchFamily="18" charset="0"/>
+                          </a:rPr>
+                        </m:ctrlPr>
+                      </m:sSubPr>
+                      <m:e>
+                        <m:r>
+                          <a:rPr lang="en-GB" sz="2200" b="0" i="1" smtClean="0">
+                            <a:solidFill>
+                              <a:srgbClr val="2D343C"/>
+                            </a:solidFill>
+                            <a:latin typeface="Cambria Math" panose="02040503050406030204" pitchFamily="18" charset="0"/>
+                          </a:rPr>
+                          <m:t>𝑊</m:t>
+                        </m:r>
+                      </m:e>
+                      <m:sub>
+                        <m:r>
+                          <a:rPr lang="en-GB" sz="2200" b="0" i="1" smtClean="0">
+                            <a:solidFill>
+                              <a:srgbClr val="2D343C"/>
+                            </a:solidFill>
+                            <a:latin typeface="Cambria Math" panose="02040503050406030204" pitchFamily="18" charset="0"/>
+                          </a:rPr>
+                          <m:t>𝑐</m:t>
+                        </m:r>
+                      </m:sub>
+                    </m:sSub>
+                    <m:d>
+                      <m:dPr>
+                        <m:ctrlPr>
+                          <a:rPr lang="en-GB" sz="2200" i="1">
+                            <a:solidFill>
+                              <a:srgbClr val="2D343C"/>
+                            </a:solidFill>
+                            <a:latin typeface="Cambria Math" panose="02040503050406030204" pitchFamily="18" charset="0"/>
+                          </a:rPr>
+                        </m:ctrlPr>
+                      </m:dPr>
+                      <m:e>
+                        <m:r>
+                          <a:rPr lang="en-GB" sz="2200" i="1">
+                            <a:solidFill>
+                              <a:srgbClr val="2D343C"/>
+                            </a:solidFill>
+                            <a:latin typeface="Cambria Math" panose="02040503050406030204" pitchFamily="18" charset="0"/>
+                          </a:rPr>
+                          <m:t>𝑖</m:t>
+                        </m:r>
+                      </m:e>
+                    </m:d>
+                  </m:oMath>
+                </a14:m>
+                <a:r>
+                  <a:rPr lang="en-GB" sz="2200" dirty="0">
+                    <a:solidFill>
+                      <a:srgbClr val="2D343C"/>
+                    </a:solidFill>
+                  </a:rPr>
+                  <a:t> - Configurable lap time penalty for compound </a:t>
+                </a:r>
+                <a:r>
+                  <a:rPr lang="en-GB" sz="2200" i="1" dirty="0">
+                    <a:solidFill>
+                      <a:srgbClr val="2D343C"/>
+                    </a:solidFill>
+                  </a:rPr>
+                  <a:t>c</a:t>
+                </a:r>
+                <a:r>
+                  <a:rPr lang="en-GB" sz="2200" dirty="0">
+                    <a:solidFill>
+                      <a:srgbClr val="2D343C"/>
+                    </a:solidFill>
+                  </a:rPr>
+                  <a:t> from tyre warm-up applied following a tyre change.</a:t>
+                </a:r>
+                <a:br>
+                  <a:rPr lang="en-GB" sz="2200" dirty="0">
+                    <a:solidFill>
+                      <a:srgbClr val="2D343C"/>
+                    </a:solidFill>
+                  </a:rPr>
+                </a:br>
+                <a14:m>
+                  <m:oMath xmlns:m="http://schemas.openxmlformats.org/officeDocument/2006/math">
+                    <m:sSub>
+                      <m:sSubPr>
+                        <m:ctrlPr>
+                          <a:rPr lang="en-GB" sz="2200" b="0" i="1" smtClean="0">
+                            <a:solidFill>
+                              <a:srgbClr val="2D343C"/>
+                            </a:solidFill>
+                            <a:latin typeface="Cambria Math" panose="02040503050406030204" pitchFamily="18" charset="0"/>
+                          </a:rPr>
+                        </m:ctrlPr>
+                      </m:sSubPr>
+                      <m:e>
+                        <m:r>
+                          <a:rPr lang="en-GB" sz="2200" b="0" i="1" smtClean="0">
+                            <a:solidFill>
+                              <a:srgbClr val="2D343C"/>
+                            </a:solidFill>
+                            <a:latin typeface="Cambria Math" panose="02040503050406030204" pitchFamily="18" charset="0"/>
+                          </a:rPr>
+                          <m:t>𝑅</m:t>
+                        </m:r>
+                      </m:e>
+                      <m:sub>
+                        <m:r>
+                          <a:rPr lang="en-GB" sz="2200" i="1">
+                            <a:solidFill>
+                              <a:srgbClr val="2D343C"/>
+                            </a:solidFill>
+                            <a:latin typeface="Cambria Math" panose="02040503050406030204" pitchFamily="18" charset="0"/>
+                          </a:rPr>
+                          <m:t>𝑑</m:t>
+                        </m:r>
+                      </m:sub>
+                    </m:sSub>
+                    <m:d>
+                      <m:dPr>
+                        <m:ctrlPr>
+                          <a:rPr lang="en-GB" sz="2200" i="1">
+                            <a:solidFill>
+                              <a:srgbClr val="2D343C"/>
+                            </a:solidFill>
+                            <a:latin typeface="Cambria Math" panose="02040503050406030204" pitchFamily="18" charset="0"/>
+                          </a:rPr>
+                        </m:ctrlPr>
+                      </m:dPr>
+                      <m:e>
+                        <m:r>
+                          <a:rPr lang="en-GB" sz="2200" i="1">
+                            <a:solidFill>
+                              <a:srgbClr val="2D343C"/>
+                            </a:solidFill>
+                            <a:latin typeface="Cambria Math" panose="02040503050406030204" pitchFamily="18" charset="0"/>
+                          </a:rPr>
+                          <m:t>𝑖</m:t>
+                        </m:r>
+                      </m:e>
+                    </m:d>
+                  </m:oMath>
+                </a14:m>
+                <a:r>
+                  <a:rPr lang="en-GB" sz="2200" dirty="0">
+                    <a:solidFill>
+                      <a:srgbClr val="2D343C"/>
+                    </a:solidFill>
+                  </a:rPr>
+                  <a:t> - Configurable lap time penalty to model traffic interaction.</a:t>
+                </a:r>
+                <a:br>
+                  <a:rPr lang="en-GB" sz="2200" dirty="0">
+                    <a:solidFill>
+                      <a:srgbClr val="2D343C"/>
+                    </a:solidFill>
+                  </a:rPr>
+                </a:br>
+                <a14:m>
+                  <m:oMath xmlns:m="http://schemas.openxmlformats.org/officeDocument/2006/math">
+                    <m:sSub>
+                      <m:sSubPr>
+                        <m:ctrlPr>
+                          <a:rPr lang="en-GB" sz="2200" b="0" i="1" smtClean="0">
+                            <a:solidFill>
+                              <a:srgbClr val="2D343C"/>
+                            </a:solidFill>
+                            <a:latin typeface="Cambria Math" panose="02040503050406030204" pitchFamily="18" charset="0"/>
+                          </a:rPr>
+                        </m:ctrlPr>
+                      </m:sSubPr>
+                      <m:e>
+                        <m:r>
+                          <a:rPr lang="en-GB" sz="2200" b="0" i="1" smtClean="0">
+                            <a:solidFill>
+                              <a:srgbClr val="2D343C"/>
+                            </a:solidFill>
+                            <a:latin typeface="Cambria Math" panose="02040503050406030204" pitchFamily="18" charset="0"/>
+                          </a:rPr>
+                          <m:t>𝑄</m:t>
+                        </m:r>
+                      </m:e>
+                      <m:sub>
+                        <m:r>
+                          <a:rPr lang="en-GB" sz="2200" i="1">
+                            <a:solidFill>
+                              <a:srgbClr val="2D343C"/>
+                            </a:solidFill>
+                            <a:latin typeface="Cambria Math" panose="02040503050406030204" pitchFamily="18" charset="0"/>
+                          </a:rPr>
+                          <m:t>𝑑</m:t>
+                        </m:r>
+                      </m:sub>
+                    </m:sSub>
+                    <m:d>
+                      <m:dPr>
+                        <m:ctrlPr>
+                          <a:rPr lang="en-GB" sz="2200" i="1">
+                            <a:solidFill>
+                              <a:srgbClr val="2D343C"/>
+                            </a:solidFill>
+                            <a:latin typeface="Cambria Math" panose="02040503050406030204" pitchFamily="18" charset="0"/>
+                          </a:rPr>
+                        </m:ctrlPr>
+                      </m:dPr>
+                      <m:e>
+                        <m:r>
+                          <a:rPr lang="en-GB" sz="2200" i="1">
+                            <a:solidFill>
+                              <a:srgbClr val="2D343C"/>
+                            </a:solidFill>
+                            <a:latin typeface="Cambria Math" panose="02040503050406030204" pitchFamily="18" charset="0"/>
+                          </a:rPr>
+                          <m:t>𝑖</m:t>
+                        </m:r>
+                      </m:e>
+                    </m:d>
+                  </m:oMath>
+                </a14:m>
+                <a:r>
+                  <a:rPr lang="en-GB" sz="2200" dirty="0">
+                    <a:solidFill>
+                      <a:srgbClr val="2D343C"/>
+                    </a:solidFill>
+                  </a:rPr>
+                  <a:t> - Configurable lap time penalty to represent pit stop loss.</a:t>
+                </a:r>
+                <a:br>
+                  <a:rPr lang="en-GB" sz="2200" dirty="0">
+                    <a:solidFill>
+                      <a:srgbClr val="2D343C"/>
+                    </a:solidFill>
+                  </a:rPr>
+                </a:br>
+                <a14:m>
+                  <m:oMath xmlns:m="http://schemas.openxmlformats.org/officeDocument/2006/math">
+                    <m:sSub>
+                      <m:sSubPr>
+                        <m:ctrlPr>
+                          <a:rPr lang="en-GB" sz="2200" b="0" i="1" smtClean="0">
+                            <a:solidFill>
+                              <a:srgbClr val="2D343C"/>
+                            </a:solidFill>
+                            <a:latin typeface="Cambria Math" panose="02040503050406030204" pitchFamily="18" charset="0"/>
+                          </a:rPr>
+                        </m:ctrlPr>
+                      </m:sSubPr>
+                      <m:e>
+                        <m:r>
+                          <a:rPr lang="en-GB" sz="2200" b="0" i="1" smtClean="0">
+                            <a:solidFill>
+                              <a:srgbClr val="2D343C"/>
+                            </a:solidFill>
+                            <a:latin typeface="Cambria Math" panose="02040503050406030204" pitchFamily="18" charset="0"/>
+                          </a:rPr>
+                          <m:t>𝑇</m:t>
+                        </m:r>
+                      </m:e>
+                      <m:sub>
+                        <m:r>
+                          <a:rPr lang="en-GB" sz="2200" b="0" i="1" smtClean="0">
+                            <a:solidFill>
+                              <a:srgbClr val="2D343C"/>
+                            </a:solidFill>
+                            <a:latin typeface="Cambria Math" panose="02040503050406030204" pitchFamily="18" charset="0"/>
+                          </a:rPr>
+                          <m:t>𝑑</m:t>
+                        </m:r>
+                      </m:sub>
+                    </m:sSub>
+                    <m:d>
+                      <m:dPr>
+                        <m:ctrlPr>
+                          <a:rPr lang="en-GB" sz="2200" b="0" i="1" smtClean="0">
+                            <a:solidFill>
+                              <a:srgbClr val="2D343C"/>
+                            </a:solidFill>
+                            <a:latin typeface="Cambria Math" panose="02040503050406030204" pitchFamily="18" charset="0"/>
+                          </a:rPr>
+                        </m:ctrlPr>
+                      </m:dPr>
+                      <m:e>
+                        <m:r>
+                          <a:rPr lang="en-GB" sz="2200" b="0" i="1" smtClean="0">
+                            <a:solidFill>
+                              <a:srgbClr val="2D343C"/>
+                            </a:solidFill>
+                            <a:latin typeface="Cambria Math" panose="02040503050406030204" pitchFamily="18" charset="0"/>
+                          </a:rPr>
+                          <m:t>𝑚</m:t>
+                        </m:r>
+                      </m:e>
+                    </m:d>
+                  </m:oMath>
+                </a14:m>
+                <a:r>
+                  <a:rPr lang="en-GB" sz="2200" dirty="0">
+                    <a:solidFill>
+                      <a:srgbClr val="2D343C"/>
+                    </a:solidFill>
+                  </a:rPr>
+                  <a:t> - Cumulative predicted time of attacking (𝑎𝑡𝑡) and target (𝑡𝑔𝑡) driver after </a:t>
+                </a:r>
+                <a:r>
+                  <a:rPr lang="en-GB" sz="2200" i="1" dirty="0">
+                    <a:solidFill>
+                      <a:srgbClr val="2D343C"/>
+                    </a:solidFill>
+                  </a:rPr>
+                  <a:t>m</a:t>
+                </a:r>
+                <a:r>
+                  <a:rPr lang="en-GB" sz="2200" dirty="0">
+                    <a:solidFill>
+                      <a:srgbClr val="2D343C"/>
+                    </a:solidFill>
+                  </a:rPr>
+                  <a:t> predicted laps.</a:t>
+                </a:r>
+                <a:br>
+                  <a:rPr lang="en-GB" sz="2200" dirty="0">
+                    <a:solidFill>
+                      <a:srgbClr val="2D343C"/>
+                    </a:solidFill>
+                  </a:rPr>
+                </a:br>
+                <a14:m>
+                  <m:oMath xmlns:m="http://schemas.openxmlformats.org/officeDocument/2006/math">
+                    <m:sSub>
+                      <m:sSubPr>
+                        <m:ctrlPr>
+                          <a:rPr lang="en-GB" sz="2200" b="0" i="1" smtClean="0">
+                            <a:solidFill>
+                              <a:srgbClr val="2D343C"/>
+                            </a:solidFill>
+                            <a:latin typeface="Cambria Math" panose="02040503050406030204" pitchFamily="18" charset="0"/>
+                          </a:rPr>
+                        </m:ctrlPr>
+                      </m:sSubPr>
+                      <m:e>
+                        <m:r>
+                          <a:rPr lang="en-GB" sz="2200" b="0" i="1" smtClean="0">
+                            <a:solidFill>
+                              <a:srgbClr val="2D343C"/>
+                            </a:solidFill>
+                            <a:latin typeface="Cambria Math" panose="02040503050406030204" pitchFamily="18" charset="0"/>
+                          </a:rPr>
+                          <m:t>𝐺</m:t>
+                        </m:r>
+                      </m:e>
+                      <m:sub>
+                        <m:r>
+                          <a:rPr lang="en-GB" sz="2200" b="0" i="1" smtClean="0">
+                            <a:solidFill>
+                              <a:srgbClr val="2D343C"/>
+                            </a:solidFill>
+                            <a:latin typeface="Cambria Math" panose="02040503050406030204" pitchFamily="18" charset="0"/>
+                          </a:rPr>
+                          <m:t>0</m:t>
+                        </m:r>
+                      </m:sub>
+                    </m:sSub>
+                  </m:oMath>
+                </a14:m>
+                <a:r>
+                  <a:rPr lang="en-GB" sz="2200" dirty="0">
+                    <a:solidFill>
+                      <a:srgbClr val="2D343C"/>
+                    </a:solidFill>
+                  </a:rPr>
+                  <a:t>​ – Initial attacker-to-target gap at the decision point.</a:t>
+                </a:r>
+                <a:br>
+                  <a:rPr lang="en-GB" sz="2200" dirty="0">
+                    <a:solidFill>
+                      <a:srgbClr val="2D343C"/>
+                    </a:solidFill>
+                  </a:rPr>
+                </a:br>
+                <a:br>
+                  <a:rPr lang="en-GB" sz="2200" dirty="0">
+                    <a:solidFill>
+                      <a:srgbClr val="2D343C"/>
+                    </a:solidFill>
+                  </a:rPr>
+                </a:br>
+                <a14:m>
+                  <m:oMath xmlns:m="http://schemas.openxmlformats.org/officeDocument/2006/math">
+                    <m:r>
+                      <a:rPr lang="en-GB" sz="2200" b="0" i="1" smtClean="0">
+                        <a:solidFill>
+                          <a:srgbClr val="2D343C"/>
+                        </a:solidFill>
+                        <a:latin typeface="Cambria Math" panose="02040503050406030204" pitchFamily="18" charset="0"/>
+                      </a:rPr>
+                      <m:t>+</m:t>
+                    </m:r>
+                    <m:r>
+                      <a:rPr lang="en-GB" sz="2200" b="0" i="1" smtClean="0">
+                        <a:solidFill>
+                          <a:srgbClr val="2D343C"/>
+                        </a:solidFill>
+                        <a:latin typeface="Cambria Math" panose="02040503050406030204" pitchFamily="18" charset="0"/>
+                      </a:rPr>
+                      <m:t>𝑣𝑒</m:t>
+                    </m:r>
+                    <m:r>
+                      <a:rPr lang="en-GB" sz="2200" b="0" i="1" smtClean="0">
+                        <a:solidFill>
+                          <a:srgbClr val="2D343C"/>
+                        </a:solidFill>
+                        <a:latin typeface="Cambria Math" panose="02040503050406030204" pitchFamily="18" charset="0"/>
+                      </a:rPr>
+                      <m:t> </m:t>
+                    </m:r>
+                    <m:r>
+                      <a:rPr lang="en-GB" sz="2200" b="0" i="1" smtClean="0">
+                        <a:solidFill>
+                          <a:srgbClr val="2D343C"/>
+                        </a:solidFill>
+                        <a:latin typeface="Cambria Math" panose="02040503050406030204" pitchFamily="18" charset="0"/>
+                      </a:rPr>
+                      <m:t>𝐺</m:t>
+                    </m:r>
+                  </m:oMath>
+                </a14:m>
+                <a:r>
+                  <a:rPr lang="en-GB" sz="2200" dirty="0">
+                    <a:solidFill>
+                      <a:srgbClr val="2D343C"/>
+                    </a:solidFill>
+                  </a:rPr>
+                  <a:t> = attacker behind. </a:t>
+                </a:r>
+                <a14:m>
+                  <m:oMath xmlns:m="http://schemas.openxmlformats.org/officeDocument/2006/math">
+                    <m:r>
+                      <a:rPr lang="en-GB" sz="2200" i="1" smtClean="0">
+                        <a:solidFill>
+                          <a:srgbClr val="2D343C"/>
+                        </a:solidFill>
+                        <a:latin typeface="Cambria Math" panose="02040503050406030204" pitchFamily="18" charset="0"/>
+                        <a:ea typeface="Cambria Math" panose="02040503050406030204" pitchFamily="18" charset="0"/>
+                      </a:rPr>
+                      <m:t>∆</m:t>
+                    </m:r>
+                    <m:r>
+                      <a:rPr lang="en-GB" sz="2200" b="0" i="1" smtClean="0">
+                        <a:solidFill>
+                          <a:srgbClr val="2D343C"/>
+                        </a:solidFill>
+                        <a:latin typeface="Cambria Math" panose="02040503050406030204" pitchFamily="18" charset="0"/>
+                        <a:ea typeface="Cambria Math" panose="02040503050406030204" pitchFamily="18" charset="0"/>
+                      </a:rPr>
+                      <m:t>𝐺</m:t>
+                    </m:r>
+                  </m:oMath>
+                </a14:m>
+                <a:r>
+                  <a:rPr lang="en-GB" sz="2200" dirty="0">
+                    <a:solidFill>
+                      <a:srgbClr val="2D343C"/>
+                    </a:solidFill>
+                  </a:rPr>
+                  <a:t> isolates the time generated by the undercut from whether it changes track position.</a:t>
+                </a:r>
+              </a:p>
+            </p:txBody>
+          </p:sp>
+        </mc:Choice>
+        <mc:Fallback>
+          <p:sp>
+            <p:nvSpPr>
+              <p:cNvPr id="65" name="TextBox 64">
+                <a:extLst>
+                  <a:ext uri="{FF2B5EF4-FFF2-40B4-BE49-F238E27FC236}">
+                    <a16:creationId xmlns:a16="http://schemas.microsoft.com/office/drawing/2014/main" id="{D29EF385-CDF0-4616-C732-243DF99D67F6}"/>
+                  </a:ext>
+                </a:extLst>
+              </p:cNvPr>
+              <p:cNvSpPr txBox="1">
+                <a:spLocks noRot="1" noChangeAspect="1" noMove="1" noResize="1" noEditPoints="1" noAdjustHandles="1" noChangeArrowheads="1" noChangeShapeType="1" noTextEdit="1"/>
+              </p:cNvSpPr>
+              <p:nvPr/>
+            </p:nvSpPr>
+            <p:spPr>
+              <a:xfrm>
+                <a:off x="262061" y="9490040"/>
+                <a:ext cx="8546387" cy="5837560"/>
+              </a:xfrm>
+              <a:prstGeom prst="rect">
+                <a:avLst/>
+              </a:prstGeom>
+              <a:blipFill>
+                <a:blip r:embed="rId12"/>
+                <a:stretch>
+                  <a:fillRect l="-927" t="-627" r="-713" b="-1254"/>
+                </a:stretch>
+              </a:blipFill>
+            </p:spPr>
+            <p:txBody>
+              <a:bodyPr/>
+              <a:lstStyle/>
+              <a:p>
+                <a:r>
+                  <a:rPr lang="en-GB">
+                    <a:noFill/>
+                  </a:rPr>
+                  <a:t> </a:t>
+                </a:r>
+              </a:p>
+            </p:txBody>
+          </p:sp>
+        </mc:Fallback>
+      </mc:AlternateContent>
+      <p:sp>
+        <p:nvSpPr>
+          <p:cNvPr id="68" name="TextBox 67">
+            <a:extLst>
+              <a:ext uri="{FF2B5EF4-FFF2-40B4-BE49-F238E27FC236}">
+                <a16:creationId xmlns:a16="http://schemas.microsoft.com/office/drawing/2014/main" id="{ADE21E08-5183-975F-5D3C-06D276A096A6}"/>
+              </a:ext>
+            </a:extLst>
+          </p:cNvPr>
+          <p:cNvSpPr txBox="1"/>
+          <p:nvPr/>
+        </p:nvSpPr>
+        <p:spPr>
+          <a:xfrm>
+            <a:off x="19778308" y="6227537"/>
+            <a:ext cx="10156539" cy="461665"/>
+          </a:xfrm>
+          <a:prstGeom prst="rect">
+            <a:avLst/>
+          </a:prstGeom>
+          <a:noFill/>
+        </p:spPr>
+        <p:txBody>
+          <a:bodyPr wrap="square" rtlCol="0">
+            <a:spAutoFit/>
+          </a:bodyPr>
+          <a:lstStyle/>
+          <a:p>
+            <a:pPr algn="ctr"/>
+            <a:r>
+              <a:rPr lang="en-US" sz="2400" dirty="0">
+                <a:solidFill>
+                  <a:schemeClr val="accent1"/>
+                </a:solidFill>
+                <a:latin typeface="Roboto" panose="02000000000000000000" pitchFamily="2" charset="0"/>
+                <a:ea typeface="Roboto" panose="02000000000000000000" pitchFamily="2" charset="0"/>
+              </a:rPr>
+              <a:t>Sensitivity Analysis – Compound Offset (Italy 2024)</a:t>
+            </a:r>
+          </a:p>
+        </p:txBody>
+      </p:sp>
+      <p:sp>
+        <p:nvSpPr>
+          <p:cNvPr id="70" name="TextBox 69">
+            <a:extLst>
+              <a:ext uri="{FF2B5EF4-FFF2-40B4-BE49-F238E27FC236}">
+                <a16:creationId xmlns:a16="http://schemas.microsoft.com/office/drawing/2014/main" id="{503AE60F-A6D2-015C-61A6-252E7270D387}"/>
+              </a:ext>
+            </a:extLst>
+          </p:cNvPr>
+          <p:cNvSpPr txBox="1"/>
+          <p:nvPr/>
+        </p:nvSpPr>
+        <p:spPr>
+          <a:xfrm>
+            <a:off x="19773067" y="2607393"/>
+            <a:ext cx="10156539" cy="461665"/>
+          </a:xfrm>
+          <a:prstGeom prst="rect">
+            <a:avLst/>
+          </a:prstGeom>
+          <a:noFill/>
+        </p:spPr>
+        <p:txBody>
+          <a:bodyPr wrap="square" rtlCol="0">
+            <a:spAutoFit/>
+          </a:bodyPr>
+          <a:lstStyle/>
+          <a:p>
+            <a:pPr algn="ctr"/>
+            <a:r>
+              <a:rPr lang="en-US" sz="2400" dirty="0">
+                <a:solidFill>
+                  <a:schemeClr val="accent1"/>
+                </a:solidFill>
+                <a:latin typeface="Roboto" panose="02000000000000000000" pitchFamily="2" charset="0"/>
+                <a:ea typeface="Roboto" panose="02000000000000000000" pitchFamily="2" charset="0"/>
+              </a:rPr>
+              <a:t>Historic Validation Cases</a:t>
+            </a:r>
+          </a:p>
+        </p:txBody>
+      </p:sp>
+      <p:sp>
+        <p:nvSpPr>
+          <p:cNvPr id="77" name="Rectangle 76">
+            <a:extLst>
+              <a:ext uri="{FF2B5EF4-FFF2-40B4-BE49-F238E27FC236}">
+                <a16:creationId xmlns:a16="http://schemas.microsoft.com/office/drawing/2014/main" id="{25356134-8616-6F2C-A305-B53CAEEFEC6B}"/>
+              </a:ext>
+            </a:extLst>
+          </p:cNvPr>
+          <p:cNvSpPr/>
+          <p:nvPr/>
+        </p:nvSpPr>
+        <p:spPr>
+          <a:xfrm>
+            <a:off x="165719" y="20405321"/>
+            <a:ext cx="20737657" cy="542214"/>
+          </a:xfrm>
+          <a:prstGeom prst="rect">
+            <a:avLst/>
+          </a:prstGeom>
+          <a:solidFill>
+            <a:schemeClr val="accent1">
+              <a:alpha val="10000"/>
+            </a:schemeClr>
+          </a:solidFill>
+          <a:ln>
+            <a:noFill/>
+          </a:ln>
+        </p:spPr>
+        <p:style>
+          <a:lnRef idx="2">
+            <a:schemeClr val="accent1">
+              <a:shade val="15000"/>
+            </a:schemeClr>
+          </a:lnRef>
+          <a:fillRef idx="1">
+            <a:schemeClr val="accent1"/>
+          </a:fillRef>
+          <a:effectRef idx="0">
+            <a:schemeClr val="accent1"/>
+          </a:effectRef>
+          <a:fontRef idx="minor">
+            <a:schemeClr val="lt1"/>
+          </a:fontRef>
+        </p:style>
+        <p:txBody>
+          <a:bodyPr rtlCol="0" anchor="ctr"/>
+          <a:lstStyle/>
+          <a:p>
+            <a:r>
+              <a:rPr lang="en-GB" sz="1800" b="1" dirty="0">
+                <a:solidFill>
+                  <a:srgbClr val="2D343C"/>
+                </a:solidFill>
+              </a:rPr>
+              <a:t>References: </a:t>
+            </a:r>
+            <a:r>
+              <a:rPr lang="en-GB" sz="1800" dirty="0">
+                <a:solidFill>
+                  <a:srgbClr val="2D343C"/>
+                </a:solidFill>
+              </a:rPr>
+              <a:t>[1] Formula 1, “Undercut vs Overcut: Why Tyre Strategy Was So Finely Poised in Monaco” 2021. [2] OpenF1 Contributors, “OpenF1,” 2024, </a:t>
+            </a:r>
+            <a:r>
+              <a:rPr lang="en-GB" sz="1800" dirty="0" err="1">
+                <a:solidFill>
+                  <a:srgbClr val="2D343C"/>
+                </a:solidFill>
+              </a:rPr>
+              <a:t>doi</a:t>
+            </a:r>
+            <a:r>
+              <a:rPr lang="en-GB" sz="1800" dirty="0">
+                <a:solidFill>
+                  <a:srgbClr val="2D343C"/>
+                </a:solidFill>
+              </a:rPr>
+              <a:t>: 10.5281/zenodo.11241279. [3] S. Razavi and H. V. Gupta, “What Do We Mean by Sensitivity Analysis?” Water </a:t>
+            </a:r>
+            <a:r>
+              <a:rPr lang="en-GB" sz="1800" dirty="0" err="1">
+                <a:solidFill>
+                  <a:srgbClr val="2D343C"/>
+                </a:solidFill>
+              </a:rPr>
+              <a:t>Resour</a:t>
+            </a:r>
+            <a:r>
+              <a:rPr lang="en-GB" sz="1800" dirty="0">
+                <a:solidFill>
+                  <a:srgbClr val="2D343C"/>
+                </a:solidFill>
+              </a:rPr>
+              <a:t>. Res., vol. 51, no. 5, pp. 3070–3092, 2015.</a:t>
+            </a:r>
+            <a:endParaRPr lang="en-US" sz="1800" dirty="0">
+              <a:solidFill>
+                <a:srgbClr val="2D343C"/>
+              </a:solidFill>
             </a:endParaRPr>
           </a:p>
         </p:txBody>
@@ -11950,86 +13102,6 @@
     <p:extLst>
       <p:ext uri="{BB962C8B-B14F-4D97-AF65-F5344CB8AC3E}">
         <p14:creationId xmlns:p14="http://schemas.microsoft.com/office/powerpoint/2010/main" val="3869211708"/>
-      </p:ext>
-    </p:extLst>
-  </p:cSld>
-  <p:clrMapOvr>
-    <a:masterClrMapping/>
-  </p:clrMapOvr>
-</p:sld>
-</file>
-
-<file path=ppt/slides/slide2.xml><?xml version="1.0" encoding="utf-8"?>
-<p:sld xmlns:a="http://schemas.openxmlformats.org/drawingml/2006/main" xmlns:r="http://schemas.openxmlformats.org/officeDocument/2006/relationships" xmlns:p="http://schemas.openxmlformats.org/presentationml/2006/main">
-  <p:cSld>
-    <p:spTree>
-      <p:nvGrpSpPr>
-        <p:cNvPr id="1" name=""/>
-        <p:cNvGrpSpPr/>
-        <p:nvPr/>
-      </p:nvGrpSpPr>
-      <p:grpSpPr>
-        <a:xfrm>
-          <a:off x="0" y="0"/>
-          <a:ext cx="0" cy="0"/>
-          <a:chOff x="0" y="0"/>
-          <a:chExt cx="0" cy="0"/>
-        </a:xfrm>
-      </p:grpSpPr>
-      <p:sp>
-        <p:nvSpPr>
-          <p:cNvPr id="2" name="Title 1">
-            <a:extLst>
-              <a:ext uri="{FF2B5EF4-FFF2-40B4-BE49-F238E27FC236}">
-                <a16:creationId xmlns:a16="http://schemas.microsoft.com/office/drawing/2014/main" id="{04AC4723-9F3E-B6DC-1499-49FB35D46775}"/>
-              </a:ext>
-            </a:extLst>
-          </p:cNvPr>
-          <p:cNvSpPr>
-            <a:spLocks noGrp="1"/>
-          </p:cNvSpPr>
-          <p:nvPr>
-            <p:ph type="title"/>
-          </p:nvPr>
-        </p:nvSpPr>
-        <p:spPr/>
-        <p:txBody>
-          <a:bodyPr/>
-          <a:lstStyle/>
-          <a:p>
-            <a:endParaRPr lang="en-GB"/>
-          </a:p>
-        </p:txBody>
-      </p:sp>
-      <p:sp>
-        <p:nvSpPr>
-          <p:cNvPr id="3" name="Content Placeholder 2">
-            <a:extLst>
-              <a:ext uri="{FF2B5EF4-FFF2-40B4-BE49-F238E27FC236}">
-                <a16:creationId xmlns:a16="http://schemas.microsoft.com/office/drawing/2014/main" id="{31E9E6C1-1337-59BB-BEDA-1F866F889351}"/>
-              </a:ext>
-            </a:extLst>
-          </p:cNvPr>
-          <p:cNvSpPr>
-            <a:spLocks noGrp="1"/>
-          </p:cNvSpPr>
-          <p:nvPr>
-            <p:ph idx="1"/>
-          </p:nvPr>
-        </p:nvSpPr>
-        <p:spPr/>
-        <p:txBody>
-          <a:bodyPr/>
-          <a:lstStyle/>
-          <a:p>
-            <a:endParaRPr lang="en-GB"/>
-          </a:p>
-        </p:txBody>
-      </p:sp>
-    </p:spTree>
-    <p:extLst>
-      <p:ext uri="{BB962C8B-B14F-4D97-AF65-F5344CB8AC3E}">
-        <p14:creationId xmlns:p14="http://schemas.microsoft.com/office/powerpoint/2010/main" val="2283009349"/>
       </p:ext>
     </p:extLst>
   </p:cSld>

--- a/poster.pptx
+++ b/poster.pptx
@@ -9971,7 +9971,7 @@
               <p:nvPr>
                 <p:extLst>
                   <p:ext uri="{D42A27DB-BD31-4B8C-83A1-F6EECF244321}">
-                    <p14:modId xmlns:p14="http://schemas.microsoft.com/office/powerpoint/2010/main" val="419790620"/>
+                    <p14:modId xmlns:p14="http://schemas.microsoft.com/office/powerpoint/2010/main" val="3932641516"/>
                   </p:ext>
                 </p:extLst>
               </p:nvPr>
@@ -10169,7 +10169,7 @@
                           <a:pPr algn="ctr"/>
                           <a:r>
                             <a:rPr lang="en-GB" sz="2200" dirty="0"/>
-                            <a:t>1.148s</a:t>
+                            <a:t>1.148 s</a:t>
                           </a:r>
                         </a:p>
                       </a:txBody>
@@ -10248,7 +10248,7 @@
                           <a:pPr algn="ctr"/>
                           <a:r>
                             <a:rPr lang="en-GB" sz="2200" dirty="0"/>
-                            <a:t>0.024s</a:t>
+                            <a:t>0.024 s</a:t>
                           </a:r>
                         </a:p>
                       </a:txBody>
@@ -10327,7 +10327,7 @@
                           <a:pPr algn="ctr"/>
                           <a:r>
                             <a:rPr lang="en-GB" sz="2200" dirty="0"/>
-                            <a:t>1.615s</a:t>
+                            <a:t>1.615 s</a:t>
                           </a:r>
                         </a:p>
                       </a:txBody>
@@ -10405,9 +10405,10 @@
                         <a:p>
                           <a:pPr algn="ctr"/>
                           <a:r>
-                            <a:rPr lang="en-GB" sz="2200" dirty="0"/>
-                            <a:t>0.189s</a:t>
+                            <a:rPr lang="en-GB" sz="2200"/>
+                            <a:t>0.189 s</a:t>
                           </a:r>
+                          <a:endParaRPr lang="en-GB" sz="2200" dirty="0"/>
                         </a:p>
                       </a:txBody>
                       <a:tcPr anchor="ctr"/>
@@ -10439,7 +10440,7 @@
               <p:nvPr>
                 <p:extLst>
                   <p:ext uri="{D42A27DB-BD31-4B8C-83A1-F6EECF244321}">
-                    <p14:modId xmlns:p14="http://schemas.microsoft.com/office/powerpoint/2010/main" val="419790620"/>
+                    <p14:modId xmlns:p14="http://schemas.microsoft.com/office/powerpoint/2010/main" val="3932641516"/>
                   </p:ext>
                 </p:extLst>
               </p:nvPr>
@@ -10617,7 +10618,7 @@
                           <a:pPr algn="ctr"/>
                           <a:r>
                             <a:rPr lang="en-GB" sz="2200" dirty="0"/>
-                            <a:t>1.148s</a:t>
+                            <a:t>1.148 s</a:t>
                           </a:r>
                         </a:p>
                       </a:txBody>
@@ -10696,7 +10697,7 @@
                           <a:pPr algn="ctr"/>
                           <a:r>
                             <a:rPr lang="en-GB" sz="2200" dirty="0"/>
-                            <a:t>0.024s</a:t>
+                            <a:t>0.024 s</a:t>
                           </a:r>
                         </a:p>
                       </a:txBody>
@@ -10775,7 +10776,7 @@
                           <a:pPr algn="ctr"/>
                           <a:r>
                             <a:rPr lang="en-GB" sz="2200" dirty="0"/>
-                            <a:t>1.615s</a:t>
+                            <a:t>1.615 s</a:t>
                           </a:r>
                         </a:p>
                       </a:txBody>
@@ -10853,9 +10854,10 @@
                         <a:p>
                           <a:pPr algn="ctr"/>
                           <a:r>
-                            <a:rPr lang="en-GB" sz="2200" dirty="0"/>
-                            <a:t>0.189s</a:t>
+                            <a:rPr lang="en-GB" sz="2200"/>
+                            <a:t>0.189 s</a:t>
                           </a:r>
+                          <a:endParaRPr lang="en-GB" sz="2200" dirty="0"/>
                         </a:p>
                       </a:txBody>
                       <a:tcPr anchor="ctr"/>
